--- a/documenti/SpaceX_prezzo_e_valore.pptx
+++ b/documenti/SpaceX_prezzo_e_valore.pptx
@@ -2286,7 +2286,7 @@
           <a:p>
             <a:r>
               <a:rPr lang="en-US" dirty="0"/>
-              <a:t>Primo strumento, i multipli. Il corso dice che i comparabili devono avere stesso rischio e stessa crescita, e che trovarli è difficile. Per SpaceX un comparabile non esiste. Ma la SEC ci dà tre segmenti: Space, cioè lanci e contratti con NASA e Difesa; Starlink; e l'AI, cioè xAI. Ognuno ha il suo paniere: la difesa vale circa 1,9x i ricavi, le telecomunicazioni 2,7x, i fornitori di calcolo 7,9x. Non cerco un clone di SpaceX, cerco tre panieri.</a:t>
+              <a:t>Primo strumento, i multipli. Il corso dice che i comparabili devono avere stesso rischio e stessa crescita, e che trovarli è difficile. Per SpaceX un comparabile non esiste. Ma la SEC ci dà tre segmenti: Space, cioè lanci e contratti con NASA e Difesa; Starlink; e l'AI, cioè xAI. Ognuno ha il suo paniere: la difesa vale circa 1,9x i ricavi, Starlink 2,7x, cioè soprattutto telecom, con la parte governativa ai multipli della difesa, e i fornitori di calcolo 7,9x. Non cerco un clone di SpaceX, cerco tre panieri.</a:t>
             </a:r>
             <a:endParaRPr lang="en-US" dirty="0"/>
           </a:p>
@@ -2374,7 +2374,7 @@
           <a:p>
             <a:r>
               <a:rPr lang="en-US" dirty="0"/>
-              <a:t>Applico i tre panieri ai ricavi di quest'anno. SpaceX vale fra 144 e 187 miliardi, cioè 15-19 dollari per azione. Il mercato la paga più di dieci volte tanto. Anche valutando l'AI come OpenAI e Anthropic, fra 20 e 27 volte i ricavi, arrivo a 35-44 dollari. E per arrivare al prezzo Starlink dovrebbe valere 96x i ricavi, contro 2,7 delle telecom. Quindi il prezzo non è un prezzo relativo. Però i multipli di imprese mature non vedono la crescita: per questo serve il DCF.</a:t>
+              <a:t>Applico i tre panieri ai ricavi di quest'anno. SpaceX vale fra 144 e 187 miliardi, cioè 15-19 dollari per azione. Il mercato la paga più di dieci volte tanto. Anche valutando l'AI come OpenAI e Anthropic, fra 20 e 27 volte i ricavi, arrivo a 35-44 dollari. E per arrivare al prezzo Starlink dovrebbe valere 96x i ricavi, contro 2,7 del suo paniere, e fra gli operatori con ricavi veri nessuno supera 7,5. Quindi il prezzo non è un prezzo relativo. Però i multipli di imprese mature non vedono la crescita: per questo serve il DCF.</a:t>
             </a:r>
             <a:endParaRPr lang="en-US" dirty="0"/>
           </a:p>
@@ -8189,7 +8189,7 @@
                 <a:ea typeface="Inter" pitchFamily="34" charset="-122"/>
                 <a:cs typeface="Inter" pitchFamily="34" charset="-120"/>
               </a:rPr>
-              <a:t>il caso completo, 30 pagine, con tutti gli esibiti</a:t>
+              <a:t>il caso completo, 31 pagine, con tutti gli esibiti</a:t>
             </a:r>
             <a:endParaRPr lang="en-US" sz="1400" dirty="0"/>
           </a:p>
@@ -18431,7 +18431,7 @@
                 <a:ea typeface="Inter" pitchFamily="34" charset="-122"/>
                 <a:cs typeface="Inter" pitchFamily="34" charset="-120"/>
               </a:rPr>
-              <a:t>EV/ricavi del paniere: telecomunicazioni</a:t>
+              <a:t>EV/ricavi del paniere: telecom, più difesa per Starshield</a:t>
             </a:r>
             <a:endParaRPr lang="en-US" sz="1300" dirty="0"/>
           </a:p>
@@ -18658,7 +18658,7 @@
                 <a:ea typeface="Inter" pitchFamily="34" charset="-122"/>
                 <a:cs typeface="Inter" pitchFamily="34" charset="-120"/>
               </a:rPr>
-              <a:t>EV/ricavi del paniere: hyperscaler e cloud</a:t>
+              <a:t>EV/ricavi del paniere: hyperscaler, cloud e pubblicità</a:t>
             </a:r>
             <a:endParaRPr lang="en-US" sz="1300" dirty="0"/>
           </a:p>
@@ -19088,7 +19088,7 @@
                 <a:ea typeface="Inter" pitchFamily="34" charset="-122"/>
                 <a:cs typeface="Inter" pitchFamily="34" charset="-120"/>
               </a:rPr>
-              <a:t>i ricavi: quanto dovrebbe valere Starlink per arrivare al prezzo (telecom 2,7x)</a:t>
+              <a:t>i ricavi: quanto dovrebbe valere Starlink per arrivare al prezzo (il suo paniere: 2,7x)</a:t>
             </a:r>
             <a:endParaRPr lang="en-US" sz="1700" dirty="0"/>
           </a:p>

--- a/documenti/SpaceX_prezzo_e_valore.pptx
+++ b/documenti/SpaceX_prezzo_e_valore.pptx
@@ -8189,7 +8189,7 @@
                 <a:ea typeface="Inter" pitchFamily="34" charset="-122"/>
                 <a:cs typeface="Inter" pitchFamily="34" charset="-120"/>
               </a:rPr>
-              <a:t>il caso completo, 31 pagine, con tutti gli esibiti</a:t>
+              <a:t>il caso completo, 32 pagine, con tutti gli esibiti</a:t>
             </a:r>
             <a:endParaRPr lang="en-US" sz="1400" dirty="0"/>
           </a:p>

--- a/documenti/SpaceX_prezzo_e_valore.pptx
+++ b/documenti/SpaceX_prezzo_e_valore.pptx
@@ -30,9 +30,10 @@
     <p:sldId id="278" r:id="rId24"/>
     <p:sldId id="279" r:id="rId25"/>
     <p:sldId id="280" r:id="rId26"/>
+    <p:sldId id="281" r:id="rId27"/>
   </p:sldIdLst>
   <p:notesMasterIdLst>
-    <p:notesMasterId r:id="rId27"/>
+    <p:notesMasterId r:id="rId28"/>
   </p:notesMasterIdLst>
   <p:sldSz cx="12192000" cy="6858000"/>
   <p:notesSz cx="6858000" cy="12192000"/>
@@ -790,7 +791,7 @@
           <a:p>
             <a:r>
               <a:rPr lang="en-US" dirty="0"/>
-              <a:t>Un altro indizio. In quattro mesi il prezzo è salito del 57% in tre giorni, è sceso a 108 $ ad agosto ed è risalito a 168 $. Sui flussi, nel frattempo, è arrivata solo una trimestrale. Il valore stimato si muove con le ipotesi dentro una fascia di 48-66 dollari. Il prezzo dipende anche da altro, e ci torno fra poco.</a:t>
+              <a:t>Un altro indizio. In quattro mesi il prezzo è salito del 57% in tre giorni, è sceso a 108 $ ad agosto ed è risalito a 168 $. Sui flussi, nel frattempo, è arrivata solo una trimestrale. Il valore resta fra 48 e 66. Il prezzo dipende anche da altro, e ci torno fra poco.</a:t>
             </a:r>
             <a:endParaRPr lang="en-US" dirty="0"/>
           </a:p>
@@ -966,7 +967,7 @@
           <a:p>
             <a:r>
               <a:rPr lang="en-US" dirty="0"/>
-              <a:t>L'obiezione più seria: il prezzo di 135 non l'hanno deciso dei dilettanti, ma ventidue banche guidate da Goldman e Morgan Stanley, e il libro ordini era coperto più di quattro volte. Quindi una spiegazione di quel prezzo esiste. È vero, ed è la domanda: a 135 c'erano compratori per centinaia di miliardi. Ma un prezzo di collocamento, come dicono Benveniste e Spindt, misura che cosa gli investitori sono disposti a pagare, non quanto valgono i flussi: è un prezzo, non un valore. E la letteratura mostra che, valutati ai multipli dei comparabili, i prezzi d'offerta delle IPO risultano di solito sopravvalutati, non sottovalutati.</a:t>
+              <a:t>Lo stesso risultato visto da un'altra parte. Nel mio DCF l'AI nel 2036 vale circa 6 volte l'EBITDA, il multiplo di un'impresa matura. Gli hyperscaler oggi valgono 22 volte. Se l'AI a regime valesse come loro, ma pesata per le probabilità, SpaceX varrebbe 103-111 dollari: ancora sotto il collocamento. Se in più l'AI riuscisse di sicuro, 152-183. Il prezzo, 167,60 $, sta esattamente lì: il mercato paga un'AI che vale come Microsoft e che riesce con certezza.</a:t>
             </a:r>
             <a:endParaRPr lang="en-US" dirty="0"/>
           </a:p>
@@ -1054,7 +1055,7 @@
           <a:p>
             <a:r>
               <a:rPr lang="en-US" dirty="0"/>
-              <a:t>E perché il prezzo può restare così lontano dal valore? Tre fatti. Primo, il consorzio non è un valutatore indipendente: dieci banche sono anche finanziatrici di SpaceX, e i loro target hanno una mediana di 228 dollari contro 173 degli analisti esterni. È il conflitto di interessi di Michaely e Womack. Secondo, al debutto erano negoziabili solo il 4,9% delle azioni, e vendere allo scoperto costava molto: Miller dice che in queste condizioni il prezzo riflette gli ottimisti, perché i pessimisti restano fuori. Le banche non hanno sbagliato i conti: hanno prezzato la possibilità di un'impresa molto più grande, e hanno trovato chi la pagava.</a:t>
+              <a:t>L'obiezione più seria: il prezzo di 135 non l'hanno deciso dei dilettanti, ma ventidue banche guidate da Goldman e Morgan Stanley, e il libro ordini era coperto più di quattro volte. Quindi una spiegazione di quel prezzo esiste. È vero, ed è la domanda: a 135 c'erano compratori per centinaia di miliardi. Ma un prezzo di collocamento, come dicono Benveniste e Spindt, misura che cosa gli investitori sono disposti a pagare, non quanto valgono i flussi: è un prezzo, non un valore.</a:t>
             </a:r>
             <a:endParaRPr lang="en-US" dirty="0"/>
           </a:p>
@@ -1142,7 +1143,7 @@
           <a:p>
             <a:r>
               <a:rPr lang="en-US" dirty="0"/>
-              <a:t>Quindi la risposta alla domanda è no. I multipli dicono che il prezzo non è un prezzo relativo. Il DCF e il valore dell'insieme dicono che i flussi valgono 60 $, il 36% del prezzo, e né la certezza delle milestone né le sinergie chiudono la distanza. Il DCF inverso dice che cosa c'è dentro il prezzo: un'impresa quattro volte più grande del mio caso di successo. Il prezzo di SpaceX rappresenta qualcosa, ma non il valore di ciò che l'impresa può dimostrare oggi: rappresenta il prezzo della possibilità che diventi molto più grande. Grazie, sono pronto alle domande.</a:t>
+              <a:t>E perché il prezzo può restare così lontano dal valore? Tre fatti. Primo, il consorzio non è un valutatore indipendente: dieci banche sono anche finanziatrici di SpaceX, e i loro target hanno una mediana di 228 dollari contro 173 degli analisti esterni. È il conflitto di interessi di Michaely e Womack. Secondo, al debutto erano negoziabili solo il 4,9% delle azioni, e vendere allo scoperto costava molto: Miller dice che in queste condizioni il prezzo riflette gli ottimisti, perché i pessimisti restano fuori. Le banche non hanno sbagliato i conti: hanno prezzato la possibilità di un'impresa molto più grande, e hanno trovato chi la pagava.</a:t>
             </a:r>
             <a:endParaRPr lang="en-US" dirty="0"/>
           </a:p>
@@ -1230,7 +1231,7 @@
           <a:p>
             <a:r>
               <a:rPr lang="en-US" dirty="0"/>
-              <a:t>Tutte le fonti sono su questo sito, con i link: documenti SEC, prezzi, articoli accademici, analisti e stampa. Ci sono anche il report completo, questa presentazione e il modello Excel in formule. Basta inquadrare il codice.</a:t>
+              <a:t>Quindi la risposta alla domanda è no. I multipli dicono che il prezzo non è un prezzo relativo. Il DCF e il valore dell'insieme dicono che i flussi valgono 60 $, il 36% del prezzo, e né la certezza delle milestone né le sinergie chiudono la distanza. Il DCF inverso dice che cosa c'è dentro il prezzo: un'impresa quattro volte più grande del mio caso di successo. Il prezzo di SpaceX rappresenta qualcosa, ma non il valore di ciò che l'impresa può dimostrare oggi: rappresenta il prezzo della possibilità che diventi molto più grande. Grazie, sono pronto alle domande.</a:t>
             </a:r>
             <a:endParaRPr lang="en-US" dirty="0"/>
           </a:p>
@@ -1318,7 +1319,7 @@
           <a:p>
             <a:r>
               <a:rPr lang="en-US" dirty="0"/>
-              <a:t>Se mi chiedono come evito di contare il rischio due volte. Il rischio tecnico, per esempio se Starship funziona, lo metto nei flussi: ogni flusso è pesato per la probabilità cumulata delle sue milestone, come nella rNPV delle pipeline farmaceutiche. Il rischio sistematico lo metto nel tasso, con un beta per stadio: prima della milestone il segmento è un'opzione su un'impresa futura e ha un beta alto, dopo prende il beta del suo paniere. Il beta è riunleverato con la formula del corso. Usare un tasso da venture capital e insieme pesare per la probabilità conterebbe il rischio tecnico due volte.</a:t>
+              <a:t>Tutte le fonti sono su questo sito, con i link: documenti SEC, prezzi, articoli accademici, analisti e stampa. Ci sono anche il report completo, questa presentazione e il modello Excel in formule. Basta inquadrare il codice.</a:t>
             </a:r>
             <a:endParaRPr lang="en-US" dirty="0"/>
           </a:p>
@@ -1406,7 +1407,7 @@
           <a:p>
             <a:r>
               <a:rPr lang="en-US" dirty="0"/>
-              <a:t>Il dettaglio dei multipli. Uso i ricavi 2026 stimati per segmento, che sono sotto il consenso degli analisti, e i multipli EV su ricavi forward e degli ultimi dodici mesi dei tre panieri. Per l'AI c'è anche la versione con i multipli dei laboratori privati, OpenAI e Anthropic, fra 20 e 27 volte i ricavi. Anche raddoppiando i ricavi, il valore ai multipli resterebbe molto sotto il prezzo.</a:t>
+              <a:t>Se mi chiedono come evito di contare il rischio due volte. Il rischio tecnico, per esempio se Starship funziona, lo metto nei flussi: ogni flusso è pesato per la probabilità cumulata delle sue milestone, come nella rNPV delle pipeline farmaceutiche. Il rischio sistematico lo metto nel tasso, con un beta per stadio: prima della milestone il segmento è un'opzione su un'impresa futura e ha un beta alto, dopo prende il beta del suo paniere. Il beta è riunleverato con la formula del corso. Usare un tasso da venture capital e insieme pesare per la probabilità conterebbe il rischio tecnico due volte.</a:t>
             </a:r>
             <a:endParaRPr lang="en-US" dirty="0"/>
           </a:p>
@@ -1582,7 +1583,7 @@
           <a:p>
             <a:r>
               <a:rPr lang="en-US" dirty="0"/>
-              <a:t>Il tornado mostra che cosa sposta il valore, una ipotesi alla volta. In cima c'è il beta di Starlink: io uso 0,469, quello di chi vende banda larga alle famiglie, perché il 61% dei ricavi è quello. Con il beta degli operatori satellitari, 0,74, il valore scende a 47,92 $. Nessuna leva da sola porta il valore oltre circa 67 $: la distanza dal prezzo non è un'ipotesi sbagliata di qualche punto.</a:t>
+              <a:t>Il dettaglio dei multipli. Uso i ricavi 2026 stimati per segmento, che sono sotto il consenso degli analisti, e i multipli EV su ricavi forward e degli ultimi dodici mesi dei tre panieri. Per l'AI c'è anche la versione con i multipli dei laboratori privati, OpenAI e Anthropic, fra 20 e 27 volte i ricavi. Anche raddoppiando i ricavi, il valore ai multipli resterebbe molto sotto il prezzo.</a:t>
             </a:r>
             <a:endParaRPr lang="en-US" dirty="0"/>
           </a:p>
@@ -1670,7 +1671,7 @@
           <a:p>
             <a:r>
               <a:rPr lang="en-US" dirty="0"/>
-              <a:t>Un confronto con chi ha pubblicato una valutazione. Morningstar, fuori dal consorzio, ha un valore di riferimento di 62 dollari, vicino al mio. Damodaran arriva a 97,83 con margini più alti e una crescita perpetua pari al tasso privo di rischio. Persino lo scenario negativo di Morgan Stanley, banca del consorzio, vale 75 dollari. I valori sopra il prezzo sono i target delle banche che hanno collocato il titolo.</a:t>
+              <a:t>Il tornado mostra che cosa sposta il valore, una ipotesi alla volta. In cima c'è il beta di Starlink: io uso 0,469, quello di chi vende banda larga alle famiglie, perché il 61% dei ricavi è quello. Con il beta degli operatori satellitari, 0,74, il valore scende a 47,92 $. Nessuna leva da sola porta il valore oltre circa 67 $: la distanza dal prezzo non è un'ipotesi sbagliata di qualche punto.</a:t>
             </a:r>
             <a:endParaRPr lang="en-US" dirty="0"/>
           </a:p>
@@ -1758,7 +1759,7 @@
           <a:p>
             <a:r>
               <a:rPr lang="en-US" dirty="0"/>
-              <a:t>Se mi chiedono perché non ho contato certe sinergie ovvie. Starlink paga i lanci al costo: è un trasferimento fra segmenti, la somma non cambia; la sinergia vera è la cadenza che dà a Starship, e quella l'ho contata. Il gruppo si indebita al 6% e xAI da sola pagava il 12,5%: è in gran parte un trasferimento ai creditori, per Higgins e Schall; vale solo lo scudo fiscale sul debito in più. La diversificazione abbassa la volatilità, ma l'azionista diversifica da solo: per questo non ho toccato i tassi.</a:t>
+              <a:t>Un confronto con chi ha pubblicato una valutazione. Morningstar, fuori dal consorzio, ha un valore di riferimento di 62 dollari, vicino al mio. Damodaran arriva a 97,83 con margini più alti e una crescita perpetua pari al tasso privo di rischio. Persino lo scenario negativo di Morgan Stanley, banca del consorzio, vale 75 dollari. I valori sopra il prezzo sono i target delle banche che hanno collocato il titolo.</a:t>
             </a:r>
             <a:endParaRPr lang="en-US" dirty="0"/>
           </a:p>
@@ -1846,7 +1847,7 @@
           <a:p>
             <a:r>
               <a:rPr lang="en-US" dirty="0"/>
-              <a:t>Il premio del 7% è plausibile? Con il metodo di Berger e Ofek le holding valgono molto meno delle loro parti, Disney e RTX stanno a meno 22 e meno 13, in linea con lo sconto medio della letteratura. L'unico premio è Amazon, più 20%: AWS nasce dall'infrastruttura del retail, un legame fisico come quello fra Starship e Starlink. SpaceX sta in mezzo. Il prezzo chiederebbe più 117%.</a:t>
+              <a:t>Se mi chiedono perché non ho contato certe sinergie ovvie. Starlink paga i lanci al costo: è un trasferimento fra segmenti, la somma non cambia; la sinergia vera è la cadenza che dà a Starship, e quella l'ho contata. Il gruppo si indebita al 6% e xAI da sola pagava il 12,5%: è in gran parte un trasferimento ai creditori, per Higgins e Schall; vale solo lo scudo fiscale sul debito in più. La diversificazione abbassa la volatilità, ma l'azionista diversifica da solo: per questo non ho toccato i tassi.</a:t>
             </a:r>
             <a:endParaRPr lang="en-US" dirty="0"/>
           </a:p>
@@ -1934,7 +1935,7 @@
           <a:p>
             <a:r>
               <a:rPr lang="en-US" dirty="0"/>
-              <a:t>Se arriva una domanda sulla fusione con xAI di febbraio, tutta in azioni: agli azionisti di xAI è andato il 20% del gruppo. Con i miei numeri xAI da sola valeva il 21% delle parti: ha preso poco più di quanto portava. Gli azionisti SpaceX si tengono 47 dei 50 miliardi di sinergie, e potevano cedere fino al 26,3%. Anche qui prezzo e valore divergono: la fusione valutava tutto 1.250 miliardi.</a:t>
+              <a:t>Il premio del 7% è plausibile? Con il metodo di Berger e Ofek le holding valgono molto meno delle loro parti, Disney e RTX stanno a meno 22 e meno 13, in linea con lo sconto medio della letteratura. L'unico premio è Amazon, più 20%: AWS nasce dall'infrastruttura del retail, un legame fisico come quello fra Starship e Starlink. SpaceX sta in mezzo. Il prezzo chiederebbe più 117%.</a:t>
             </a:r>
             <a:endParaRPr lang="en-US" dirty="0"/>
           </a:p>
@@ -2022,7 +2023,7 @@
           <a:p>
             <a:r>
               <a:rPr lang="en-US" dirty="0"/>
-              <a:t>Tutti i numeri sono in un Excel in formule: quattordici fogli, circa duemila formule. Il primo foglio, Prezzo, contiene la risposta: multipli impliciti, valore ai multipli, DCF inverso, target delle banche. Poi input con la fonte, tassi per stadio, probabilità, DCF di ogni blocco, segmenti, sinergie, ponte per azione e gruppi multi-settore. L'ultimo foglio controlla che Excel e il modello in Python diano gli stessi numeri. Se volete cambio un'ipotesi gialla e vediamo come si muove.</a:t>
+              <a:t>Se arriva una domanda sulla fusione con xAI di febbraio, tutta in azioni: agli azionisti di xAI è andato il 20% del gruppo. Con i miei numeri xAI da sola valeva il 21% delle parti: ha preso poco più di quanto portava. Gli azionisti SpaceX si tengono 47 dei 50 miliardi di sinergie, e potevano cedere fino al 26,3%. Anche qui prezzo e valore divergono: la fusione valutava tutto 1.250 miliardi.</a:t>
             </a:r>
             <a:endParaRPr lang="en-US" dirty="0"/>
           </a:p>
@@ -2046,6 +2047,94 @@
             <a:fld id="{F7021451-1387-4CA6-816F-3879F97B5CBC}" type="slidenum">
               <a:rPr lang="en-US"/>
               <a:t>25</a:t>
+            </a:fld>
+            <a:endParaRPr lang="en-US"/>
+          </a:p>
+        </p:txBody>
+      </p:sp>
+    </p:spTree>
+    <p:extLst>
+      <p:ext uri="{BB962C8B-B14F-4D97-AF65-F5344CB8AC3E}">
+        <p14:creationId xmlns:p14="http://schemas.microsoft.com/office/powerpoint/2010/main" val="1024086991"/>
+      </p:ext>
+    </p:extLst>
+  </p:cSld>
+  <p:clrMapOvr>
+    <a:masterClrMapping/>
+  </p:clrMapOvr>
+</p:notes>
+</file>
+
+<file path=ppt/notesSlides/notesSlide26.xml><?xml version="1.0" encoding="utf-8"?>
+<p:notes xmlns:a="http://schemas.openxmlformats.org/drawingml/2006/main" xmlns:r="http://schemas.openxmlformats.org/officeDocument/2006/relationships" xmlns:p="http://schemas.openxmlformats.org/presentationml/2006/main">
+  <p:cSld>
+    <p:spTree>
+      <p:nvGrpSpPr>
+        <p:cNvPr id="1" name=""/>
+        <p:cNvGrpSpPr/>
+        <p:nvPr/>
+      </p:nvGrpSpPr>
+      <p:grpSpPr>
+        <a:xfrm>
+          <a:off x="0" y="0"/>
+          <a:ext cx="0" cy="0"/>
+          <a:chOff x="0" y="0"/>
+          <a:chExt cx="0" cy="0"/>
+        </a:xfrm>
+      </p:grpSpPr>
+      <p:sp>
+        <p:nvSpPr>
+          <p:cNvPr id="2" name="Slide Image Placeholder 1"/>
+          <p:cNvSpPr>
+            <a:spLocks noGrp="1" noRot="1" noChangeAspect="1"/>
+          </p:cNvSpPr>
+          <p:nvPr>
+            <p:ph type="sldImg"/>
+          </p:nvPr>
+        </p:nvSpPr>
+        <p:spPr/>
+      </p:sp>
+      <p:sp>
+        <p:nvSpPr>
+          <p:cNvPr id="3" name="Notes Placeholder 2"/>
+          <p:cNvSpPr>
+            <a:spLocks noGrp="1"/>
+          </p:cNvSpPr>
+          <p:nvPr>
+            <p:ph type="body" idx="1"/>
+          </p:nvPr>
+        </p:nvSpPr>
+        <p:spPr/>
+        <p:txBody>
+          <a:bodyPr/>
+          <a:lstStyle/>
+          <a:p>
+            <a:r>
+              <a:rPr lang="en-US" dirty="0"/>
+              <a:t>Tutti i numeri sono in un Excel in formule: quattordici fogli, circa duemila formule. Il primo foglio, Prezzo, contiene la risposta: multipli impliciti, valore ai multipli, DCF inverso, target delle banche. Poi input con la fonte, tassi per stadio, probabilità, DCF di ogni blocco, segmenti, sinergie, ponte per azione e gruppi multi-settore. L'ultimo foglio controlla che Excel e il modello in Python diano gli stessi numeri. Se volete cambio un'ipotesi gialla e vediamo come si muove.</a:t>
+            </a:r>
+            <a:endParaRPr lang="en-US" dirty="0"/>
+          </a:p>
+        </p:txBody>
+      </p:sp>
+      <p:sp>
+        <p:nvSpPr>
+          <p:cNvPr id="4" name="Slide Number Placeholder 3"/>
+          <p:cNvSpPr>
+            <a:spLocks noGrp="1"/>
+          </p:cNvSpPr>
+          <p:nvPr>
+            <p:ph type="sldNum" sz="quarter" idx="10"/>
+          </p:nvPr>
+        </p:nvSpPr>
+        <p:spPr/>
+        <p:txBody>
+          <a:bodyPr/>
+          <a:lstStyle/>
+          <a:p>
+            <a:fld id="{F7021451-1387-4CA6-816F-3879F97B5CBC}" type="slidenum">
+              <a:rPr lang="en-US"/>
+              <a:t>26</a:t>
             </a:fld>
             <a:endParaRPr lang="en-US"/>
           </a:p>
@@ -2110,7 +2199,7 @@
           <a:p>
             <a:r>
               <a:rPr lang="en-US" dirty="0"/>
-              <a:t>Perché SpaceX. Al prezzo di oggi vale circa 2.158 miliardi di valore d'impresa: 94x i ricavi degli ultimi dodici mesi e 260x l'EBITDA. Un'impresa industriale matura vale dieci, quindici volte l'EBITDA. E il prezzo si muove moltissimo: da quando è quotata, a giugno, è andato da 211 $ a 108 $ e poi è risalito. Se c'è un caso in cui prezzo e valore possono separarsi, è questo.</a:t>
+              <a:t>Perché SpaceX. Al prezzo di oggi vale circa 2.158 miliardi di valore d'impresa: 94x i ricavi degli ultimi dodici mesi e 260x l'EBITDA. E il prezzo si muove moltissimo: da quando è quotata, a giugno, è andato da 211 $ a 108 $ e poi è risalito.</a:t>
             </a:r>
             <a:endParaRPr lang="en-US" dirty="0"/>
           </a:p>
@@ -6564,7 +6653,7 @@
                 <a:ea typeface="D-DIN" pitchFamily="34" charset="-122"/>
                 <a:cs typeface="D-DIN" pitchFamily="34" charset="-120"/>
               </a:rPr>
-              <a:t>L'OBIEZIONE</a:t>
+              <a:t>STRUMENTO 4  |  CHE COSA COMPRA IL MERCATO</a:t>
             </a:r>
             <a:endParaRPr lang="en-US" sz="1200" dirty="0"/>
           </a:p>
@@ -6605,7 +6694,7 @@
                 <a:ea typeface="Inter Display" pitchFamily="34" charset="-122"/>
                 <a:cs typeface="Inter Display" pitchFamily="34" charset="-120"/>
               </a:rPr>
-              <a:t>Ma le migliori banche del mondo l'hanno collocata a 135 $</a:t>
+              <a:t>Il prezzo paga un'AI da hyperscaler, e certa</a:t>
             </a:r>
             <a:endParaRPr lang="en-US" sz="4000" dirty="0"/>
           </a:p>
@@ -6646,7 +6735,7 @@
                 <a:ea typeface="Inter" pitchFamily="34" charset="-122"/>
                 <a:cs typeface="Inter" pitchFamily="34" charset="-120"/>
               </a:rPr>
-              <a:t>Fonte: SEC, 424B4 (22 banche, Goldman Sachs e Morgan Stanley capofila; prezzo fissato il 3/6/2026); libro ordini: Bloomberg via Semafor (10/6/2026); Benveniste e Spindt (1989); Purnanandam e Swaminathan (2004)</a:t>
+              <a:t>Fonte: Modello dell'autore: valore finale dell'AI al 2036 con i multipli del paniere (EV/ricavi 7,89x, EV/EBITDA 21,8x; stockanalysis.com, 8-9/10/2026) al posto del valore di continuazione del DCF (5,8x l'EBITDA); Space, Starlink e sinergie invariati</a:t>
             </a:r>
             <a:endParaRPr lang="en-US" sz="800" dirty="0"/>
           </a:p>
@@ -6660,8 +6749,8 @@
         </p:nvSpPr>
         <p:spPr>
           <a:xfrm>
-            <a:off x="548640" y="2331720"/>
-            <a:ext cx="3566160" cy="822960"/>
+            <a:off x="548640" y="2148840"/>
+            <a:ext cx="6400800" cy="274320"/>
           </a:xfrm>
           <a:prstGeom prst="rect">
             <a:avLst/>
@@ -6674,36 +6763,196 @@
           <a:lstStyle/>
           <a:p>
             <a:pPr indent="0" marL="0">
-              <a:lnSpc>
-                <a:spcPct val="105000"/>
-              </a:lnSpc>
-              <a:buNone/>
-            </a:pPr>
-            <a:r>
-              <a:rPr lang="en-US" sz="2600" b="1" spc="-40" kern="0" dirty="0">
+              <a:buNone/>
+            </a:pPr>
+            <a:r>
+              <a:rPr lang="en-US" sz="1100" spc="300" kern="0" dirty="0">
+                <a:solidFill>
+                  <a:srgbClr val="86868B"/>
+                </a:solidFill>
+                <a:latin typeface="D-DIN" pitchFamily="34" charset="0"/>
+                <a:ea typeface="D-DIN" pitchFamily="34" charset="-122"/>
+                <a:cs typeface="D-DIN" pitchFamily="34" charset="-120"/>
+              </a:rPr>
+              <a:t>COME VALE L'AI NEL 2036</a:t>
+            </a:r>
+            <a:endParaRPr lang="en-US" sz="1100" dirty="0"/>
+          </a:p>
+        </p:txBody>
+      </p:sp>
+      <p:sp>
+        <p:nvSpPr>
+          <p:cNvPr id="7" name="Text 4"/>
+          <p:cNvSpPr/>
+          <p:nvPr/>
+        </p:nvSpPr>
+        <p:spPr>
+          <a:xfrm>
+            <a:off x="7863840" y="2148840"/>
+            <a:ext cx="3749040" cy="274320"/>
+          </a:xfrm>
+          <a:prstGeom prst="rect">
+            <a:avLst/>
+          </a:prstGeom>
+          <a:noFill/>
+          <a:ln/>
+        </p:spPr>
+        <p:txBody>
+          <a:bodyPr wrap="square" lIns="0" tIns="0" rIns="0" bIns="0" rtlCol="0" anchor="t"/>
+          <a:lstStyle/>
+          <a:p>
+            <a:pPr algn="r" indent="0" marL="0">
+              <a:buNone/>
+            </a:pPr>
+            <a:r>
+              <a:rPr lang="en-US" sz="1100" spc="300" kern="0" dirty="0">
+                <a:solidFill>
+                  <a:srgbClr val="86868B"/>
+                </a:solidFill>
+                <a:latin typeface="D-DIN" pitchFamily="34" charset="0"/>
+                <a:ea typeface="D-DIN" pitchFamily="34" charset="-122"/>
+                <a:cs typeface="D-DIN" pitchFamily="34" charset="-120"/>
+              </a:rPr>
+              <a:t>SPACEX PER AZIONE</a:t>
+            </a:r>
+            <a:endParaRPr lang="en-US" sz="1100" dirty="0"/>
+          </a:p>
+        </p:txBody>
+      </p:sp>
+      <p:sp>
+        <p:nvSpPr>
+          <p:cNvPr id="8" name="Shape 5"/>
+          <p:cNvSpPr/>
+          <p:nvPr/>
+        </p:nvSpPr>
+        <p:spPr>
+          <a:xfrm>
+            <a:off x="548640" y="2487168"/>
+            <a:ext cx="11064240" cy="0"/>
+          </a:xfrm>
+          <a:prstGeom prst="line">
+            <a:avLst/>
+          </a:prstGeom>
+          <a:noFill/>
+          <a:ln w="9525">
+            <a:solidFill>
+              <a:srgbClr val="2C2C2E"/>
+            </a:solidFill>
+            <a:prstDash val="solid"/>
+          </a:ln>
+        </p:spPr>
+      </p:sp>
+      <p:sp>
+        <p:nvSpPr>
+          <p:cNvPr id="9" name="Text 6"/>
+          <p:cNvSpPr/>
+          <p:nvPr/>
+        </p:nvSpPr>
+        <p:spPr>
+          <a:xfrm>
+            <a:off x="548640" y="2670048"/>
+            <a:ext cx="7315200" cy="457200"/>
+          </a:xfrm>
+          <a:prstGeom prst="rect">
+            <a:avLst/>
+          </a:prstGeom>
+          <a:noFill/>
+          <a:ln/>
+        </p:spPr>
+        <p:txBody>
+          <a:bodyPr wrap="square" lIns="0" tIns="0" rIns="0" bIns="0" rtlCol="0" anchor="t"/>
+          <a:lstStyle/>
+          <a:p>
+            <a:pPr indent="0" marL="0">
+              <a:buNone/>
+            </a:pPr>
+            <a:r>
+              <a:rPr lang="en-US" sz="1900" dirty="0">
                 <a:solidFill>
                   <a:srgbClr val="FFFFFF"/>
+                </a:solidFill>
+                <a:latin typeface="Inter" pitchFamily="34" charset="0"/>
+                <a:ea typeface="Inter" pitchFamily="34" charset="-122"/>
+                <a:cs typeface="Inter" pitchFamily="34" charset="-120"/>
+              </a:rPr>
+              <a:t>Come nel modello: impresa matura, a rischio</a:t>
+            </a:r>
+            <a:endParaRPr lang="en-US" sz="1900" dirty="0"/>
+          </a:p>
+        </p:txBody>
+      </p:sp>
+      <p:sp>
+        <p:nvSpPr>
+          <p:cNvPr id="10" name="Text 7"/>
+          <p:cNvSpPr/>
+          <p:nvPr/>
+        </p:nvSpPr>
+        <p:spPr>
+          <a:xfrm>
+            <a:off x="7863840" y="2560320"/>
+            <a:ext cx="3749040" cy="640080"/>
+          </a:xfrm>
+          <a:prstGeom prst="rect">
+            <a:avLst/>
+          </a:prstGeom>
+          <a:noFill/>
+          <a:ln/>
+        </p:spPr>
+        <p:txBody>
+          <a:bodyPr wrap="square" lIns="0" tIns="0" rIns="0" bIns="0" rtlCol="0" anchor="b"/>
+          <a:lstStyle/>
+          <a:p>
+            <a:pPr algn="r" indent="0" marL="0">
+              <a:buNone/>
+            </a:pPr>
+            <a:r>
+              <a:rPr lang="en-US" sz="3600" b="1" spc="-60" kern="0" dirty="0">
+                <a:solidFill>
+                  <a:srgbClr val="2997FF"/>
                 </a:solidFill>
                 <a:latin typeface="Inter Display" pitchFamily="34" charset="0"/>
                 <a:ea typeface="Inter Display" pitchFamily="34" charset="-122"/>
                 <a:cs typeface="Inter Display" pitchFamily="34" charset="-120"/>
               </a:rPr>
-              <a:t>La domanda c'era</a:t>
-            </a:r>
-            <a:endParaRPr lang="en-US" sz="2600" dirty="0"/>
-          </a:p>
-        </p:txBody>
-      </p:sp>
-      <p:sp>
-        <p:nvSpPr>
-          <p:cNvPr id="7" name="Text 4"/>
-          <p:cNvSpPr/>
-          <p:nvPr/>
-        </p:nvSpPr>
-        <p:spPr>
-          <a:xfrm>
-            <a:off x="548640" y="3291840"/>
-            <a:ext cx="3474720" cy="2011680"/>
+              <a:t>60 $</a:t>
+            </a:r>
+            <a:endParaRPr lang="en-US" sz="3600" dirty="0"/>
+          </a:p>
+        </p:txBody>
+      </p:sp>
+      <p:sp>
+        <p:nvSpPr>
+          <p:cNvPr id="11" name="Shape 8"/>
+          <p:cNvSpPr/>
+          <p:nvPr/>
+        </p:nvSpPr>
+        <p:spPr>
+          <a:xfrm>
+            <a:off x="548640" y="3264408"/>
+            <a:ext cx="11064240" cy="0"/>
+          </a:xfrm>
+          <a:prstGeom prst="line">
+            <a:avLst/>
+          </a:prstGeom>
+          <a:noFill/>
+          <a:ln w="9525">
+            <a:solidFill>
+              <a:srgbClr val="2C2C2E"/>
+            </a:solidFill>
+            <a:prstDash val="solid"/>
+          </a:ln>
+        </p:spPr>
+      </p:sp>
+      <p:sp>
+        <p:nvSpPr>
+          <p:cNvPr id="12" name="Text 9"/>
+          <p:cNvSpPr/>
+          <p:nvPr/>
+        </p:nvSpPr>
+        <p:spPr>
+          <a:xfrm>
+            <a:off x="548640" y="3447288"/>
+            <a:ext cx="7315200" cy="457200"/>
           </a:xfrm>
           <a:prstGeom prst="rect">
             <a:avLst/>
@@ -6716,55 +6965,49 @@
           <a:lstStyle/>
           <a:p>
             <a:pPr indent="0" marL="0">
-              <a:lnSpc>
-                <a:spcPct val="110000"/>
-              </a:lnSpc>
-              <a:buNone/>
-            </a:pPr>
-            <a:r>
-              <a:rPr lang="en-US" sz="1700" dirty="0">
-                <a:solidFill>
-                  <a:srgbClr val="86868B"/>
+              <a:buNone/>
+            </a:pPr>
+            <a:r>
+              <a:rPr lang="en-US" sz="1900" dirty="0">
+                <a:solidFill>
+                  <a:srgbClr val="FFFFFF"/>
                 </a:solidFill>
                 <a:latin typeface="Inter" pitchFamily="34" charset="0"/>
                 <a:ea typeface="Inter" pitchFamily="34" charset="-122"/>
                 <a:cs typeface="Inter" pitchFamily="34" charset="-120"/>
               </a:rPr>
-              <a:t>Libro ordini coperto più di 4 volte a 135 $: il collocamento misura quanto gli investitori sono disposti a pagare.</a:t>
-            </a:r>
-            <a:endParaRPr lang="en-US" sz="1700" dirty="0"/>
-          </a:p>
-        </p:txBody>
-      </p:sp>
-      <p:sp>
-        <p:nvSpPr>
-          <p:cNvPr id="8" name="Text 5"/>
-          <p:cNvSpPr/>
-          <p:nvPr/>
-        </p:nvSpPr>
-        <p:spPr>
-          <a:xfrm>
-            <a:off x="4343400" y="2331720"/>
-            <a:ext cx="3566160" cy="822960"/>
-          </a:xfrm>
-          <a:prstGeom prst="rect">
-            <a:avLst/>
-          </a:prstGeom>
-          <a:noFill/>
-          <a:ln/>
-        </p:spPr>
-        <p:txBody>
-          <a:bodyPr wrap="square" lIns="0" tIns="0" rIns="0" bIns="0" rtlCol="0" anchor="t"/>
-          <a:lstStyle/>
-          <a:p>
-            <a:pPr indent="0" marL="0">
-              <a:lnSpc>
-                <a:spcPct val="105000"/>
-              </a:lnSpc>
-              <a:buNone/>
-            </a:pPr>
-            <a:r>
-              <a:rPr lang="en-US" sz="2600" b="1" spc="-40" kern="0" dirty="0">
+              <a:t>Come nel modello, solo l'AI con successo certo</a:t>
+            </a:r>
+            <a:endParaRPr lang="en-US" sz="1900" dirty="0"/>
+          </a:p>
+        </p:txBody>
+      </p:sp>
+      <p:sp>
+        <p:nvSpPr>
+          <p:cNvPr id="13" name="Text 10"/>
+          <p:cNvSpPr/>
+          <p:nvPr/>
+        </p:nvSpPr>
+        <p:spPr>
+          <a:xfrm>
+            <a:off x="7863840" y="3337560"/>
+            <a:ext cx="3749040" cy="640080"/>
+          </a:xfrm>
+          <a:prstGeom prst="rect">
+            <a:avLst/>
+          </a:prstGeom>
+          <a:noFill/>
+          <a:ln/>
+        </p:spPr>
+        <p:txBody>
+          <a:bodyPr wrap="square" lIns="0" tIns="0" rIns="0" bIns="0" rtlCol="0" anchor="b"/>
+          <a:lstStyle/>
+          <a:p>
+            <a:pPr algn="r" indent="0" marL="0">
+              <a:buNone/>
+            </a:pPr>
+            <a:r>
+              <a:rPr lang="en-US" sz="3600" b="1" spc="-60" kern="0" dirty="0">
                 <a:solidFill>
                   <a:srgbClr val="FFFFFF"/>
                 </a:solidFill>
@@ -6772,22 +7015,45 @@
                 <a:ea typeface="Inter Display" pitchFamily="34" charset="-122"/>
                 <a:cs typeface="Inter Display" pitchFamily="34" charset="-120"/>
               </a:rPr>
-              <a:t>È un prezzo, non un valore</a:t>
-            </a:r>
-            <a:endParaRPr lang="en-US" sz="2600" dirty="0"/>
-          </a:p>
-        </p:txBody>
-      </p:sp>
-      <p:sp>
-        <p:nvSpPr>
-          <p:cNvPr id="9" name="Text 6"/>
-          <p:cNvSpPr/>
-          <p:nvPr/>
-        </p:nvSpPr>
-        <p:spPr>
-          <a:xfrm>
-            <a:off x="4343400" y="3291840"/>
-            <a:ext cx="3474720" cy="2011680"/>
+              <a:t>79 $</a:t>
+            </a:r>
+            <a:endParaRPr lang="en-US" sz="3600" dirty="0"/>
+          </a:p>
+        </p:txBody>
+      </p:sp>
+      <p:sp>
+        <p:nvSpPr>
+          <p:cNvPr id="14" name="Shape 11"/>
+          <p:cNvSpPr/>
+          <p:nvPr/>
+        </p:nvSpPr>
+        <p:spPr>
+          <a:xfrm>
+            <a:off x="548640" y="4041648"/>
+            <a:ext cx="11064240" cy="0"/>
+          </a:xfrm>
+          <a:prstGeom prst="line">
+            <a:avLst/>
+          </a:prstGeom>
+          <a:noFill/>
+          <a:ln w="9525">
+            <a:solidFill>
+              <a:srgbClr val="2C2C2E"/>
+            </a:solidFill>
+            <a:prstDash val="solid"/>
+          </a:ln>
+        </p:spPr>
+      </p:sp>
+      <p:sp>
+        <p:nvSpPr>
+          <p:cNvPr id="15" name="Text 12"/>
+          <p:cNvSpPr/>
+          <p:nvPr/>
+        </p:nvSpPr>
+        <p:spPr>
+          <a:xfrm>
+            <a:off x="548640" y="4224528"/>
+            <a:ext cx="7315200" cy="457200"/>
           </a:xfrm>
           <a:prstGeom prst="rect">
             <a:avLst/>
@@ -6800,78 +7066,95 @@
           <a:lstStyle/>
           <a:p>
             <a:pPr indent="0" marL="0">
-              <a:lnSpc>
-                <a:spcPct val="110000"/>
-              </a:lnSpc>
-              <a:buNone/>
-            </a:pPr>
-            <a:r>
-              <a:rPr lang="en-US" sz="1700" dirty="0">
-                <a:solidFill>
-                  <a:srgbClr val="86868B"/>
+              <a:buNone/>
+            </a:pPr>
+            <a:r>
+              <a:rPr lang="en-US" sz="1900" dirty="0">
+                <a:solidFill>
+                  <a:srgbClr val="FFFFFF"/>
                 </a:solidFill>
                 <a:latin typeface="Inter" pitchFamily="34" charset="0"/>
                 <a:ea typeface="Inter" pitchFamily="34" charset="-122"/>
                 <a:cs typeface="Inter" pitchFamily="34" charset="-120"/>
               </a:rPr>
-              <a:t>Nel bookbuilding il prezzo d'offerta raccoglie la domanda (Benveniste e Spindt 1989), non stima i flussi.</a:t>
-            </a:r>
-            <a:endParaRPr lang="en-US" sz="1700" dirty="0"/>
-          </a:p>
-        </p:txBody>
-      </p:sp>
-      <p:sp>
-        <p:nvSpPr>
-          <p:cNvPr id="10" name="Text 7"/>
-          <p:cNvSpPr/>
-          <p:nvPr/>
-        </p:nvSpPr>
-        <p:spPr>
-          <a:xfrm>
-            <a:off x="8138160" y="2331720"/>
-            <a:ext cx="3566160" cy="822960"/>
-          </a:xfrm>
-          <a:prstGeom prst="rect">
-            <a:avLst/>
-          </a:prstGeom>
-          <a:noFill/>
-          <a:ln/>
-        </p:spPr>
-        <p:txBody>
-          <a:bodyPr wrap="square" lIns="0" tIns="0" rIns="0" bIns="0" rtlCol="0" anchor="t"/>
-          <a:lstStyle/>
-          <a:p>
-            <a:pPr indent="0" marL="0">
-              <a:lnSpc>
-                <a:spcPct val="105000"/>
-              </a:lnSpc>
-              <a:buNone/>
-            </a:pPr>
-            <a:r>
-              <a:rPr lang="en-US" sz="2600" b="1" spc="-40" kern="0" dirty="0">
-                <a:solidFill>
-                  <a:srgbClr val="FFB340"/>
+              <a:t>Come un hyperscaler, pesata per le probabilità</a:t>
+            </a:r>
+            <a:endParaRPr lang="en-US" sz="1900" dirty="0"/>
+          </a:p>
+        </p:txBody>
+      </p:sp>
+      <p:sp>
+        <p:nvSpPr>
+          <p:cNvPr id="16" name="Text 13"/>
+          <p:cNvSpPr/>
+          <p:nvPr/>
+        </p:nvSpPr>
+        <p:spPr>
+          <a:xfrm>
+            <a:off x="7863840" y="4114800"/>
+            <a:ext cx="3749040" cy="640080"/>
+          </a:xfrm>
+          <a:prstGeom prst="rect">
+            <a:avLst/>
+          </a:prstGeom>
+          <a:noFill/>
+          <a:ln/>
+        </p:spPr>
+        <p:txBody>
+          <a:bodyPr wrap="square" lIns="0" tIns="0" rIns="0" bIns="0" rtlCol="0" anchor="b"/>
+          <a:lstStyle/>
+          <a:p>
+            <a:pPr algn="r" indent="0" marL="0">
+              <a:buNone/>
+            </a:pPr>
+            <a:r>
+              <a:rPr lang="en-US" sz="3600" b="1" spc="-60" kern="0" dirty="0">
+                <a:solidFill>
+                  <a:srgbClr val="FFFFFF"/>
                 </a:solidFill>
                 <a:latin typeface="Inter Display" pitchFamily="34" charset="0"/>
                 <a:ea typeface="Inter Display" pitchFamily="34" charset="-122"/>
                 <a:cs typeface="Inter Display" pitchFamily="34" charset="-120"/>
               </a:rPr>
-              <a:t>Anche 135 $ chiede di più</a:t>
-            </a:r>
-            <a:endParaRPr lang="en-US" sz="2600" dirty="0"/>
-          </a:p>
-        </p:txBody>
-      </p:sp>
-      <p:sp>
-        <p:nvSpPr>
-          <p:cNvPr id="11" name="Text 8"/>
-          <p:cNvSpPr/>
-          <p:nvPr/>
-        </p:nvSpPr>
-        <p:spPr>
-          <a:xfrm>
-            <a:off x="8138160" y="3291840"/>
-            <a:ext cx="3474720" cy="2011680"/>
+              <a:t>103-111 $</a:t>
+            </a:r>
+            <a:endParaRPr lang="en-US" sz="3600" dirty="0"/>
+          </a:p>
+        </p:txBody>
+      </p:sp>
+      <p:sp>
+        <p:nvSpPr>
+          <p:cNvPr id="17" name="Shape 14"/>
+          <p:cNvSpPr/>
+          <p:nvPr/>
+        </p:nvSpPr>
+        <p:spPr>
+          <a:xfrm>
+            <a:off x="548640" y="4818888"/>
+            <a:ext cx="11064240" cy="0"/>
+          </a:xfrm>
+          <a:prstGeom prst="line">
+            <a:avLst/>
+          </a:prstGeom>
+          <a:noFill/>
+          <a:ln w="9525">
+            <a:solidFill>
+              <a:srgbClr val="2C2C2E"/>
+            </a:solidFill>
+            <a:prstDash val="solid"/>
+          </a:ln>
+        </p:spPr>
+      </p:sp>
+      <p:sp>
+        <p:nvSpPr>
+          <p:cNvPr id="18" name="Text 15"/>
+          <p:cNvSpPr/>
+          <p:nvPr/>
+        </p:nvSpPr>
+        <p:spPr>
+          <a:xfrm>
+            <a:off x="548640" y="5001768"/>
+            <a:ext cx="7315200" cy="457200"/>
           </a:xfrm>
           <a:prstGeom prst="rect">
             <a:avLst/>
@@ -6884,21 +7167,133 @@
           <a:lstStyle/>
           <a:p>
             <a:pPr indent="0" marL="0">
-              <a:lnSpc>
-                <a:spcPct val="110000"/>
-              </a:lnSpc>
-              <a:buNone/>
-            </a:pPr>
-            <a:r>
-              <a:rPr lang="en-US" sz="1700" dirty="0">
-                <a:solidFill>
-                  <a:srgbClr val="86868B"/>
+              <a:buNone/>
+            </a:pPr>
+            <a:r>
+              <a:rPr lang="en-US" sz="2200" b="1" dirty="0">
+                <a:solidFill>
+                  <a:srgbClr val="FFB340"/>
                 </a:solidFill>
                 <a:latin typeface="Inter" pitchFamily="34" charset="0"/>
                 <a:ea typeface="Inter" pitchFamily="34" charset="-122"/>
                 <a:cs typeface="Inter" pitchFamily="34" charset="-120"/>
               </a:rPr>
-              <a:t>Con il DCF inverso il collocamento sconta ricavi 3,6x il caso di successo: 2.263 mld al 2036.</a:t>
+              <a:t>Come un hyperscaler, e con successo certo</a:t>
+            </a:r>
+            <a:endParaRPr lang="en-US" sz="2200" dirty="0"/>
+          </a:p>
+        </p:txBody>
+      </p:sp>
+      <p:sp>
+        <p:nvSpPr>
+          <p:cNvPr id="19" name="Text 16"/>
+          <p:cNvSpPr/>
+          <p:nvPr/>
+        </p:nvSpPr>
+        <p:spPr>
+          <a:xfrm>
+            <a:off x="7863840" y="4892040"/>
+            <a:ext cx="3749040" cy="640080"/>
+          </a:xfrm>
+          <a:prstGeom prst="rect">
+            <a:avLst/>
+          </a:prstGeom>
+          <a:noFill/>
+          <a:ln/>
+        </p:spPr>
+        <p:txBody>
+          <a:bodyPr wrap="square" lIns="0" tIns="0" rIns="0" bIns="0" rtlCol="0" anchor="b"/>
+          <a:lstStyle/>
+          <a:p>
+            <a:pPr algn="r" indent="0" marL="0">
+              <a:buNone/>
+            </a:pPr>
+            <a:r>
+              <a:rPr lang="en-US" sz="4400" b="1" spc="-60" kern="0" dirty="0">
+                <a:solidFill>
+                  <a:srgbClr val="FFB340"/>
+                </a:solidFill>
+                <a:latin typeface="Inter Display" pitchFamily="34" charset="0"/>
+                <a:ea typeface="Inter Display" pitchFamily="34" charset="-122"/>
+                <a:cs typeface="Inter Display" pitchFamily="34" charset="-120"/>
+              </a:rPr>
+              <a:t>152-183 $</a:t>
+            </a:r>
+            <a:endParaRPr lang="en-US" sz="4400" dirty="0"/>
+          </a:p>
+        </p:txBody>
+      </p:sp>
+      <p:sp>
+        <p:nvSpPr>
+          <p:cNvPr id="20" name="Shape 17"/>
+          <p:cNvSpPr/>
+          <p:nvPr/>
+        </p:nvSpPr>
+        <p:spPr>
+          <a:xfrm>
+            <a:off x="548640" y="5596128"/>
+            <a:ext cx="11064240" cy="0"/>
+          </a:xfrm>
+          <a:prstGeom prst="line">
+            <a:avLst/>
+          </a:prstGeom>
+          <a:noFill/>
+          <a:ln w="9525">
+            <a:solidFill>
+              <a:srgbClr val="2C2C2E"/>
+            </a:solidFill>
+            <a:prstDash val="solid"/>
+          </a:ln>
+        </p:spPr>
+      </p:sp>
+      <p:sp>
+        <p:nvSpPr>
+          <p:cNvPr id="21" name="Text 18"/>
+          <p:cNvSpPr/>
+          <p:nvPr/>
+        </p:nvSpPr>
+        <p:spPr>
+          <a:xfrm>
+            <a:off x="548640" y="5806440"/>
+            <a:ext cx="11064240" cy="365760"/>
+          </a:xfrm>
+          <a:prstGeom prst="rect">
+            <a:avLst/>
+          </a:prstGeom>
+          <a:noFill/>
+          <a:ln/>
+        </p:spPr>
+        <p:txBody>
+          <a:bodyPr wrap="square" lIns="0" tIns="0" rIns="0" bIns="0" rtlCol="0" anchor="t"/>
+          <a:lstStyle/>
+          <a:p>
+            <a:pPr indent="0" marL="0">
+              <a:buNone/>
+            </a:pPr>
+            <a:r>
+              <a:rPr lang="en-US" sz="1700" b="1" dirty="0">
+                <a:solidFill>
+                  <a:srgbClr val="FFB340"/>
+                </a:solidFill>
+                <a:latin typeface="Inter" pitchFamily="34" charset="0"/>
+                <a:ea typeface="Inter" pitchFamily="34" charset="-122"/>
+                <a:cs typeface="Inter" pitchFamily="34" charset="-120"/>
+              </a:rPr>
+              <a:t>Prezzo di mercato 167,60 $</a:t>
+            </a:r>
+            <a:pPr indent="0" marL="0">
+              <a:buNone/>
+            </a:pPr>
+            <a:r>
+              <a:rPr lang="en-US" sz="1700" dirty="0">
+                <a:solidFill>
+                  <a:srgbClr val="86868B"/>
+                </a:solidFill>
+                <a:latin typeface="Inter" pitchFamily="34" charset="0"/>
+                <a:ea typeface="Inter" pitchFamily="34" charset="-122"/>
+                <a:cs typeface="Inter" pitchFamily="34" charset="-120"/>
+              </a:rPr>
+              <a:t>   ·   collocamento 135 $</a:t>
             </a:r>
             <a:endParaRPr lang="en-US" sz="1700" dirty="0"/>
           </a:p>
@@ -7006,13 +7401,13 @@
             <a:r>
               <a:rPr lang="en-US" sz="1200" spc="300" kern="0" dirty="0">
                 <a:solidFill>
-                  <a:srgbClr val="6E6E73"/>
+                  <a:srgbClr val="86868B"/>
                 </a:solidFill>
                 <a:latin typeface="D-DIN" pitchFamily="34" charset="0"/>
                 <a:ea typeface="D-DIN" pitchFamily="34" charset="-122"/>
                 <a:cs typeface="D-DIN" pitchFamily="34" charset="-120"/>
               </a:rPr>
-              <a:t>PERCHÉ IL PREZZO RESTA SOPRA IL VALORE</a:t>
+              <a:t>L'OBIEZIONE</a:t>
             </a:r>
             <a:endParaRPr lang="en-US" sz="1200" dirty="0"/>
           </a:p>
@@ -7047,13 +7442,13 @@
             <a:r>
               <a:rPr lang="en-US" sz="4000" b="1" spc="-60" kern="0" dirty="0">
                 <a:solidFill>
-                  <a:srgbClr val="1D1D1F"/>
+                  <a:srgbClr val="FFFFFF"/>
                 </a:solidFill>
                 <a:latin typeface="Inter Display" pitchFamily="34" charset="0"/>
                 <a:ea typeface="Inter Display" pitchFamily="34" charset="-122"/>
                 <a:cs typeface="Inter Display" pitchFamily="34" charset="-120"/>
               </a:rPr>
-              <a:t>Chi ha collocato vede 228 $, chi no 173 $</a:t>
+              <a:t>Ma le migliori banche del mondo l'hanno collocata a 135 $</a:t>
             </a:r>
             <a:endParaRPr lang="en-US" sz="4000" dirty="0"/>
           </a:p>
@@ -7088,91 +7483,70 @@
             <a:r>
               <a:rPr lang="en-US" sz="800" dirty="0">
                 <a:solidFill>
-                  <a:srgbClr val="6E6E73"/>
+                  <a:srgbClr val="86868B"/>
                 </a:solidFill>
                 <a:latin typeface="Inter" pitchFamily="34" charset="0"/>
                 <a:ea typeface="Inter" pitchFamily="34" charset="-122"/>
                 <a:cs typeface="Inter" pitchFamily="34" charset="-120"/>
               </a:rPr>
-              <a:t>Fonte: Target dopo il quiet period (7/7/2026): Fortune, The Daily Upside, Yahoo Finance, StockAnalysis.com; ruolo nel consorzio: SEC 424B4 p. 267 e 274; azioni negoziabili: 424B4; Michaely e Womack (1999); Miller (1977)</a:t>
+              <a:t>Fonte: SEC, 424B4 (22 banche, Goldman Sachs e Morgan Stanley capofila; prezzo fissato il 3/6/2026); libro ordini: Bloomberg via Semafor (10/6/2026); Benveniste e Spindt (1989); Purnanandam e Swaminathan (2004)</a:t>
             </a:r>
             <a:endParaRPr lang="en-US" sz="800" dirty="0"/>
           </a:p>
         </p:txBody>
       </p:sp>
-      <p:pic>
-        <p:nvPicPr>
-          <p:cNvPr id="6" name="Image 0" descr="Target price delle banche del consorzio e degli analisti esterni">    </p:cNvPr>
-          <p:cNvPicPr>
-            <a:picLocks noChangeAspect="1"/>
-          </p:cNvPicPr>
-          <p:nvPr/>
-        </p:nvPicPr>
-        <p:blipFill>
-          <a:blip r:embed="rId1"/>
-          <a:stretch>
-            <a:fillRect/>
-          </a:stretch>
-        </p:blipFill>
-        <p:spPr>
-          <a:xfrm>
-            <a:off x="411480" y="1874520"/>
-            <a:ext cx="7680960" cy="4320540"/>
-          </a:xfrm>
-          <a:prstGeom prst="rect">
-            <a:avLst/>
-          </a:prstGeom>
-        </p:spPr>
-      </p:pic>
-      <p:sp>
-        <p:nvSpPr>
-          <p:cNvPr id="7" name="Text 3"/>
-          <p:cNvSpPr/>
-          <p:nvPr/>
-        </p:nvSpPr>
-        <p:spPr>
-          <a:xfrm>
-            <a:off x="8503920" y="1920240"/>
-            <a:ext cx="3291840" cy="868680"/>
-          </a:xfrm>
-          <a:prstGeom prst="rect">
-            <a:avLst/>
-          </a:prstGeom>
-          <a:noFill/>
-          <a:ln/>
-        </p:spPr>
-        <p:txBody>
-          <a:bodyPr wrap="square" lIns="0" tIns="0" rIns="0" bIns="0" rtlCol="0" anchor="b"/>
-          <a:lstStyle/>
-          <a:p>
-            <a:pPr indent="0" marL="0">
-              <a:buNone/>
-            </a:pPr>
-            <a:r>
-              <a:rPr lang="en-US" sz="4800" b="1" spc="-60" kern="0" dirty="0">
-                <a:solidFill>
-                  <a:srgbClr val="C0392B"/>
+      <p:sp>
+        <p:nvSpPr>
+          <p:cNvPr id="6" name="Text 3"/>
+          <p:cNvSpPr/>
+          <p:nvPr/>
+        </p:nvSpPr>
+        <p:spPr>
+          <a:xfrm>
+            <a:off x="548640" y="2331720"/>
+            <a:ext cx="3566160" cy="822960"/>
+          </a:xfrm>
+          <a:prstGeom prst="rect">
+            <a:avLst/>
+          </a:prstGeom>
+          <a:noFill/>
+          <a:ln/>
+        </p:spPr>
+        <p:txBody>
+          <a:bodyPr wrap="square" lIns="0" tIns="0" rIns="0" bIns="0" rtlCol="0" anchor="t"/>
+          <a:lstStyle/>
+          <a:p>
+            <a:pPr indent="0" marL="0">
+              <a:lnSpc>
+                <a:spcPct val="105000"/>
+              </a:lnSpc>
+              <a:buNone/>
+            </a:pPr>
+            <a:r>
+              <a:rPr lang="en-US" sz="2600" b="1" spc="-40" kern="0" dirty="0">
+                <a:solidFill>
+                  <a:srgbClr val="FFFFFF"/>
                 </a:solidFill>
                 <a:latin typeface="Inter Display" pitchFamily="34" charset="0"/>
                 <a:ea typeface="Inter Display" pitchFamily="34" charset="-122"/>
                 <a:cs typeface="Inter Display" pitchFamily="34" charset="-120"/>
               </a:rPr>
-              <a:t>228 $</a:t>
-            </a:r>
-            <a:endParaRPr lang="en-US" sz="4800" dirty="0"/>
-          </a:p>
-        </p:txBody>
-      </p:sp>
-      <p:sp>
-        <p:nvSpPr>
-          <p:cNvPr id="8" name="Text 4"/>
-          <p:cNvSpPr/>
-          <p:nvPr/>
-        </p:nvSpPr>
-        <p:spPr>
-          <a:xfrm>
-            <a:off x="8503920" y="2834640"/>
-            <a:ext cx="3154680" cy="502920"/>
+              <a:t>La domanda c'era</a:t>
+            </a:r>
+            <a:endParaRPr lang="en-US" sz="2600" dirty="0"/>
+          </a:p>
+        </p:txBody>
+      </p:sp>
+      <p:sp>
+        <p:nvSpPr>
+          <p:cNvPr id="7" name="Text 4"/>
+          <p:cNvSpPr/>
+          <p:nvPr/>
+        </p:nvSpPr>
+        <p:spPr>
+          <a:xfrm>
+            <a:off x="548640" y="3291840"/>
+            <a:ext cx="3474720" cy="2011680"/>
           </a:xfrm>
           <a:prstGeom prst="rect">
             <a:avLst/>
@@ -7185,72 +7559,78 @@
           <a:lstStyle/>
           <a:p>
             <a:pPr indent="0" marL="0">
-              <a:buNone/>
-            </a:pPr>
-            <a:r>
-              <a:rPr lang="en-US" sz="1350" dirty="0">
-                <a:solidFill>
-                  <a:srgbClr val="6E6E73"/>
+              <a:lnSpc>
+                <a:spcPct val="110000"/>
+              </a:lnSpc>
+              <a:buNone/>
+            </a:pPr>
+            <a:r>
+              <a:rPr lang="en-US" sz="1700" dirty="0">
+                <a:solidFill>
+                  <a:srgbClr val="86868B"/>
                 </a:solidFill>
                 <a:latin typeface="Inter" pitchFamily="34" charset="0"/>
                 <a:ea typeface="Inter" pitchFamily="34" charset="-122"/>
                 <a:cs typeface="Inter" pitchFamily="34" charset="-120"/>
               </a:rPr>
-              <a:t>mediana dei target delle banche del consorzio</a:t>
-            </a:r>
-            <a:endParaRPr lang="en-US" sz="1350" dirty="0"/>
-          </a:p>
-        </p:txBody>
-      </p:sp>
-      <p:sp>
-        <p:nvSpPr>
-          <p:cNvPr id="9" name="Text 5"/>
-          <p:cNvSpPr/>
-          <p:nvPr/>
-        </p:nvSpPr>
-        <p:spPr>
-          <a:xfrm>
-            <a:off x="8503920" y="3383280"/>
-            <a:ext cx="3291840" cy="868680"/>
-          </a:xfrm>
-          <a:prstGeom prst="rect">
-            <a:avLst/>
-          </a:prstGeom>
-          <a:noFill/>
-          <a:ln/>
-        </p:spPr>
-        <p:txBody>
-          <a:bodyPr wrap="square" lIns="0" tIns="0" rIns="0" bIns="0" rtlCol="0" anchor="b"/>
-          <a:lstStyle/>
-          <a:p>
-            <a:pPr indent="0" marL="0">
-              <a:buNone/>
-            </a:pPr>
-            <a:r>
-              <a:rPr lang="en-US" sz="4800" b="1" spc="-60" kern="0" dirty="0">
-                <a:solidFill>
-                  <a:srgbClr val="0071E3"/>
+              <a:t>Libro ordini coperto più di 4 volte a 135 $: il collocamento misura quanto gli investitori sono disposti a pagare.</a:t>
+            </a:r>
+            <a:endParaRPr lang="en-US" sz="1700" dirty="0"/>
+          </a:p>
+        </p:txBody>
+      </p:sp>
+      <p:sp>
+        <p:nvSpPr>
+          <p:cNvPr id="8" name="Text 5"/>
+          <p:cNvSpPr/>
+          <p:nvPr/>
+        </p:nvSpPr>
+        <p:spPr>
+          <a:xfrm>
+            <a:off x="4343400" y="2331720"/>
+            <a:ext cx="3566160" cy="822960"/>
+          </a:xfrm>
+          <a:prstGeom prst="rect">
+            <a:avLst/>
+          </a:prstGeom>
+          <a:noFill/>
+          <a:ln/>
+        </p:spPr>
+        <p:txBody>
+          <a:bodyPr wrap="square" lIns="0" tIns="0" rIns="0" bIns="0" rtlCol="0" anchor="t"/>
+          <a:lstStyle/>
+          <a:p>
+            <a:pPr indent="0" marL="0">
+              <a:lnSpc>
+                <a:spcPct val="105000"/>
+              </a:lnSpc>
+              <a:buNone/>
+            </a:pPr>
+            <a:r>
+              <a:rPr lang="en-US" sz="2600" b="1" spc="-40" kern="0" dirty="0">
+                <a:solidFill>
+                  <a:srgbClr val="FFFFFF"/>
                 </a:solidFill>
                 <a:latin typeface="Inter Display" pitchFamily="34" charset="0"/>
                 <a:ea typeface="Inter Display" pitchFamily="34" charset="-122"/>
                 <a:cs typeface="Inter Display" pitchFamily="34" charset="-120"/>
               </a:rPr>
-              <a:t>173 $</a:t>
-            </a:r>
-            <a:endParaRPr lang="en-US" sz="4800" dirty="0"/>
-          </a:p>
-        </p:txBody>
-      </p:sp>
-      <p:sp>
-        <p:nvSpPr>
-          <p:cNvPr id="10" name="Text 6"/>
-          <p:cNvSpPr/>
-          <p:nvPr/>
-        </p:nvSpPr>
-        <p:spPr>
-          <a:xfrm>
-            <a:off x="8503920" y="4297680"/>
-            <a:ext cx="3154680" cy="502920"/>
+              <a:t>È un prezzo, non un valore</a:t>
+            </a:r>
+            <a:endParaRPr lang="en-US" sz="2600" dirty="0"/>
+          </a:p>
+        </p:txBody>
+      </p:sp>
+      <p:sp>
+        <p:nvSpPr>
+          <p:cNvPr id="9" name="Text 6"/>
+          <p:cNvSpPr/>
+          <p:nvPr/>
+        </p:nvSpPr>
+        <p:spPr>
+          <a:xfrm>
+            <a:off x="4343400" y="3291840"/>
+            <a:ext cx="3474720" cy="2011680"/>
           </a:xfrm>
           <a:prstGeom prst="rect">
             <a:avLst/>
@@ -7263,72 +7643,78 @@
           <a:lstStyle/>
           <a:p>
             <a:pPr indent="0" marL="0">
-              <a:buNone/>
-            </a:pPr>
-            <a:r>
-              <a:rPr lang="en-US" sz="1350" dirty="0">
-                <a:solidFill>
-                  <a:srgbClr val="6E6E73"/>
+              <a:lnSpc>
+                <a:spcPct val="110000"/>
+              </a:lnSpc>
+              <a:buNone/>
+            </a:pPr>
+            <a:r>
+              <a:rPr lang="en-US" sz="1700" dirty="0">
+                <a:solidFill>
+                  <a:srgbClr val="86868B"/>
                 </a:solidFill>
                 <a:latin typeface="Inter" pitchFamily="34" charset="0"/>
                 <a:ea typeface="Inter" pitchFamily="34" charset="-122"/>
                 <a:cs typeface="Inter" pitchFamily="34" charset="-120"/>
               </a:rPr>
-              <a:t>mediana degli analisti fuori dal consorzio</a:t>
-            </a:r>
-            <a:endParaRPr lang="en-US" sz="1350" dirty="0"/>
-          </a:p>
-        </p:txBody>
-      </p:sp>
-      <p:sp>
-        <p:nvSpPr>
-          <p:cNvPr id="11" name="Text 7"/>
-          <p:cNvSpPr/>
-          <p:nvPr/>
-        </p:nvSpPr>
-        <p:spPr>
-          <a:xfrm>
-            <a:off x="8503920" y="4846320"/>
-            <a:ext cx="3291840" cy="868680"/>
-          </a:xfrm>
-          <a:prstGeom prst="rect">
-            <a:avLst/>
-          </a:prstGeom>
-          <a:noFill/>
-          <a:ln/>
-        </p:spPr>
-        <p:txBody>
-          <a:bodyPr wrap="square" lIns="0" tIns="0" rIns="0" bIns="0" rtlCol="0" anchor="b"/>
-          <a:lstStyle/>
-          <a:p>
-            <a:pPr indent="0" marL="0">
-              <a:buNone/>
-            </a:pPr>
-            <a:r>
-              <a:rPr lang="en-US" sz="4800" b="1" spc="-60" kern="0" dirty="0">
-                <a:solidFill>
-                  <a:srgbClr val="0B1F3A"/>
+              <a:t>Nel bookbuilding il prezzo d'offerta raccoglie la domanda (Benveniste e Spindt 1989), non stima i flussi.</a:t>
+            </a:r>
+            <a:endParaRPr lang="en-US" sz="1700" dirty="0"/>
+          </a:p>
+        </p:txBody>
+      </p:sp>
+      <p:sp>
+        <p:nvSpPr>
+          <p:cNvPr id="10" name="Text 7"/>
+          <p:cNvSpPr/>
+          <p:nvPr/>
+        </p:nvSpPr>
+        <p:spPr>
+          <a:xfrm>
+            <a:off x="8138160" y="2331720"/>
+            <a:ext cx="3566160" cy="822960"/>
+          </a:xfrm>
+          <a:prstGeom prst="rect">
+            <a:avLst/>
+          </a:prstGeom>
+          <a:noFill/>
+          <a:ln/>
+        </p:spPr>
+        <p:txBody>
+          <a:bodyPr wrap="square" lIns="0" tIns="0" rIns="0" bIns="0" rtlCol="0" anchor="t"/>
+          <a:lstStyle/>
+          <a:p>
+            <a:pPr indent="0" marL="0">
+              <a:lnSpc>
+                <a:spcPct val="105000"/>
+              </a:lnSpc>
+              <a:buNone/>
+            </a:pPr>
+            <a:r>
+              <a:rPr lang="en-US" sz="2600" b="1" spc="-40" kern="0" dirty="0">
+                <a:solidFill>
+                  <a:srgbClr val="FFB340"/>
                 </a:solidFill>
                 <a:latin typeface="Inter Display" pitchFamily="34" charset="0"/>
                 <a:ea typeface="Inter Display" pitchFamily="34" charset="-122"/>
                 <a:cs typeface="Inter Display" pitchFamily="34" charset="-120"/>
               </a:rPr>
-              <a:t>4,9%</a:t>
-            </a:r>
-            <a:endParaRPr lang="en-US" sz="4800" dirty="0"/>
-          </a:p>
-        </p:txBody>
-      </p:sp>
-      <p:sp>
-        <p:nvSpPr>
-          <p:cNvPr id="12" name="Text 8"/>
-          <p:cNvSpPr/>
-          <p:nvPr/>
-        </p:nvSpPr>
-        <p:spPr>
-          <a:xfrm>
-            <a:off x="8503920" y="5760720"/>
-            <a:ext cx="3154680" cy="502920"/>
+              <a:t>Anche 135 $ chiede di più</a:t>
+            </a:r>
+            <a:endParaRPr lang="en-US" sz="2600" dirty="0"/>
+          </a:p>
+        </p:txBody>
+      </p:sp>
+      <p:sp>
+        <p:nvSpPr>
+          <p:cNvPr id="11" name="Text 8"/>
+          <p:cNvSpPr/>
+          <p:nvPr/>
+        </p:nvSpPr>
+        <p:spPr>
+          <a:xfrm>
+            <a:off x="8138160" y="3291840"/>
+            <a:ext cx="3474720" cy="2011680"/>
           </a:xfrm>
           <a:prstGeom prst="rect">
             <a:avLst/>
@@ -7341,20 +7727,23 @@
           <a:lstStyle/>
           <a:p>
             <a:pPr indent="0" marL="0">
-              <a:buNone/>
-            </a:pPr>
-            <a:r>
-              <a:rPr lang="en-US" sz="1350" dirty="0">
-                <a:solidFill>
-                  <a:srgbClr val="6E6E73"/>
+              <a:lnSpc>
+                <a:spcPct val="110000"/>
+              </a:lnSpc>
+              <a:buNone/>
+            </a:pPr>
+            <a:r>
+              <a:rPr lang="en-US" sz="1700" dirty="0">
+                <a:solidFill>
+                  <a:srgbClr val="86868B"/>
                 </a:solidFill>
                 <a:latin typeface="Inter" pitchFamily="34" charset="0"/>
                 <a:ea typeface="Inter" pitchFamily="34" charset="-122"/>
                 <a:cs typeface="Inter" pitchFamily="34" charset="-120"/>
               </a:rPr>
-              <a:t>delle azioni negoziabili al debutto: il prezzo riflette gli ottimisti (Miller 1977)</a:t>
-            </a:r>
-            <a:endParaRPr lang="en-US" sz="1350" dirty="0"/>
+              <a:t>Con il DCF inverso il collocamento sconta ricavi 3,6x il caso di successo: 2.263 mld al 2036.</a:t>
+            </a:r>
+            <a:endParaRPr lang="en-US" sz="1700" dirty="0"/>
           </a:p>
         </p:txBody>
       </p:sp>
@@ -7388,7 +7777,7 @@
             <a:lvl1pPr>
               <a:defRPr sz="800">
                 <a:solidFill>
-                  <a:srgbClr val="6E6E73"/>
+                  <a:srgbClr val="86868B"/>
                 </a:solidFill>
                 <a:latin typeface="Inter"/>
                 <a:ea typeface="Inter"/>
@@ -7460,13 +7849,13 @@
             <a:r>
               <a:rPr lang="en-US" sz="1200" spc="300" kern="0" dirty="0">
                 <a:solidFill>
-                  <a:srgbClr val="86868B"/>
+                  <a:srgbClr val="6E6E73"/>
                 </a:solidFill>
                 <a:latin typeface="D-DIN" pitchFamily="34" charset="0"/>
                 <a:ea typeface="D-DIN" pitchFamily="34" charset="-122"/>
                 <a:cs typeface="D-DIN" pitchFamily="34" charset="-120"/>
               </a:rPr>
-              <a:t>LA RISPOSTA</a:t>
+              <a:t>PERCHÉ IL PREZZO RESTA SOPRA IL VALORE</a:t>
             </a:r>
             <a:endParaRPr lang="en-US" sz="1200" dirty="0"/>
           </a:p>
@@ -7501,13 +7890,13 @@
             <a:r>
               <a:rPr lang="en-US" sz="4000" b="1" spc="-60" kern="0" dirty="0">
                 <a:solidFill>
-                  <a:srgbClr val="FFFFFF"/>
+                  <a:srgbClr val="1D1D1F"/>
                 </a:solidFill>
                 <a:latin typeface="Inter Display" pitchFamily="34" charset="0"/>
                 <a:ea typeface="Inter Display" pitchFamily="34" charset="-122"/>
                 <a:cs typeface="Inter Display" pitchFamily="34" charset="-120"/>
               </a:rPr>
-              <a:t>No: il prezzo non misura il valore dei flussi</a:t>
+              <a:t>Chi ha collocato vede 228 $, chi no 173 $</a:t>
             </a:r>
             <a:endParaRPr lang="en-US" sz="4000" dirty="0"/>
           </a:p>
@@ -7515,14 +7904,16 @@
       </p:sp>
       <p:sp>
         <p:nvSpPr>
-          <p:cNvPr id="5" name="Text 2"/>
-          <p:cNvSpPr/>
-          <p:nvPr/>
-        </p:nvSpPr>
-        <p:spPr>
-          <a:xfrm>
-            <a:off x="548640" y="2103120"/>
-            <a:ext cx="11064240" cy="1737360"/>
+          <p:cNvPr id="4" name="Text 0"/>
+          <p:cNvSpPr/>
+          <p:nvPr>
+            <p:ph idx="102" type="body" hasCustomPrompt="1"/>
+          </p:nvPr>
+        </p:nvSpPr>
+        <p:spPr>
+          <a:xfrm>
+            <a:off x="548640" y="6400800"/>
+            <a:ext cx="10424160" cy="228600"/>
           </a:xfrm>
           <a:prstGeom prst="rect">
             <a:avLst/>
@@ -7535,36 +7926,135 @@
           <a:lstStyle/>
           <a:p>
             <a:pPr indent="0" marL="0">
-              <a:lnSpc>
-                <a:spcPct val="105000"/>
-              </a:lnSpc>
-              <a:buNone/>
-            </a:pPr>
-            <a:r>
-              <a:rPr lang="en-US" sz="3000" b="1" spc="-40" kern="0" dirty="0">
-                <a:solidFill>
-                  <a:srgbClr val="FFFFFF"/>
+              <a:buNone/>
+            </a:pPr>
+            <a:r>
+              <a:rPr lang="en-US" sz="800" dirty="0">
+                <a:solidFill>
+                  <a:srgbClr val="6E6E73"/>
+                </a:solidFill>
+                <a:latin typeface="Inter" pitchFamily="34" charset="0"/>
+                <a:ea typeface="Inter" pitchFamily="34" charset="-122"/>
+                <a:cs typeface="Inter" pitchFamily="34" charset="-120"/>
+              </a:rPr>
+              <a:t>Fonte: Target dopo il quiet period (7/7/2026): Fortune, The Daily Upside, Yahoo Finance, StockAnalysis.com; ruolo nel consorzio: SEC 424B4 p. 267 e 274; azioni negoziabili: 424B4; Michaely e Womack (1999); Miller (1977)</a:t>
+            </a:r>
+            <a:endParaRPr lang="en-US" sz="800" dirty="0"/>
+          </a:p>
+        </p:txBody>
+      </p:sp>
+      <p:pic>
+        <p:nvPicPr>
+          <p:cNvPr id="6" name="Image 0" descr="Target price delle banche del consorzio e degli analisti esterni">    </p:cNvPr>
+          <p:cNvPicPr>
+            <a:picLocks noChangeAspect="1"/>
+          </p:cNvPicPr>
+          <p:nvPr/>
+        </p:nvPicPr>
+        <p:blipFill>
+          <a:blip r:embed="rId1"/>
+          <a:stretch>
+            <a:fillRect/>
+          </a:stretch>
+        </p:blipFill>
+        <p:spPr>
+          <a:xfrm>
+            <a:off x="411480" y="1874520"/>
+            <a:ext cx="7680960" cy="4320540"/>
+          </a:xfrm>
+          <a:prstGeom prst="rect">
+            <a:avLst/>
+          </a:prstGeom>
+        </p:spPr>
+      </p:pic>
+      <p:sp>
+        <p:nvSpPr>
+          <p:cNvPr id="7" name="Text 3"/>
+          <p:cNvSpPr/>
+          <p:nvPr/>
+        </p:nvSpPr>
+        <p:spPr>
+          <a:xfrm>
+            <a:off x="8503920" y="1920240"/>
+            <a:ext cx="3291840" cy="868680"/>
+          </a:xfrm>
+          <a:prstGeom prst="rect">
+            <a:avLst/>
+          </a:prstGeom>
+          <a:noFill/>
+          <a:ln/>
+        </p:spPr>
+        <p:txBody>
+          <a:bodyPr wrap="square" lIns="0" tIns="0" rIns="0" bIns="0" rtlCol="0" anchor="b"/>
+          <a:lstStyle/>
+          <a:p>
+            <a:pPr indent="0" marL="0">
+              <a:buNone/>
+            </a:pPr>
+            <a:r>
+              <a:rPr lang="en-US" sz="4800" b="1" spc="-60" kern="0" dirty="0">
+                <a:solidFill>
+                  <a:srgbClr val="C0392B"/>
                 </a:solidFill>
                 <a:latin typeface="Inter Display" pitchFamily="34" charset="0"/>
                 <a:ea typeface="Inter Display" pitchFamily="34" charset="-122"/>
                 <a:cs typeface="Inter Display" pitchFamily="34" charset="-120"/>
               </a:rPr>
-              <a:t>Il prezzo rappresenta la possibilità di un'impresa quattro volte più grande, non il valore di quella che si può dimostrare oggi.</a:t>
-            </a:r>
-            <a:endParaRPr lang="en-US" sz="3000" dirty="0"/>
-          </a:p>
-        </p:txBody>
-      </p:sp>
-      <p:sp>
-        <p:nvSpPr>
-          <p:cNvPr id="6" name="Text 3"/>
-          <p:cNvSpPr/>
-          <p:nvPr/>
-        </p:nvSpPr>
-        <p:spPr>
-          <a:xfrm>
-            <a:off x="548640" y="4069080"/>
-            <a:ext cx="3566160" cy="1188720"/>
+              <a:t>228 $</a:t>
+            </a:r>
+            <a:endParaRPr lang="en-US" sz="4800" dirty="0"/>
+          </a:p>
+        </p:txBody>
+      </p:sp>
+      <p:sp>
+        <p:nvSpPr>
+          <p:cNvPr id="8" name="Text 4"/>
+          <p:cNvSpPr/>
+          <p:nvPr/>
+        </p:nvSpPr>
+        <p:spPr>
+          <a:xfrm>
+            <a:off x="8503920" y="2834640"/>
+            <a:ext cx="3154680" cy="502920"/>
+          </a:xfrm>
+          <a:prstGeom prst="rect">
+            <a:avLst/>
+          </a:prstGeom>
+          <a:noFill/>
+          <a:ln/>
+        </p:spPr>
+        <p:txBody>
+          <a:bodyPr wrap="square" lIns="0" tIns="0" rIns="0" bIns="0" rtlCol="0" anchor="t"/>
+          <a:lstStyle/>
+          <a:p>
+            <a:pPr indent="0" marL="0">
+              <a:buNone/>
+            </a:pPr>
+            <a:r>
+              <a:rPr lang="en-US" sz="1350" dirty="0">
+                <a:solidFill>
+                  <a:srgbClr val="6E6E73"/>
+                </a:solidFill>
+                <a:latin typeface="Inter" pitchFamily="34" charset="0"/>
+                <a:ea typeface="Inter" pitchFamily="34" charset="-122"/>
+                <a:cs typeface="Inter" pitchFamily="34" charset="-120"/>
+              </a:rPr>
+              <a:t>mediana dei target delle banche del consorzio</a:t>
+            </a:r>
+            <a:endParaRPr lang="en-US" sz="1350" dirty="0"/>
+          </a:p>
+        </p:txBody>
+      </p:sp>
+      <p:sp>
+        <p:nvSpPr>
+          <p:cNvPr id="9" name="Text 5"/>
+          <p:cNvSpPr/>
+          <p:nvPr/>
+        </p:nvSpPr>
+        <p:spPr>
+          <a:xfrm>
+            <a:off x="8503920" y="3383280"/>
+            <a:ext cx="3291840" cy="868680"/>
           </a:xfrm>
           <a:prstGeom prst="rect">
             <a:avLst/>
@@ -7580,30 +8070,30 @@
               <a:buNone/>
             </a:pPr>
             <a:r>
-              <a:rPr lang="en-US" sz="6600" b="1" spc="-60" kern="0" dirty="0">
-                <a:solidFill>
-                  <a:srgbClr val="2997FF"/>
+              <a:rPr lang="en-US" sz="4800" b="1" spc="-60" kern="0" dirty="0">
+                <a:solidFill>
+                  <a:srgbClr val="0071E3"/>
                 </a:solidFill>
                 <a:latin typeface="Inter Display" pitchFamily="34" charset="0"/>
                 <a:ea typeface="Inter Display" pitchFamily="34" charset="-122"/>
                 <a:cs typeface="Inter Display" pitchFamily="34" charset="-120"/>
               </a:rPr>
-              <a:t>60,06 $</a:t>
-            </a:r>
-            <a:endParaRPr lang="en-US" sz="6600" dirty="0"/>
-          </a:p>
-        </p:txBody>
-      </p:sp>
-      <p:sp>
-        <p:nvSpPr>
-          <p:cNvPr id="7" name="Text 4"/>
-          <p:cNvSpPr/>
-          <p:nvPr/>
-        </p:nvSpPr>
-        <p:spPr>
-          <a:xfrm>
-            <a:off x="548640" y="5349240"/>
-            <a:ext cx="3566160" cy="365760"/>
+              <a:t>173 $</a:t>
+            </a:r>
+            <a:endParaRPr lang="en-US" sz="4800" dirty="0"/>
+          </a:p>
+        </p:txBody>
+      </p:sp>
+      <p:sp>
+        <p:nvSpPr>
+          <p:cNvPr id="10" name="Text 6"/>
+          <p:cNvSpPr/>
+          <p:nvPr/>
+        </p:nvSpPr>
+        <p:spPr>
+          <a:xfrm>
+            <a:off x="8503920" y="4297680"/>
+            <a:ext cx="3154680" cy="502920"/>
           </a:xfrm>
           <a:prstGeom prst="rect">
             <a:avLst/>
@@ -7619,30 +8109,30 @@
               <a:buNone/>
             </a:pPr>
             <a:r>
-              <a:rPr lang="en-US" sz="1500" dirty="0">
-                <a:solidFill>
-                  <a:srgbClr val="86868B"/>
+              <a:rPr lang="en-US" sz="1350" dirty="0">
+                <a:solidFill>
+                  <a:srgbClr val="6E6E73"/>
                 </a:solidFill>
                 <a:latin typeface="Inter" pitchFamily="34" charset="0"/>
                 <a:ea typeface="Inter" pitchFamily="34" charset="-122"/>
                 <a:cs typeface="Inter" pitchFamily="34" charset="-120"/>
               </a:rPr>
-              <a:t>il valore dei flussi</a:t>
-            </a:r>
-            <a:endParaRPr lang="en-US" sz="1500" dirty="0"/>
-          </a:p>
-        </p:txBody>
-      </p:sp>
-      <p:sp>
-        <p:nvSpPr>
-          <p:cNvPr id="8" name="Text 5"/>
-          <p:cNvSpPr/>
-          <p:nvPr/>
-        </p:nvSpPr>
-        <p:spPr>
-          <a:xfrm>
-            <a:off x="4343400" y="4069080"/>
-            <a:ext cx="3566160" cy="1188720"/>
+              <a:t>mediana degli analisti fuori dal consorzio</a:t>
+            </a:r>
+            <a:endParaRPr lang="en-US" sz="1350" dirty="0"/>
+          </a:p>
+        </p:txBody>
+      </p:sp>
+      <p:sp>
+        <p:nvSpPr>
+          <p:cNvPr id="11" name="Text 7"/>
+          <p:cNvSpPr/>
+          <p:nvPr/>
+        </p:nvSpPr>
+        <p:spPr>
+          <a:xfrm>
+            <a:off x="8503920" y="4846320"/>
+            <a:ext cx="3291840" cy="868680"/>
           </a:xfrm>
           <a:prstGeom prst="rect">
             <a:avLst/>
@@ -7658,30 +8148,30 @@
               <a:buNone/>
             </a:pPr>
             <a:r>
-              <a:rPr lang="en-US" sz="6600" b="1" spc="-60" kern="0" dirty="0">
-                <a:solidFill>
-                  <a:srgbClr val="FFFFFF"/>
+              <a:rPr lang="en-US" sz="4800" b="1" spc="-60" kern="0" dirty="0">
+                <a:solidFill>
+                  <a:srgbClr val="0B1F3A"/>
                 </a:solidFill>
                 <a:latin typeface="Inter Display" pitchFamily="34" charset="0"/>
                 <a:ea typeface="Inter Display" pitchFamily="34" charset="-122"/>
                 <a:cs typeface="Inter Display" pitchFamily="34" charset="-120"/>
               </a:rPr>
-              <a:t>36%</a:t>
-            </a:r>
-            <a:endParaRPr lang="en-US" sz="6600" dirty="0"/>
-          </a:p>
-        </p:txBody>
-      </p:sp>
-      <p:sp>
-        <p:nvSpPr>
-          <p:cNvPr id="9" name="Text 6"/>
-          <p:cNvSpPr/>
-          <p:nvPr/>
-        </p:nvSpPr>
-        <p:spPr>
-          <a:xfrm>
-            <a:off x="4343400" y="5349240"/>
-            <a:ext cx="3566160" cy="365760"/>
+              <a:t>4,9%</a:t>
+            </a:r>
+            <a:endParaRPr lang="en-US" sz="4800" dirty="0"/>
+          </a:p>
+        </p:txBody>
+      </p:sp>
+      <p:sp>
+        <p:nvSpPr>
+          <p:cNvPr id="12" name="Text 8"/>
+          <p:cNvSpPr/>
+          <p:nvPr/>
+        </p:nvSpPr>
+        <p:spPr>
+          <a:xfrm>
+            <a:off x="8503920" y="5760720"/>
+            <a:ext cx="3154680" cy="502920"/>
           </a:xfrm>
           <a:prstGeom prst="rect">
             <a:avLst/>
@@ -7697,125 +8187,17 @@
               <a:buNone/>
             </a:pPr>
             <a:r>
-              <a:rPr lang="en-US" sz="1500" dirty="0">
-                <a:solidFill>
-                  <a:srgbClr val="86868B"/>
+              <a:rPr lang="en-US" sz="1350" dirty="0">
+                <a:solidFill>
+                  <a:srgbClr val="6E6E73"/>
                 </a:solidFill>
                 <a:latin typeface="Inter" pitchFamily="34" charset="0"/>
                 <a:ea typeface="Inter" pitchFamily="34" charset="-122"/>
                 <a:cs typeface="Inter" pitchFamily="34" charset="-120"/>
               </a:rPr>
-              <a:t>del prezzo spiegato dai flussi</a:t>
-            </a:r>
-            <a:endParaRPr lang="en-US" sz="1500" dirty="0"/>
-          </a:p>
-        </p:txBody>
-      </p:sp>
-      <p:sp>
-        <p:nvSpPr>
-          <p:cNvPr id="10" name="Text 7"/>
-          <p:cNvSpPr/>
-          <p:nvPr/>
-        </p:nvSpPr>
-        <p:spPr>
-          <a:xfrm>
-            <a:off x="8138160" y="4069080"/>
-            <a:ext cx="3566160" cy="1188720"/>
-          </a:xfrm>
-          <a:prstGeom prst="rect">
-            <a:avLst/>
-          </a:prstGeom>
-          <a:noFill/>
-          <a:ln/>
-        </p:spPr>
-        <p:txBody>
-          <a:bodyPr wrap="square" lIns="0" tIns="0" rIns="0" bIns="0" rtlCol="0" anchor="b"/>
-          <a:lstStyle/>
-          <a:p>
-            <a:pPr indent="0" marL="0">
-              <a:buNone/>
-            </a:pPr>
-            <a:r>
-              <a:rPr lang="en-US" sz="6600" b="1" spc="-60" kern="0" dirty="0">
-                <a:solidFill>
-                  <a:srgbClr val="FFB340"/>
-                </a:solidFill>
-                <a:latin typeface="Inter Display" pitchFamily="34" charset="0"/>
-                <a:ea typeface="Inter Display" pitchFamily="34" charset="-122"/>
-                <a:cs typeface="Inter Display" pitchFamily="34" charset="-120"/>
-              </a:rPr>
-              <a:t>2.925</a:t>
-            </a:r>
-            <a:endParaRPr lang="en-US" sz="6600" dirty="0"/>
-          </a:p>
-        </p:txBody>
-      </p:sp>
-      <p:sp>
-        <p:nvSpPr>
-          <p:cNvPr id="11" name="Text 8"/>
-          <p:cNvSpPr/>
-          <p:nvPr/>
-        </p:nvSpPr>
-        <p:spPr>
-          <a:xfrm>
-            <a:off x="8138160" y="5349240"/>
-            <a:ext cx="3566160" cy="365760"/>
-          </a:xfrm>
-          <a:prstGeom prst="rect">
-            <a:avLst/>
-          </a:prstGeom>
-          <a:noFill/>
-          <a:ln/>
-        </p:spPr>
-        <p:txBody>
-          <a:bodyPr wrap="square" lIns="0" tIns="0" rIns="0" bIns="0" rtlCol="0" anchor="t"/>
-          <a:lstStyle/>
-          <a:p>
-            <a:pPr indent="0" marL="0">
-              <a:buNone/>
-            </a:pPr>
-            <a:r>
-              <a:rPr lang="en-US" sz="1500" dirty="0">
-                <a:solidFill>
-                  <a:srgbClr val="86868B"/>
-                </a:solidFill>
-                <a:latin typeface="Inter" pitchFamily="34" charset="0"/>
-                <a:ea typeface="Inter" pitchFamily="34" charset="-122"/>
-                <a:cs typeface="Inter" pitchFamily="34" charset="-120"/>
-              </a:rPr>
-              <a:t>miliardi di ricavi 2036 che il prezzo sconta</a:t>
-            </a:r>
-            <a:endParaRPr lang="en-US" sz="1500" dirty="0"/>
-          </a:p>
-        </p:txBody>
-      </p:sp>
-      <p:sp>
-        <p:nvSpPr>
-          <p:cNvPr id="12" name="Text 0"/>
-          <p:cNvSpPr/>
-          <p:nvPr>
-            <p:ph idx="102" type="body" hasCustomPrompt="1"/>
-          </p:nvPr>
-        </p:nvSpPr>
-        <p:spPr>
-          <a:xfrm>
-            <a:off x="548640" y="6400800"/>
-            <a:ext cx="10424160" cy="228600"/>
-          </a:xfrm>
-          <a:prstGeom prst="rect">
-            <a:avLst/>
-          </a:prstGeom>
-          <a:noFill/>
-          <a:ln/>
-        </p:spPr>
-        <p:txBody>
-          <a:bodyPr wrap="square" lIns="0" tIns="0" rIns="0" bIns="0" rtlCol="0" anchor="t"/>
-          <a:lstStyle/>
-          <a:p>
-            <a:pPr indent="0" marL="0">
-              <a:buNone/>
-            </a:pPr>
-            <a:endParaRPr lang="en-US" sz="800" dirty="0"/>
+              <a:t>delle azioni negoziabili al debutto: il prezzo riflette gli ottimisti (Miller 1977)</a:t>
+            </a:r>
+            <a:endParaRPr lang="en-US" sz="1350" dirty="0"/>
           </a:p>
         </p:txBody>
       </p:sp>
@@ -7849,7 +8231,7 @@
             <a:lvl1pPr>
               <a:defRPr sz="800">
                 <a:solidFill>
-                  <a:srgbClr val="86868B"/>
+                  <a:srgbClr val="6E6E73"/>
                 </a:solidFill>
                 <a:latin typeface="Inter"/>
                 <a:ea typeface="Inter"/>
@@ -7921,13 +8303,13 @@
             <a:r>
               <a:rPr lang="en-US" sz="1200" spc="300" kern="0" dirty="0">
                 <a:solidFill>
-                  <a:srgbClr val="6E6E73"/>
+                  <a:srgbClr val="86868B"/>
                 </a:solidFill>
                 <a:latin typeface="D-DIN" pitchFamily="34" charset="0"/>
                 <a:ea typeface="D-DIN" pitchFamily="34" charset="-122"/>
                 <a:cs typeface="D-DIN" pitchFamily="34" charset="-120"/>
               </a:rPr>
-              <a:t>FONTI E DOCUMENTI</a:t>
+              <a:t>LA RISPOSTA</a:t>
             </a:r>
             <a:endParaRPr lang="en-US" sz="1200" dirty="0"/>
           </a:p>
@@ -7962,13 +8344,13 @@
             <a:r>
               <a:rPr lang="en-US" sz="4000" b="1" spc="-60" kern="0" dirty="0">
                 <a:solidFill>
-                  <a:srgbClr val="1D1D1F"/>
+                  <a:srgbClr val="FFFFFF"/>
                 </a:solidFill>
                 <a:latin typeface="Inter Display" pitchFamily="34" charset="0"/>
                 <a:ea typeface="Inter Display" pitchFamily="34" charset="-122"/>
                 <a:cs typeface="Inter Display" pitchFamily="34" charset="-120"/>
               </a:rPr>
-              <a:t>Tutte le fonti, il report e il modello Excel</a:t>
+              <a:t>No: il prezzo non misura il valore dei flussi</a:t>
             </a:r>
             <a:endParaRPr lang="en-US" sz="4000" dirty="0"/>
           </a:p>
@@ -7976,7 +8358,283 @@
       </p:sp>
       <p:sp>
         <p:nvSpPr>
-          <p:cNvPr id="4" name="Text 0"/>
+          <p:cNvPr id="5" name="Text 2"/>
+          <p:cNvSpPr/>
+          <p:nvPr/>
+        </p:nvSpPr>
+        <p:spPr>
+          <a:xfrm>
+            <a:off x="548640" y="2103120"/>
+            <a:ext cx="11064240" cy="1737360"/>
+          </a:xfrm>
+          <a:prstGeom prst="rect">
+            <a:avLst/>
+          </a:prstGeom>
+          <a:noFill/>
+          <a:ln/>
+        </p:spPr>
+        <p:txBody>
+          <a:bodyPr wrap="square" lIns="0" tIns="0" rIns="0" bIns="0" rtlCol="0" anchor="t"/>
+          <a:lstStyle/>
+          <a:p>
+            <a:pPr indent="0" marL="0">
+              <a:lnSpc>
+                <a:spcPct val="105000"/>
+              </a:lnSpc>
+              <a:buNone/>
+            </a:pPr>
+            <a:r>
+              <a:rPr lang="en-US" sz="3000" b="1" spc="-40" kern="0" dirty="0">
+                <a:solidFill>
+                  <a:srgbClr val="FFFFFF"/>
+                </a:solidFill>
+                <a:latin typeface="Inter Display" pitchFamily="34" charset="0"/>
+                <a:ea typeface="Inter Display" pitchFamily="34" charset="-122"/>
+                <a:cs typeface="Inter Display" pitchFamily="34" charset="-120"/>
+              </a:rPr>
+              <a:t>Il prezzo rappresenta la possibilità di un'impresa quattro volte più grande, non il valore di quella che si può dimostrare oggi.</a:t>
+            </a:r>
+            <a:endParaRPr lang="en-US" sz="3000" dirty="0"/>
+          </a:p>
+        </p:txBody>
+      </p:sp>
+      <p:sp>
+        <p:nvSpPr>
+          <p:cNvPr id="6" name="Text 3"/>
+          <p:cNvSpPr/>
+          <p:nvPr/>
+        </p:nvSpPr>
+        <p:spPr>
+          <a:xfrm>
+            <a:off x="548640" y="4069080"/>
+            <a:ext cx="3566160" cy="1188720"/>
+          </a:xfrm>
+          <a:prstGeom prst="rect">
+            <a:avLst/>
+          </a:prstGeom>
+          <a:noFill/>
+          <a:ln/>
+        </p:spPr>
+        <p:txBody>
+          <a:bodyPr wrap="square" lIns="0" tIns="0" rIns="0" bIns="0" rtlCol="0" anchor="b"/>
+          <a:lstStyle/>
+          <a:p>
+            <a:pPr indent="0" marL="0">
+              <a:buNone/>
+            </a:pPr>
+            <a:r>
+              <a:rPr lang="en-US" sz="6600" b="1" spc="-60" kern="0" dirty="0">
+                <a:solidFill>
+                  <a:srgbClr val="2997FF"/>
+                </a:solidFill>
+                <a:latin typeface="Inter Display" pitchFamily="34" charset="0"/>
+                <a:ea typeface="Inter Display" pitchFamily="34" charset="-122"/>
+                <a:cs typeface="Inter Display" pitchFamily="34" charset="-120"/>
+              </a:rPr>
+              <a:t>60,06 $</a:t>
+            </a:r>
+            <a:endParaRPr lang="en-US" sz="6600" dirty="0"/>
+          </a:p>
+        </p:txBody>
+      </p:sp>
+      <p:sp>
+        <p:nvSpPr>
+          <p:cNvPr id="7" name="Text 4"/>
+          <p:cNvSpPr/>
+          <p:nvPr/>
+        </p:nvSpPr>
+        <p:spPr>
+          <a:xfrm>
+            <a:off x="548640" y="5349240"/>
+            <a:ext cx="3566160" cy="365760"/>
+          </a:xfrm>
+          <a:prstGeom prst="rect">
+            <a:avLst/>
+          </a:prstGeom>
+          <a:noFill/>
+          <a:ln/>
+        </p:spPr>
+        <p:txBody>
+          <a:bodyPr wrap="square" lIns="0" tIns="0" rIns="0" bIns="0" rtlCol="0" anchor="t"/>
+          <a:lstStyle/>
+          <a:p>
+            <a:pPr indent="0" marL="0">
+              <a:buNone/>
+            </a:pPr>
+            <a:r>
+              <a:rPr lang="en-US" sz="1500" dirty="0">
+                <a:solidFill>
+                  <a:srgbClr val="86868B"/>
+                </a:solidFill>
+                <a:latin typeface="Inter" pitchFamily="34" charset="0"/>
+                <a:ea typeface="Inter" pitchFamily="34" charset="-122"/>
+                <a:cs typeface="Inter" pitchFamily="34" charset="-120"/>
+              </a:rPr>
+              <a:t>il valore dei flussi</a:t>
+            </a:r>
+            <a:endParaRPr lang="en-US" sz="1500" dirty="0"/>
+          </a:p>
+        </p:txBody>
+      </p:sp>
+      <p:sp>
+        <p:nvSpPr>
+          <p:cNvPr id="8" name="Text 5"/>
+          <p:cNvSpPr/>
+          <p:nvPr/>
+        </p:nvSpPr>
+        <p:spPr>
+          <a:xfrm>
+            <a:off x="4343400" y="4069080"/>
+            <a:ext cx="3566160" cy="1188720"/>
+          </a:xfrm>
+          <a:prstGeom prst="rect">
+            <a:avLst/>
+          </a:prstGeom>
+          <a:noFill/>
+          <a:ln/>
+        </p:spPr>
+        <p:txBody>
+          <a:bodyPr wrap="square" lIns="0" tIns="0" rIns="0" bIns="0" rtlCol="0" anchor="b"/>
+          <a:lstStyle/>
+          <a:p>
+            <a:pPr indent="0" marL="0">
+              <a:buNone/>
+            </a:pPr>
+            <a:r>
+              <a:rPr lang="en-US" sz="6600" b="1" spc="-60" kern="0" dirty="0">
+                <a:solidFill>
+                  <a:srgbClr val="FFFFFF"/>
+                </a:solidFill>
+                <a:latin typeface="Inter Display" pitchFamily="34" charset="0"/>
+                <a:ea typeface="Inter Display" pitchFamily="34" charset="-122"/>
+                <a:cs typeface="Inter Display" pitchFamily="34" charset="-120"/>
+              </a:rPr>
+              <a:t>36%</a:t>
+            </a:r>
+            <a:endParaRPr lang="en-US" sz="6600" dirty="0"/>
+          </a:p>
+        </p:txBody>
+      </p:sp>
+      <p:sp>
+        <p:nvSpPr>
+          <p:cNvPr id="9" name="Text 6"/>
+          <p:cNvSpPr/>
+          <p:nvPr/>
+        </p:nvSpPr>
+        <p:spPr>
+          <a:xfrm>
+            <a:off x="4343400" y="5349240"/>
+            <a:ext cx="3566160" cy="365760"/>
+          </a:xfrm>
+          <a:prstGeom prst="rect">
+            <a:avLst/>
+          </a:prstGeom>
+          <a:noFill/>
+          <a:ln/>
+        </p:spPr>
+        <p:txBody>
+          <a:bodyPr wrap="square" lIns="0" tIns="0" rIns="0" bIns="0" rtlCol="0" anchor="t"/>
+          <a:lstStyle/>
+          <a:p>
+            <a:pPr indent="0" marL="0">
+              <a:buNone/>
+            </a:pPr>
+            <a:r>
+              <a:rPr lang="en-US" sz="1500" dirty="0">
+                <a:solidFill>
+                  <a:srgbClr val="86868B"/>
+                </a:solidFill>
+                <a:latin typeface="Inter" pitchFamily="34" charset="0"/>
+                <a:ea typeface="Inter" pitchFamily="34" charset="-122"/>
+                <a:cs typeface="Inter" pitchFamily="34" charset="-120"/>
+              </a:rPr>
+              <a:t>del prezzo spiegato dai flussi</a:t>
+            </a:r>
+            <a:endParaRPr lang="en-US" sz="1500" dirty="0"/>
+          </a:p>
+        </p:txBody>
+      </p:sp>
+      <p:sp>
+        <p:nvSpPr>
+          <p:cNvPr id="10" name="Text 7"/>
+          <p:cNvSpPr/>
+          <p:nvPr/>
+        </p:nvSpPr>
+        <p:spPr>
+          <a:xfrm>
+            <a:off x="8138160" y="4069080"/>
+            <a:ext cx="3566160" cy="1188720"/>
+          </a:xfrm>
+          <a:prstGeom prst="rect">
+            <a:avLst/>
+          </a:prstGeom>
+          <a:noFill/>
+          <a:ln/>
+        </p:spPr>
+        <p:txBody>
+          <a:bodyPr wrap="square" lIns="0" tIns="0" rIns="0" bIns="0" rtlCol="0" anchor="b"/>
+          <a:lstStyle/>
+          <a:p>
+            <a:pPr indent="0" marL="0">
+              <a:buNone/>
+            </a:pPr>
+            <a:r>
+              <a:rPr lang="en-US" sz="6600" b="1" spc="-60" kern="0" dirty="0">
+                <a:solidFill>
+                  <a:srgbClr val="FFB340"/>
+                </a:solidFill>
+                <a:latin typeface="Inter Display" pitchFamily="34" charset="0"/>
+                <a:ea typeface="Inter Display" pitchFamily="34" charset="-122"/>
+                <a:cs typeface="Inter Display" pitchFamily="34" charset="-120"/>
+              </a:rPr>
+              <a:t>2.925</a:t>
+            </a:r>
+            <a:endParaRPr lang="en-US" sz="6600" dirty="0"/>
+          </a:p>
+        </p:txBody>
+      </p:sp>
+      <p:sp>
+        <p:nvSpPr>
+          <p:cNvPr id="11" name="Text 8"/>
+          <p:cNvSpPr/>
+          <p:nvPr/>
+        </p:nvSpPr>
+        <p:spPr>
+          <a:xfrm>
+            <a:off x="8138160" y="5349240"/>
+            <a:ext cx="3566160" cy="365760"/>
+          </a:xfrm>
+          <a:prstGeom prst="rect">
+            <a:avLst/>
+          </a:prstGeom>
+          <a:noFill/>
+          <a:ln/>
+        </p:spPr>
+        <p:txBody>
+          <a:bodyPr wrap="square" lIns="0" tIns="0" rIns="0" bIns="0" rtlCol="0" anchor="t"/>
+          <a:lstStyle/>
+          <a:p>
+            <a:pPr indent="0" marL="0">
+              <a:buNone/>
+            </a:pPr>
+            <a:r>
+              <a:rPr lang="en-US" sz="1500" dirty="0">
+                <a:solidFill>
+                  <a:srgbClr val="86868B"/>
+                </a:solidFill>
+                <a:latin typeface="Inter" pitchFamily="34" charset="0"/>
+                <a:ea typeface="Inter" pitchFamily="34" charset="-122"/>
+                <a:cs typeface="Inter" pitchFamily="34" charset="-120"/>
+              </a:rPr>
+              <a:t>miliardi di ricavi 2036 che il prezzo sconta</a:t>
+            </a:r>
+            <a:endParaRPr lang="en-US" sz="1500" dirty="0"/>
+          </a:p>
+        </p:txBody>
+      </p:sp>
+      <p:sp>
+        <p:nvSpPr>
+          <p:cNvPr id="12" name="Text 0"/>
           <p:cNvSpPr/>
           <p:nvPr>
             <p:ph idx="102" type="body" hasCustomPrompt="1"/>
@@ -8000,393 +8658,7 @@
             <a:pPr indent="0" marL="0">
               <a:buNone/>
             </a:pPr>
-            <a:r>
-              <a:rPr lang="en-US" sz="800" dirty="0">
-                <a:solidFill>
-                  <a:srgbClr val="6E6E73"/>
-                </a:solidFill>
-                <a:latin typeface="Inter" pitchFamily="34" charset="0"/>
-                <a:ea typeface="Inter" pitchFamily="34" charset="-122"/>
-                <a:cs typeface="Inter" pitchFamily="34" charset="-120"/>
-              </a:rPr>
-              <a:t>Fonte: Sito del lavoro: gherardo200-glitch.github.io/spacex-valutazione</a:t>
-            </a:r>
             <a:endParaRPr lang="en-US" sz="800" dirty="0"/>
-          </a:p>
-        </p:txBody>
-      </p:sp>
-      <p:pic>
-        <p:nvPicPr>
-          <p:cNvPr id="6" name="Image 0" descr="QR code della pagina delle fonti">    </p:cNvPr>
-          <p:cNvPicPr>
-            <a:picLocks noChangeAspect="1"/>
-          </p:cNvPicPr>
-          <p:nvPr/>
-        </p:nvPicPr>
-        <p:blipFill>
-          <a:blip r:embed="rId1"/>
-          <a:stretch>
-            <a:fillRect/>
-          </a:stretch>
-        </p:blipFill>
-        <p:spPr>
-          <a:xfrm>
-            <a:off x="548640" y="1828800"/>
-            <a:ext cx="4023360" cy="4023360"/>
-          </a:xfrm>
-          <a:prstGeom prst="rect">
-            <a:avLst/>
-          </a:prstGeom>
-        </p:spPr>
-      </p:pic>
-      <p:sp>
-        <p:nvSpPr>
-          <p:cNvPr id="7" name="Text 3"/>
-          <p:cNvSpPr/>
-          <p:nvPr/>
-        </p:nvSpPr>
-        <p:spPr>
-          <a:xfrm>
-            <a:off x="5120640" y="1920240"/>
-            <a:ext cx="6400800" cy="411480"/>
-          </a:xfrm>
-          <a:prstGeom prst="rect">
-            <a:avLst/>
-          </a:prstGeom>
-          <a:noFill/>
-          <a:ln/>
-        </p:spPr>
-        <p:txBody>
-          <a:bodyPr wrap="square" lIns="0" tIns="0" rIns="0" bIns="0" rtlCol="0" anchor="t"/>
-          <a:lstStyle/>
-          <a:p>
-            <a:pPr indent="0" marL="0">
-              <a:buNone/>
-            </a:pPr>
-            <a:r>
-              <a:rPr lang="en-US" sz="2400" b="1" spc="-60" kern="0" dirty="0">
-                <a:solidFill>
-                  <a:srgbClr val="1D1D1F"/>
-                </a:solidFill>
-                <a:latin typeface="Inter Display" pitchFamily="34" charset="0"/>
-                <a:ea typeface="Inter Display" pitchFamily="34" charset="-122"/>
-                <a:cs typeface="Inter Display" pitchFamily="34" charset="-120"/>
-              </a:rPr>
-              <a:t>Fonti</a:t>
-            </a:r>
-            <a:endParaRPr lang="en-US" sz="2400" dirty="0"/>
-          </a:p>
-        </p:txBody>
-      </p:sp>
-      <p:sp>
-        <p:nvSpPr>
-          <p:cNvPr id="8" name="Text 4"/>
-          <p:cNvSpPr/>
-          <p:nvPr/>
-        </p:nvSpPr>
-        <p:spPr>
-          <a:xfrm>
-            <a:off x="5120640" y="2331720"/>
-            <a:ext cx="6400800" cy="365760"/>
-          </a:xfrm>
-          <a:prstGeom prst="rect">
-            <a:avLst/>
-          </a:prstGeom>
-          <a:noFill/>
-          <a:ln/>
-        </p:spPr>
-        <p:txBody>
-          <a:bodyPr wrap="square" lIns="0" tIns="0" rIns="0" bIns="0" rtlCol="0" anchor="t"/>
-          <a:lstStyle/>
-          <a:p>
-            <a:pPr indent="0" marL="0">
-              <a:buNone/>
-            </a:pPr>
-            <a:r>
-              <a:rPr lang="en-US" sz="1400" dirty="0">
-                <a:solidFill>
-                  <a:srgbClr val="6E6E73"/>
-                </a:solidFill>
-                <a:latin typeface="Inter" pitchFamily="34" charset="0"/>
-                <a:ea typeface="Inter" pitchFamily="34" charset="-122"/>
-                <a:cs typeface="Inter" pitchFamily="34" charset="-120"/>
-              </a:rPr>
-              <a:t>documenti SEC, prezzi di mercato, articoli accademici, analisti e stampa, con i link</a:t>
-            </a:r>
-            <a:endParaRPr lang="en-US" sz="1400" dirty="0"/>
-          </a:p>
-        </p:txBody>
-      </p:sp>
-      <p:sp>
-        <p:nvSpPr>
-          <p:cNvPr id="9" name="Text 5"/>
-          <p:cNvSpPr/>
-          <p:nvPr/>
-        </p:nvSpPr>
-        <p:spPr>
-          <a:xfrm>
-            <a:off x="5120640" y="2834640"/>
-            <a:ext cx="6400800" cy="411480"/>
-          </a:xfrm>
-          <a:prstGeom prst="rect">
-            <a:avLst/>
-          </a:prstGeom>
-          <a:noFill/>
-          <a:ln/>
-        </p:spPr>
-        <p:txBody>
-          <a:bodyPr wrap="square" lIns="0" tIns="0" rIns="0" bIns="0" rtlCol="0" anchor="t"/>
-          <a:lstStyle/>
-          <a:p>
-            <a:pPr indent="0" marL="0">
-              <a:buNone/>
-            </a:pPr>
-            <a:r>
-              <a:rPr lang="en-US" sz="2400" b="1" spc="-60" kern="0" dirty="0">
-                <a:solidFill>
-                  <a:srgbClr val="1D1D1F"/>
-                </a:solidFill>
-                <a:latin typeface="Inter Display" pitchFamily="34" charset="0"/>
-                <a:ea typeface="Inter Display" pitchFamily="34" charset="-122"/>
-                <a:cs typeface="Inter Display" pitchFamily="34" charset="-120"/>
-              </a:rPr>
-              <a:t>Report</a:t>
-            </a:r>
-            <a:endParaRPr lang="en-US" sz="2400" dirty="0"/>
-          </a:p>
-        </p:txBody>
-      </p:sp>
-      <p:sp>
-        <p:nvSpPr>
-          <p:cNvPr id="10" name="Text 6"/>
-          <p:cNvSpPr/>
-          <p:nvPr/>
-        </p:nvSpPr>
-        <p:spPr>
-          <a:xfrm>
-            <a:off x="5120640" y="3246120"/>
-            <a:ext cx="6400800" cy="365760"/>
-          </a:xfrm>
-          <a:prstGeom prst="rect">
-            <a:avLst/>
-          </a:prstGeom>
-          <a:noFill/>
-          <a:ln/>
-        </p:spPr>
-        <p:txBody>
-          <a:bodyPr wrap="square" lIns="0" tIns="0" rIns="0" bIns="0" rtlCol="0" anchor="t"/>
-          <a:lstStyle/>
-          <a:p>
-            <a:pPr indent="0" marL="0">
-              <a:buNone/>
-            </a:pPr>
-            <a:r>
-              <a:rPr lang="en-US" sz="1400" dirty="0">
-                <a:solidFill>
-                  <a:srgbClr val="6E6E73"/>
-                </a:solidFill>
-                <a:latin typeface="Inter" pitchFamily="34" charset="0"/>
-                <a:ea typeface="Inter" pitchFamily="34" charset="-122"/>
-                <a:cs typeface="Inter" pitchFamily="34" charset="-120"/>
-              </a:rPr>
-              <a:t>il caso completo, 32 pagine, con tutti gli esibiti</a:t>
-            </a:r>
-            <a:endParaRPr lang="en-US" sz="1400" dirty="0"/>
-          </a:p>
-        </p:txBody>
-      </p:sp>
-      <p:sp>
-        <p:nvSpPr>
-          <p:cNvPr id="11" name="Text 7"/>
-          <p:cNvSpPr/>
-          <p:nvPr/>
-        </p:nvSpPr>
-        <p:spPr>
-          <a:xfrm>
-            <a:off x="5120640" y="3749040"/>
-            <a:ext cx="6400800" cy="411480"/>
-          </a:xfrm>
-          <a:prstGeom prst="rect">
-            <a:avLst/>
-          </a:prstGeom>
-          <a:noFill/>
-          <a:ln/>
-        </p:spPr>
-        <p:txBody>
-          <a:bodyPr wrap="square" lIns="0" tIns="0" rIns="0" bIns="0" rtlCol="0" anchor="t"/>
-          <a:lstStyle/>
-          <a:p>
-            <a:pPr indent="0" marL="0">
-              <a:buNone/>
-            </a:pPr>
-            <a:r>
-              <a:rPr lang="en-US" sz="2400" b="1" spc="-60" kern="0" dirty="0">
-                <a:solidFill>
-                  <a:srgbClr val="1D1D1F"/>
-                </a:solidFill>
-                <a:latin typeface="Inter Display" pitchFamily="34" charset="0"/>
-                <a:ea typeface="Inter Display" pitchFamily="34" charset="-122"/>
-                <a:cs typeface="Inter Display" pitchFamily="34" charset="-120"/>
-              </a:rPr>
-              <a:t>Presentazione</a:t>
-            </a:r>
-            <a:endParaRPr lang="en-US" sz="2400" dirty="0"/>
-          </a:p>
-        </p:txBody>
-      </p:sp>
-      <p:sp>
-        <p:nvSpPr>
-          <p:cNvPr id="12" name="Text 8"/>
-          <p:cNvSpPr/>
-          <p:nvPr/>
-        </p:nvSpPr>
-        <p:spPr>
-          <a:xfrm>
-            <a:off x="5120640" y="4160520"/>
-            <a:ext cx="6400800" cy="365760"/>
-          </a:xfrm>
-          <a:prstGeom prst="rect">
-            <a:avLst/>
-          </a:prstGeom>
-          <a:noFill/>
-          <a:ln/>
-        </p:spPr>
-        <p:txBody>
-          <a:bodyPr wrap="square" lIns="0" tIns="0" rIns="0" bIns="0" rtlCol="0" anchor="t"/>
-          <a:lstStyle/>
-          <a:p>
-            <a:pPr indent="0" marL="0">
-              <a:buNone/>
-            </a:pPr>
-            <a:r>
-              <a:rPr lang="en-US" sz="1400" dirty="0">
-                <a:solidFill>
-                  <a:srgbClr val="6E6E73"/>
-                </a:solidFill>
-                <a:latin typeface="Inter" pitchFamily="34" charset="0"/>
-                <a:ea typeface="Inter" pitchFamily="34" charset="-122"/>
-                <a:cs typeface="Inter" pitchFamily="34" charset="-120"/>
-              </a:rPr>
-              <a:t>questa presentazione, in PowerPoint e PDF</a:t>
-            </a:r>
-            <a:endParaRPr lang="en-US" sz="1400" dirty="0"/>
-          </a:p>
-        </p:txBody>
-      </p:sp>
-      <p:sp>
-        <p:nvSpPr>
-          <p:cNvPr id="13" name="Text 9"/>
-          <p:cNvSpPr/>
-          <p:nvPr/>
-        </p:nvSpPr>
-        <p:spPr>
-          <a:xfrm>
-            <a:off x="5120640" y="4663440"/>
-            <a:ext cx="6400800" cy="411480"/>
-          </a:xfrm>
-          <a:prstGeom prst="rect">
-            <a:avLst/>
-          </a:prstGeom>
-          <a:noFill/>
-          <a:ln/>
-        </p:spPr>
-        <p:txBody>
-          <a:bodyPr wrap="square" lIns="0" tIns="0" rIns="0" bIns="0" rtlCol="0" anchor="t"/>
-          <a:lstStyle/>
-          <a:p>
-            <a:pPr indent="0" marL="0">
-              <a:buNone/>
-            </a:pPr>
-            <a:r>
-              <a:rPr lang="en-US" sz="2400" b="1" spc="-60" kern="0" dirty="0">
-                <a:solidFill>
-                  <a:srgbClr val="1D1D1F"/>
-                </a:solidFill>
-                <a:latin typeface="Inter Display" pitchFamily="34" charset="0"/>
-                <a:ea typeface="Inter Display" pitchFamily="34" charset="-122"/>
-                <a:cs typeface="Inter Display" pitchFamily="34" charset="-120"/>
-              </a:rPr>
-              <a:t>Modello Excel</a:t>
-            </a:r>
-            <a:endParaRPr lang="en-US" sz="2400" dirty="0"/>
-          </a:p>
-        </p:txBody>
-      </p:sp>
-      <p:sp>
-        <p:nvSpPr>
-          <p:cNvPr id="14" name="Text 10"/>
-          <p:cNvSpPr/>
-          <p:nvPr/>
-        </p:nvSpPr>
-        <p:spPr>
-          <a:xfrm>
-            <a:off x="5120640" y="5074920"/>
-            <a:ext cx="6400800" cy="365760"/>
-          </a:xfrm>
-          <a:prstGeom prst="rect">
-            <a:avLst/>
-          </a:prstGeom>
-          <a:noFill/>
-          <a:ln/>
-        </p:spPr>
-        <p:txBody>
-          <a:bodyPr wrap="square" lIns="0" tIns="0" rIns="0" bIns="0" rtlCol="0" anchor="t"/>
-          <a:lstStyle/>
-          <a:p>
-            <a:pPr indent="0" marL="0">
-              <a:buNone/>
-            </a:pPr>
-            <a:r>
-              <a:rPr lang="en-US" sz="1400" dirty="0">
-                <a:solidFill>
-                  <a:srgbClr val="6E6E73"/>
-                </a:solidFill>
-                <a:latin typeface="Inter" pitchFamily="34" charset="0"/>
-                <a:ea typeface="Inter" pitchFamily="34" charset="-122"/>
-                <a:cs typeface="Inter" pitchFamily="34" charset="-120"/>
-              </a:rPr>
-              <a:t>14 fogli, circa 2.000 formule, ogni input con la sua fonte</a:t>
-            </a:r>
-            <a:endParaRPr lang="en-US" sz="1400" dirty="0"/>
-          </a:p>
-        </p:txBody>
-      </p:sp>
-      <p:sp>
-        <p:nvSpPr>
-          <p:cNvPr id="15" name="Text 11"/>
-          <p:cNvSpPr/>
-          <p:nvPr/>
-        </p:nvSpPr>
-        <p:spPr>
-          <a:xfrm>
-            <a:off x="5120640" y="5715000"/>
-            <a:ext cx="6583680" cy="365760"/>
-          </a:xfrm>
-          <a:prstGeom prst="rect">
-            <a:avLst/>
-          </a:prstGeom>
-          <a:noFill/>
-          <a:ln/>
-        </p:spPr>
-        <p:txBody>
-          <a:bodyPr wrap="square" lIns="0" tIns="0" rIns="0" bIns="0" rtlCol="0" anchor="t"/>
-          <a:lstStyle/>
-          <a:p>
-            <a:pPr indent="0" marL="0">
-              <a:buNone/>
-            </a:pPr>
-            <a:r>
-              <a:rPr lang="en-US" sz="1600" b="1" dirty="0">
-                <a:solidFill>
-                  <a:srgbClr val="0071E3"/>
-                </a:solidFill>
-                <a:latin typeface="Inter" pitchFamily="34" charset="0"/>
-                <a:ea typeface="Inter" pitchFamily="34" charset="-122"/>
-                <a:cs typeface="Inter" pitchFamily="34" charset="-120"/>
-              </a:rPr>
-              <a:t>gherardo200-glitch.github.io/spacex-valutazione</a:t>
-            </a:r>
-            <a:endParaRPr lang="en-US" sz="1600" dirty="0"/>
           </a:p>
         </p:txBody>
       </p:sp>
@@ -8420,7 +8692,7 @@
             <a:lvl1pPr>
               <a:defRPr sz="800">
                 <a:solidFill>
-                  <a:srgbClr val="6E6E73"/>
+                  <a:srgbClr val="86868B"/>
                 </a:solidFill>
                 <a:latin typeface="Inter"/>
                 <a:ea typeface="Inter"/>
@@ -8498,7 +8770,7 @@
                 <a:ea typeface="D-DIN" pitchFamily="34" charset="-122"/>
                 <a:cs typeface="D-DIN" pitchFamily="34" charset="-120"/>
               </a:rPr>
-              <a:t>RISERVA  |  METODO</a:t>
+              <a:t>FONTI E DOCUMENTI</a:t>
             </a:r>
             <a:endParaRPr lang="en-US" sz="1200" dirty="0"/>
           </a:p>
@@ -8539,7 +8811,7 @@
                 <a:ea typeface="Inter Display" pitchFamily="34" charset="-122"/>
                 <a:cs typeface="Inter Display" pitchFamily="34" charset="-120"/>
               </a:rPr>
-              <a:t>Il rischio si conta una volta sola</a:t>
+              <a:t>Tutte le fonti, il report e il modello Excel</a:t>
             </a:r>
             <a:endParaRPr lang="en-US" sz="4000" dirty="0"/>
           </a:p>
@@ -8580,6 +8852,577 @@
                 <a:ea typeface="Inter" pitchFamily="34" charset="-122"/>
                 <a:cs typeface="Inter" pitchFamily="34" charset="-120"/>
               </a:rPr>
+              <a:t>Fonte: Sito del lavoro: gherardo200-glitch.github.io/spacex-valutazione</a:t>
+            </a:r>
+            <a:endParaRPr lang="en-US" sz="800" dirty="0"/>
+          </a:p>
+        </p:txBody>
+      </p:sp>
+      <p:pic>
+        <p:nvPicPr>
+          <p:cNvPr id="6" name="Image 0" descr="QR code della pagina delle fonti">    </p:cNvPr>
+          <p:cNvPicPr>
+            <a:picLocks noChangeAspect="1"/>
+          </p:cNvPicPr>
+          <p:nvPr/>
+        </p:nvPicPr>
+        <p:blipFill>
+          <a:blip r:embed="rId1"/>
+          <a:stretch>
+            <a:fillRect/>
+          </a:stretch>
+        </p:blipFill>
+        <p:spPr>
+          <a:xfrm>
+            <a:off x="548640" y="1828800"/>
+            <a:ext cx="4023360" cy="4023360"/>
+          </a:xfrm>
+          <a:prstGeom prst="rect">
+            <a:avLst/>
+          </a:prstGeom>
+        </p:spPr>
+      </p:pic>
+      <p:sp>
+        <p:nvSpPr>
+          <p:cNvPr id="7" name="Text 3"/>
+          <p:cNvSpPr/>
+          <p:nvPr/>
+        </p:nvSpPr>
+        <p:spPr>
+          <a:xfrm>
+            <a:off x="5120640" y="1920240"/>
+            <a:ext cx="6400800" cy="411480"/>
+          </a:xfrm>
+          <a:prstGeom prst="rect">
+            <a:avLst/>
+          </a:prstGeom>
+          <a:noFill/>
+          <a:ln/>
+        </p:spPr>
+        <p:txBody>
+          <a:bodyPr wrap="square" lIns="0" tIns="0" rIns="0" bIns="0" rtlCol="0" anchor="t"/>
+          <a:lstStyle/>
+          <a:p>
+            <a:pPr indent="0" marL="0">
+              <a:buNone/>
+            </a:pPr>
+            <a:r>
+              <a:rPr lang="en-US" sz="2400" b="1" spc="-60" kern="0" dirty="0">
+                <a:solidFill>
+                  <a:srgbClr val="1D1D1F"/>
+                </a:solidFill>
+                <a:latin typeface="Inter Display" pitchFamily="34" charset="0"/>
+                <a:ea typeface="Inter Display" pitchFamily="34" charset="-122"/>
+                <a:cs typeface="Inter Display" pitchFamily="34" charset="-120"/>
+              </a:rPr>
+              <a:t>Fonti</a:t>
+            </a:r>
+            <a:endParaRPr lang="en-US" sz="2400" dirty="0"/>
+          </a:p>
+        </p:txBody>
+      </p:sp>
+      <p:sp>
+        <p:nvSpPr>
+          <p:cNvPr id="8" name="Text 4"/>
+          <p:cNvSpPr/>
+          <p:nvPr/>
+        </p:nvSpPr>
+        <p:spPr>
+          <a:xfrm>
+            <a:off x="5120640" y="2331720"/>
+            <a:ext cx="6400800" cy="365760"/>
+          </a:xfrm>
+          <a:prstGeom prst="rect">
+            <a:avLst/>
+          </a:prstGeom>
+          <a:noFill/>
+          <a:ln/>
+        </p:spPr>
+        <p:txBody>
+          <a:bodyPr wrap="square" lIns="0" tIns="0" rIns="0" bIns="0" rtlCol="0" anchor="t"/>
+          <a:lstStyle/>
+          <a:p>
+            <a:pPr indent="0" marL="0">
+              <a:buNone/>
+            </a:pPr>
+            <a:r>
+              <a:rPr lang="en-US" sz="1400" dirty="0">
+                <a:solidFill>
+                  <a:srgbClr val="6E6E73"/>
+                </a:solidFill>
+                <a:latin typeface="Inter" pitchFamily="34" charset="0"/>
+                <a:ea typeface="Inter" pitchFamily="34" charset="-122"/>
+                <a:cs typeface="Inter" pitchFamily="34" charset="-120"/>
+              </a:rPr>
+              <a:t>documenti SEC, prezzi di mercato, articoli accademici, analisti e stampa, con i link</a:t>
+            </a:r>
+            <a:endParaRPr lang="en-US" sz="1400" dirty="0"/>
+          </a:p>
+        </p:txBody>
+      </p:sp>
+      <p:sp>
+        <p:nvSpPr>
+          <p:cNvPr id="9" name="Text 5"/>
+          <p:cNvSpPr/>
+          <p:nvPr/>
+        </p:nvSpPr>
+        <p:spPr>
+          <a:xfrm>
+            <a:off x="5120640" y="2834640"/>
+            <a:ext cx="6400800" cy="411480"/>
+          </a:xfrm>
+          <a:prstGeom prst="rect">
+            <a:avLst/>
+          </a:prstGeom>
+          <a:noFill/>
+          <a:ln/>
+        </p:spPr>
+        <p:txBody>
+          <a:bodyPr wrap="square" lIns="0" tIns="0" rIns="0" bIns="0" rtlCol="0" anchor="t"/>
+          <a:lstStyle/>
+          <a:p>
+            <a:pPr indent="0" marL="0">
+              <a:buNone/>
+            </a:pPr>
+            <a:r>
+              <a:rPr lang="en-US" sz="2400" b="1" spc="-60" kern="0" dirty="0">
+                <a:solidFill>
+                  <a:srgbClr val="1D1D1F"/>
+                </a:solidFill>
+                <a:latin typeface="Inter Display" pitchFamily="34" charset="0"/>
+                <a:ea typeface="Inter Display" pitchFamily="34" charset="-122"/>
+                <a:cs typeface="Inter Display" pitchFamily="34" charset="-120"/>
+              </a:rPr>
+              <a:t>Report</a:t>
+            </a:r>
+            <a:endParaRPr lang="en-US" sz="2400" dirty="0"/>
+          </a:p>
+        </p:txBody>
+      </p:sp>
+      <p:sp>
+        <p:nvSpPr>
+          <p:cNvPr id="10" name="Text 6"/>
+          <p:cNvSpPr/>
+          <p:nvPr/>
+        </p:nvSpPr>
+        <p:spPr>
+          <a:xfrm>
+            <a:off x="5120640" y="3246120"/>
+            <a:ext cx="6400800" cy="365760"/>
+          </a:xfrm>
+          <a:prstGeom prst="rect">
+            <a:avLst/>
+          </a:prstGeom>
+          <a:noFill/>
+          <a:ln/>
+        </p:spPr>
+        <p:txBody>
+          <a:bodyPr wrap="square" lIns="0" tIns="0" rIns="0" bIns="0" rtlCol="0" anchor="t"/>
+          <a:lstStyle/>
+          <a:p>
+            <a:pPr indent="0" marL="0">
+              <a:buNone/>
+            </a:pPr>
+            <a:r>
+              <a:rPr lang="en-US" sz="1400" dirty="0">
+                <a:solidFill>
+                  <a:srgbClr val="6E6E73"/>
+                </a:solidFill>
+                <a:latin typeface="Inter" pitchFamily="34" charset="0"/>
+                <a:ea typeface="Inter" pitchFamily="34" charset="-122"/>
+                <a:cs typeface="Inter" pitchFamily="34" charset="-120"/>
+              </a:rPr>
+              <a:t>il caso completo, 32 pagine, con tutti gli esibiti</a:t>
+            </a:r>
+            <a:endParaRPr lang="en-US" sz="1400" dirty="0"/>
+          </a:p>
+        </p:txBody>
+      </p:sp>
+      <p:sp>
+        <p:nvSpPr>
+          <p:cNvPr id="11" name="Text 7"/>
+          <p:cNvSpPr/>
+          <p:nvPr/>
+        </p:nvSpPr>
+        <p:spPr>
+          <a:xfrm>
+            <a:off x="5120640" y="3749040"/>
+            <a:ext cx="6400800" cy="411480"/>
+          </a:xfrm>
+          <a:prstGeom prst="rect">
+            <a:avLst/>
+          </a:prstGeom>
+          <a:noFill/>
+          <a:ln/>
+        </p:spPr>
+        <p:txBody>
+          <a:bodyPr wrap="square" lIns="0" tIns="0" rIns="0" bIns="0" rtlCol="0" anchor="t"/>
+          <a:lstStyle/>
+          <a:p>
+            <a:pPr indent="0" marL="0">
+              <a:buNone/>
+            </a:pPr>
+            <a:r>
+              <a:rPr lang="en-US" sz="2400" b="1" spc="-60" kern="0" dirty="0">
+                <a:solidFill>
+                  <a:srgbClr val="1D1D1F"/>
+                </a:solidFill>
+                <a:latin typeface="Inter Display" pitchFamily="34" charset="0"/>
+                <a:ea typeface="Inter Display" pitchFamily="34" charset="-122"/>
+                <a:cs typeface="Inter Display" pitchFamily="34" charset="-120"/>
+              </a:rPr>
+              <a:t>Presentazione</a:t>
+            </a:r>
+            <a:endParaRPr lang="en-US" sz="2400" dirty="0"/>
+          </a:p>
+        </p:txBody>
+      </p:sp>
+      <p:sp>
+        <p:nvSpPr>
+          <p:cNvPr id="12" name="Text 8"/>
+          <p:cNvSpPr/>
+          <p:nvPr/>
+        </p:nvSpPr>
+        <p:spPr>
+          <a:xfrm>
+            <a:off x="5120640" y="4160520"/>
+            <a:ext cx="6400800" cy="365760"/>
+          </a:xfrm>
+          <a:prstGeom prst="rect">
+            <a:avLst/>
+          </a:prstGeom>
+          <a:noFill/>
+          <a:ln/>
+        </p:spPr>
+        <p:txBody>
+          <a:bodyPr wrap="square" lIns="0" tIns="0" rIns="0" bIns="0" rtlCol="0" anchor="t"/>
+          <a:lstStyle/>
+          <a:p>
+            <a:pPr indent="0" marL="0">
+              <a:buNone/>
+            </a:pPr>
+            <a:r>
+              <a:rPr lang="en-US" sz="1400" dirty="0">
+                <a:solidFill>
+                  <a:srgbClr val="6E6E73"/>
+                </a:solidFill>
+                <a:latin typeface="Inter" pitchFamily="34" charset="0"/>
+                <a:ea typeface="Inter" pitchFamily="34" charset="-122"/>
+                <a:cs typeface="Inter" pitchFamily="34" charset="-120"/>
+              </a:rPr>
+              <a:t>questa presentazione, in PowerPoint e PDF</a:t>
+            </a:r>
+            <a:endParaRPr lang="en-US" sz="1400" dirty="0"/>
+          </a:p>
+        </p:txBody>
+      </p:sp>
+      <p:sp>
+        <p:nvSpPr>
+          <p:cNvPr id="13" name="Text 9"/>
+          <p:cNvSpPr/>
+          <p:nvPr/>
+        </p:nvSpPr>
+        <p:spPr>
+          <a:xfrm>
+            <a:off x="5120640" y="4663440"/>
+            <a:ext cx="6400800" cy="411480"/>
+          </a:xfrm>
+          <a:prstGeom prst="rect">
+            <a:avLst/>
+          </a:prstGeom>
+          <a:noFill/>
+          <a:ln/>
+        </p:spPr>
+        <p:txBody>
+          <a:bodyPr wrap="square" lIns="0" tIns="0" rIns="0" bIns="0" rtlCol="0" anchor="t"/>
+          <a:lstStyle/>
+          <a:p>
+            <a:pPr indent="0" marL="0">
+              <a:buNone/>
+            </a:pPr>
+            <a:r>
+              <a:rPr lang="en-US" sz="2400" b="1" spc="-60" kern="0" dirty="0">
+                <a:solidFill>
+                  <a:srgbClr val="1D1D1F"/>
+                </a:solidFill>
+                <a:latin typeface="Inter Display" pitchFamily="34" charset="0"/>
+                <a:ea typeface="Inter Display" pitchFamily="34" charset="-122"/>
+                <a:cs typeface="Inter Display" pitchFamily="34" charset="-120"/>
+              </a:rPr>
+              <a:t>Modello Excel</a:t>
+            </a:r>
+            <a:endParaRPr lang="en-US" sz="2400" dirty="0"/>
+          </a:p>
+        </p:txBody>
+      </p:sp>
+      <p:sp>
+        <p:nvSpPr>
+          <p:cNvPr id="14" name="Text 10"/>
+          <p:cNvSpPr/>
+          <p:nvPr/>
+        </p:nvSpPr>
+        <p:spPr>
+          <a:xfrm>
+            <a:off x="5120640" y="5074920"/>
+            <a:ext cx="6400800" cy="365760"/>
+          </a:xfrm>
+          <a:prstGeom prst="rect">
+            <a:avLst/>
+          </a:prstGeom>
+          <a:noFill/>
+          <a:ln/>
+        </p:spPr>
+        <p:txBody>
+          <a:bodyPr wrap="square" lIns="0" tIns="0" rIns="0" bIns="0" rtlCol="0" anchor="t"/>
+          <a:lstStyle/>
+          <a:p>
+            <a:pPr indent="0" marL="0">
+              <a:buNone/>
+            </a:pPr>
+            <a:r>
+              <a:rPr lang="en-US" sz="1400" dirty="0">
+                <a:solidFill>
+                  <a:srgbClr val="6E6E73"/>
+                </a:solidFill>
+                <a:latin typeface="Inter" pitchFamily="34" charset="0"/>
+                <a:ea typeface="Inter" pitchFamily="34" charset="-122"/>
+                <a:cs typeface="Inter" pitchFamily="34" charset="-120"/>
+              </a:rPr>
+              <a:t>14 fogli, circa 2.000 formule, ogni input con la sua fonte</a:t>
+            </a:r>
+            <a:endParaRPr lang="en-US" sz="1400" dirty="0"/>
+          </a:p>
+        </p:txBody>
+      </p:sp>
+      <p:sp>
+        <p:nvSpPr>
+          <p:cNvPr id="15" name="Text 11"/>
+          <p:cNvSpPr/>
+          <p:nvPr/>
+        </p:nvSpPr>
+        <p:spPr>
+          <a:xfrm>
+            <a:off x="5120640" y="5715000"/>
+            <a:ext cx="6583680" cy="365760"/>
+          </a:xfrm>
+          <a:prstGeom prst="rect">
+            <a:avLst/>
+          </a:prstGeom>
+          <a:noFill/>
+          <a:ln/>
+        </p:spPr>
+        <p:txBody>
+          <a:bodyPr wrap="square" lIns="0" tIns="0" rIns="0" bIns="0" rtlCol="0" anchor="t"/>
+          <a:lstStyle/>
+          <a:p>
+            <a:pPr indent="0" marL="0">
+              <a:buNone/>
+            </a:pPr>
+            <a:r>
+              <a:rPr lang="en-US" sz="1600" b="1" dirty="0">
+                <a:solidFill>
+                  <a:srgbClr val="0071E3"/>
+                </a:solidFill>
+                <a:latin typeface="Inter" pitchFamily="34" charset="0"/>
+                <a:ea typeface="Inter" pitchFamily="34" charset="-122"/>
+                <a:cs typeface="Inter" pitchFamily="34" charset="-120"/>
+              </a:rPr>
+              <a:t>gherardo200-glitch.github.io/spacex-valutazione</a:t>
+            </a:r>
+            <a:endParaRPr lang="en-US" sz="1600" dirty="0"/>
+          </a:p>
+        </p:txBody>
+      </p:sp>
+      <p:sp>
+        <p:nvSpPr>
+          <p:cNvPr id="25" name="Slide Number Placeholder 0"/>
+          <p:cNvSpPr>
+            <a:spLocks noGrp="1"/>
+          </p:cNvSpPr>
+          <p:nvPr>
+            <p:ph type="sldNum" sz="quarter" idx="4294967295"/>
+          </p:nvPr>
+        </p:nvSpPr>
+        <p:spPr>
+          <a:xfrm>
+            <a:off x="11274552" y="6400800"/>
+            <a:ext cx="365760" cy="228600"/>
+          </a:xfrm>
+          <a:prstGeom prst="rect">
+            <a:avLst/>
+          </a:prstGeom>
+          <a:extLst>
+            <a:ext uri="{C572A759-6A51-4108-AA02-DFA0A04FC94B}">
+              <ma14:wrappingTextBoxFlag xmlns:ma14="http://schemas.microsoft.com/office/mac/drawingml/2011/main" val="0"/>
+            </a:ext>
+          </a:extLst>
+        </p:spPr>
+        <p:txBody>
+          <a:bodyPr/>
+          <a:lstStyle>
+            <a:lvl1pPr>
+              <a:defRPr sz="800">
+                <a:solidFill>
+                  <a:srgbClr val="6E6E73"/>
+                </a:solidFill>
+                <a:latin typeface="Inter"/>
+                <a:ea typeface="Inter"/>
+                <a:cs typeface="Inter"/>
+              </a:defRPr>
+            </a:lvl1pPr>
+          </a:lstStyle>
+          <a:p>
+            <a:pPr algn="r"/>
+            <a:fld id="{F7021451-1387-4CA6-816F-3879F97B5CBC}" type="slidenum">
+              <a:rPr b="0" lang="en-US"/>
+              <a:t>18</a:t>
+            </a:fld>
+            <a:endParaRPr lang="en-US"/>
+          </a:p>
+        </p:txBody>
+      </p:sp>
+    </p:spTree>
+  </p:cSld>
+  <p:clrMapOvr>
+    <a:masterClrMapping/>
+  </p:clrMapOvr>
+</p:sld>
+</file>
+
+<file path=ppt/slides/slide19.xml><?xml version="1.0" encoding="utf-8"?>
+<p:sld xmlns:a="http://schemas.openxmlformats.org/drawingml/2006/main" xmlns:r="http://schemas.openxmlformats.org/officeDocument/2006/relationships" xmlns:p="http://schemas.openxmlformats.org/presentationml/2006/main">
+  <p:cSld name="Slide 19">
+    <p:spTree>
+      <p:nvGrpSpPr>
+        <p:cNvPr id="1" name=""/>
+        <p:cNvGrpSpPr/>
+        <p:nvPr/>
+      </p:nvGrpSpPr>
+      <p:grpSpPr>
+        <a:xfrm>
+          <a:off x="0" y="0"/>
+          <a:ext cx="0" cy="0"/>
+          <a:chOff x="0" y="0"/>
+          <a:chExt cx="0" cy="0"/>
+        </a:xfrm>
+      </p:grpSpPr>
+      <p:sp>
+        <p:nvSpPr>
+          <p:cNvPr id="2" name="Text 0"/>
+          <p:cNvSpPr/>
+          <p:nvPr>
+            <p:ph idx="100" type="body" hasCustomPrompt="1"/>
+          </p:nvPr>
+        </p:nvSpPr>
+        <p:spPr>
+          <a:xfrm>
+            <a:off x="548640" y="502920"/>
+            <a:ext cx="11064240" cy="274320"/>
+          </a:xfrm>
+          <a:prstGeom prst="rect">
+            <a:avLst/>
+          </a:prstGeom>
+          <a:noFill/>
+          <a:ln/>
+        </p:spPr>
+        <p:txBody>
+          <a:bodyPr wrap="square" lIns="0" tIns="0" rIns="0" bIns="0" rtlCol="0" anchor="t"/>
+          <a:lstStyle/>
+          <a:p>
+            <a:pPr indent="0" marL="0">
+              <a:buNone/>
+            </a:pPr>
+            <a:r>
+              <a:rPr lang="en-US" sz="1200" spc="300" kern="0" dirty="0">
+                <a:solidFill>
+                  <a:srgbClr val="6E6E73"/>
+                </a:solidFill>
+                <a:latin typeface="D-DIN" pitchFamily="34" charset="0"/>
+                <a:ea typeface="D-DIN" pitchFamily="34" charset="-122"/>
+                <a:cs typeface="D-DIN" pitchFamily="34" charset="-120"/>
+              </a:rPr>
+              <a:t>RISERVA  |  METODO</a:t>
+            </a:r>
+            <a:endParaRPr lang="en-US" sz="1200" dirty="0"/>
+          </a:p>
+        </p:txBody>
+      </p:sp>
+      <p:sp>
+        <p:nvSpPr>
+          <p:cNvPr id="3" name="Text 0"/>
+          <p:cNvSpPr/>
+          <p:nvPr>
+            <p:ph idx="101" type="title" hasCustomPrompt="1"/>
+          </p:nvPr>
+        </p:nvSpPr>
+        <p:spPr>
+          <a:xfrm>
+            <a:off x="548640" y="868680"/>
+            <a:ext cx="11064240" cy="1188720"/>
+          </a:xfrm>
+          <a:prstGeom prst="rect">
+            <a:avLst/>
+          </a:prstGeom>
+          <a:noFill/>
+          <a:ln/>
+        </p:spPr>
+        <p:txBody>
+          <a:bodyPr wrap="square" lIns="0" tIns="0" rIns="0" bIns="0" rtlCol="0" anchor="t"/>
+          <a:lstStyle/>
+          <a:p>
+            <a:pPr algn="l" indent="0" marL="0">
+              <a:buNone/>
+            </a:pPr>
+            <a:r>
+              <a:rPr lang="en-US" sz="4000" b="1" spc="-60" kern="0" dirty="0">
+                <a:solidFill>
+                  <a:srgbClr val="1D1D1F"/>
+                </a:solidFill>
+                <a:latin typeface="Inter Display" pitchFamily="34" charset="0"/>
+                <a:ea typeface="Inter Display" pitchFamily="34" charset="-122"/>
+                <a:cs typeface="Inter Display" pitchFamily="34" charset="-120"/>
+              </a:rPr>
+              <a:t>Il rischio si conta una volta sola</a:t>
+            </a:r>
+            <a:endParaRPr lang="en-US" sz="4000" dirty="0"/>
+          </a:p>
+        </p:txBody>
+      </p:sp>
+      <p:sp>
+        <p:nvSpPr>
+          <p:cNvPr id="4" name="Text 0"/>
+          <p:cNvSpPr/>
+          <p:nvPr>
+            <p:ph idx="102" type="body" hasCustomPrompt="1"/>
+          </p:nvPr>
+        </p:nvSpPr>
+        <p:spPr>
+          <a:xfrm>
+            <a:off x="548640" y="6400800"/>
+            <a:ext cx="10424160" cy="228600"/>
+          </a:xfrm>
+          <a:prstGeom prst="rect">
+            <a:avLst/>
+          </a:prstGeom>
+          <a:noFill/>
+          <a:ln/>
+        </p:spPr>
+        <p:txBody>
+          <a:bodyPr wrap="square" lIns="0" tIns="0" rIns="0" bIns="0" rtlCol="0" anchor="t"/>
+          <a:lstStyle/>
+          <a:p>
+            <a:pPr indent="0" marL="0">
+              <a:buNone/>
+            </a:pPr>
+            <a:r>
+              <a:rPr lang="en-US" sz="800" dirty="0">
+                <a:solidFill>
+                  <a:srgbClr val="6E6E73"/>
+                </a:solidFill>
+                <a:latin typeface="Inter" pitchFamily="34" charset="0"/>
+                <a:ea typeface="Inter" pitchFamily="34" charset="-122"/>
+                <a:cs typeface="Inter" pitchFamily="34" charset="-120"/>
+              </a:rPr>
               <a:t>Fonte: Stewart, Allison e Johnson (2001); Myers e Howe (1997); Berk, Green e Naik (2004); beta bottom-up: Damodaran, Betas by Sector (US), gennaio 2026; formula del corso βU = βL / (1 + D/E)</a:t>
             </a:r>
             <a:endParaRPr lang="en-US" sz="800" dirty="0"/>
@@ -8588,7 +9431,7 @@
       </p:sp>
       <p:graphicFrame>
         <p:nvGraphicFramePr>
-          <p:cNvPr id="19" name="Table 0"/>
+          <p:cNvPr id="20" name="Table 0"/>
           <p:cNvGraphicFramePr>
             <a:graphicFrameLocks noGrp="1"/>
           </p:cNvGraphicFramePr>
@@ -10041,7 +10884,7 @@
             <a:pPr algn="r"/>
             <a:fld id="{F7021451-1387-4CA6-816F-3879F97B5CBC}" type="slidenum">
               <a:rPr b="0" lang="en-US"/>
-              <a:t>18</a:t>
+              <a:t>19</a:t>
             </a:fld>
             <a:endParaRPr lang="en-US"/>
           </a:p>
@@ -10055,9 +10898,9 @@
 </p:sld>
 </file>
 
-<file path=ppt/slides/slide19.xml><?xml version="1.0" encoding="utf-8"?>
+<file path=ppt/slides/slide2.xml><?xml version="1.0" encoding="utf-8"?>
 <p:sld xmlns:a="http://schemas.openxmlformats.org/drawingml/2006/main" xmlns:r="http://schemas.openxmlformats.org/officeDocument/2006/relationships" xmlns:p="http://schemas.openxmlformats.org/presentationml/2006/main">
-  <p:cSld name="Slide 19">
+  <p:cSld name="Slide 2">
     <p:spTree>
       <p:nvGrpSpPr>
         <p:cNvPr id="1" name=""/>
@@ -10101,13 +10944,13 @@
             <a:r>
               <a:rPr lang="en-US" sz="1200" spc="300" kern="0" dirty="0">
                 <a:solidFill>
-                  <a:srgbClr val="6E6E73"/>
+                  <a:srgbClr val="86868B"/>
                 </a:solidFill>
                 <a:latin typeface="D-DIN" pitchFamily="34" charset="0"/>
                 <a:ea typeface="D-DIN" pitchFamily="34" charset="-122"/>
                 <a:cs typeface="D-DIN" pitchFamily="34" charset="-120"/>
               </a:rPr>
-              <a:t>RISERVA  |  MULTIPLI</a:t>
+              <a:t>LA DOMANDA</a:t>
             </a:r>
             <a:endParaRPr lang="en-US" sz="1200" dirty="0"/>
           </a:p>
@@ -10142,13 +10985,13 @@
             <a:r>
               <a:rPr lang="en-US" sz="4000" b="1" spc="-60" kern="0" dirty="0">
                 <a:solidFill>
-                  <a:srgbClr val="1D1D1F"/>
+                  <a:srgbClr val="FFFFFF"/>
                 </a:solidFill>
                 <a:latin typeface="Inter Display" pitchFamily="34" charset="0"/>
                 <a:ea typeface="Inter Display" pitchFamily="34" charset="-122"/>
                 <a:cs typeface="Inter Display" pitchFamily="34" charset="-120"/>
               </a:rPr>
-              <a:t>Il dettaglio dei multipli</a:t>
+              <a:t>Prezzo e valore non sono la stessa cosa</a:t>
             </a:r>
             <a:endParaRPr lang="en-US" sz="4000" dirty="0"/>
           </a:p>
@@ -10183,12 +11026,435 @@
             <a:r>
               <a:rPr lang="en-US" sz="800" dirty="0">
                 <a:solidFill>
-                  <a:srgbClr val="6E6E73"/>
+                  <a:srgbClr val="86868B"/>
                 </a:solidFill>
                 <a:latin typeface="Inter" pitchFamily="34" charset="0"/>
                 <a:ea typeface="Inter" pitchFamily="34" charset="-122"/>
                 <a:cs typeface="Inter" pitchFamily="34" charset="-120"/>
               </a:rPr>
+              <a:t>Fonte: Corso, Valuation: DCF (slide 5-7) e multipli (slide 53); Fama (1970), Journal of Finance 25(2); Fama (1991), Journal of Finance 46(5)</a:t>
+            </a:r>
+            <a:endParaRPr lang="en-US" sz="800" dirty="0"/>
+          </a:p>
+        </p:txBody>
+      </p:sp>
+      <p:sp>
+        <p:nvSpPr>
+          <p:cNvPr id="6" name="Text 3"/>
+          <p:cNvSpPr/>
+          <p:nvPr/>
+        </p:nvSpPr>
+        <p:spPr>
+          <a:xfrm>
+            <a:off x="548640" y="2103120"/>
+            <a:ext cx="5303520" cy="1005840"/>
+          </a:xfrm>
+          <a:prstGeom prst="rect">
+            <a:avLst/>
+          </a:prstGeom>
+          <a:noFill/>
+          <a:ln/>
+        </p:spPr>
+        <p:txBody>
+          <a:bodyPr wrap="square" lIns="0" tIns="0" rIns="0" bIns="0" rtlCol="0" anchor="b"/>
+          <a:lstStyle/>
+          <a:p>
+            <a:pPr indent="0" marL="0">
+              <a:buNone/>
+            </a:pPr>
+            <a:r>
+              <a:rPr lang="en-US" sz="7200" b="1" spc="-60" kern="0" dirty="0">
+                <a:solidFill>
+                  <a:srgbClr val="2997FF"/>
+                </a:solidFill>
+                <a:latin typeface="Inter Display" pitchFamily="34" charset="0"/>
+                <a:ea typeface="Inter Display" pitchFamily="34" charset="-122"/>
+                <a:cs typeface="Inter Display" pitchFamily="34" charset="-120"/>
+              </a:rPr>
+              <a:t>Valore</a:t>
+            </a:r>
+            <a:endParaRPr lang="en-US" sz="7200" dirty="0"/>
+          </a:p>
+        </p:txBody>
+      </p:sp>
+      <p:sp>
+        <p:nvSpPr>
+          <p:cNvPr id="7" name="Text 4"/>
+          <p:cNvSpPr/>
+          <p:nvPr/>
+        </p:nvSpPr>
+        <p:spPr>
+          <a:xfrm>
+            <a:off x="548640" y="3246120"/>
+            <a:ext cx="5029200" cy="822960"/>
+          </a:xfrm>
+          <a:prstGeom prst="rect">
+            <a:avLst/>
+          </a:prstGeom>
+          <a:noFill/>
+          <a:ln/>
+        </p:spPr>
+        <p:txBody>
+          <a:bodyPr wrap="square" lIns="0" tIns="0" rIns="0" bIns="0" rtlCol="0" anchor="t"/>
+          <a:lstStyle/>
+          <a:p>
+            <a:pPr indent="0" marL="0">
+              <a:lnSpc>
+                <a:spcPct val="110000"/>
+              </a:lnSpc>
+              <a:buNone/>
+            </a:pPr>
+            <a:r>
+              <a:rPr lang="en-US" sz="2000" dirty="0">
+                <a:solidFill>
+                  <a:srgbClr val="FFFFFF"/>
+                </a:solidFill>
+                <a:latin typeface="Inter" pitchFamily="34" charset="0"/>
+                <a:ea typeface="Inter" pitchFamily="34" charset="-122"/>
+                <a:cs typeface="Inter" pitchFamily="34" charset="-120"/>
+              </a:rPr>
+              <a:t>Valore attuale dei flussi di cassa futuri. Lo stima il DCF.</a:t>
+            </a:r>
+            <a:endParaRPr lang="en-US" sz="2000" dirty="0"/>
+          </a:p>
+        </p:txBody>
+      </p:sp>
+      <p:sp>
+        <p:nvSpPr>
+          <p:cNvPr id="8" name="Text 5"/>
+          <p:cNvSpPr/>
+          <p:nvPr/>
+        </p:nvSpPr>
+        <p:spPr>
+          <a:xfrm>
+            <a:off x="6217920" y="2103120"/>
+            <a:ext cx="5303520" cy="1005840"/>
+          </a:xfrm>
+          <a:prstGeom prst="rect">
+            <a:avLst/>
+          </a:prstGeom>
+          <a:noFill/>
+          <a:ln/>
+        </p:spPr>
+        <p:txBody>
+          <a:bodyPr wrap="square" lIns="0" tIns="0" rIns="0" bIns="0" rtlCol="0" anchor="b"/>
+          <a:lstStyle/>
+          <a:p>
+            <a:pPr indent="0" marL="0">
+              <a:buNone/>
+            </a:pPr>
+            <a:r>
+              <a:rPr lang="en-US" sz="7200" b="1" spc="-60" kern="0" dirty="0">
+                <a:solidFill>
+                  <a:srgbClr val="FFB340"/>
+                </a:solidFill>
+                <a:latin typeface="Inter Display" pitchFamily="34" charset="0"/>
+                <a:ea typeface="Inter Display" pitchFamily="34" charset="-122"/>
+                <a:cs typeface="Inter Display" pitchFamily="34" charset="-120"/>
+              </a:rPr>
+              <a:t>Prezzo</a:t>
+            </a:r>
+            <a:endParaRPr lang="en-US" sz="7200" dirty="0"/>
+          </a:p>
+        </p:txBody>
+      </p:sp>
+      <p:sp>
+        <p:nvSpPr>
+          <p:cNvPr id="9" name="Text 6"/>
+          <p:cNvSpPr/>
+          <p:nvPr/>
+        </p:nvSpPr>
+        <p:spPr>
+          <a:xfrm>
+            <a:off x="6217920" y="3246120"/>
+            <a:ext cx="5029200" cy="822960"/>
+          </a:xfrm>
+          <a:prstGeom prst="rect">
+            <a:avLst/>
+          </a:prstGeom>
+          <a:noFill/>
+          <a:ln/>
+        </p:spPr>
+        <p:txBody>
+          <a:bodyPr wrap="square" lIns="0" tIns="0" rIns="0" bIns="0" rtlCol="0" anchor="t"/>
+          <a:lstStyle/>
+          <a:p>
+            <a:pPr indent="0" marL="0">
+              <a:lnSpc>
+                <a:spcPct val="110000"/>
+              </a:lnSpc>
+              <a:buNone/>
+            </a:pPr>
+            <a:r>
+              <a:rPr lang="en-US" sz="2000" dirty="0">
+                <a:solidFill>
+                  <a:srgbClr val="FFFFFF"/>
+                </a:solidFill>
+                <a:latin typeface="Inter" pitchFamily="34" charset="0"/>
+                <a:ea typeface="Inter" pitchFamily="34" charset="-122"/>
+                <a:cs typeface="Inter" pitchFamily="34" charset="-120"/>
+              </a:rPr>
+              <a:t>Quanto paga oggi l'ultimo compratore. Lo leggono i multipli.</a:t>
+            </a:r>
+            <a:endParaRPr lang="en-US" sz="2000" dirty="0"/>
+          </a:p>
+        </p:txBody>
+      </p:sp>
+      <p:sp>
+        <p:nvSpPr>
+          <p:cNvPr id="10" name="Shape 7"/>
+          <p:cNvSpPr/>
+          <p:nvPr/>
+        </p:nvSpPr>
+        <p:spPr>
+          <a:xfrm>
+            <a:off x="548640" y="4343400"/>
+            <a:ext cx="11064240" cy="0"/>
+          </a:xfrm>
+          <a:prstGeom prst="line">
+            <a:avLst/>
+          </a:prstGeom>
+          <a:noFill/>
+          <a:ln w="9525">
+            <a:solidFill>
+              <a:srgbClr val="2C2C2E"/>
+            </a:solidFill>
+            <a:prstDash val="solid"/>
+          </a:ln>
+        </p:spPr>
+      </p:sp>
+      <p:sp>
+        <p:nvSpPr>
+          <p:cNvPr id="11" name="Text 8"/>
+          <p:cNvSpPr/>
+          <p:nvPr/>
+        </p:nvSpPr>
+        <p:spPr>
+          <a:xfrm>
+            <a:off x="548640" y="4572000"/>
+            <a:ext cx="11064240" cy="1097280"/>
+          </a:xfrm>
+          <a:prstGeom prst="rect">
+            <a:avLst/>
+          </a:prstGeom>
+          <a:noFill/>
+          <a:ln/>
+        </p:spPr>
+        <p:txBody>
+          <a:bodyPr wrap="square" lIns="0" tIns="0" rIns="0" bIns="0" rtlCol="0" anchor="t"/>
+          <a:lstStyle/>
+          <a:p>
+            <a:pPr indent="0" marL="0">
+              <a:lnSpc>
+                <a:spcPct val="110000"/>
+              </a:lnSpc>
+              <a:buNone/>
+            </a:pPr>
+            <a:r>
+              <a:rPr lang="en-US" sz="1900" dirty="0">
+                <a:solidFill>
+                  <a:srgbClr val="86868B"/>
+                </a:solidFill>
+                <a:latin typeface="Inter" pitchFamily="34" charset="0"/>
+                <a:ea typeface="Inter" pitchFamily="34" charset="-122"/>
+                <a:cs typeface="Inter" pitchFamily="34" charset="-120"/>
+              </a:rPr>
+              <a:t>In un mercato efficiente coincidono (Fama 1970). Per verificarlo: stimo il valore in modo indipendente e lo confronto con il prezzo. Se divergono, mi chiedo che cosa contiene il prezzo.</a:t>
+            </a:r>
+            <a:endParaRPr lang="en-US" sz="1900" dirty="0"/>
+          </a:p>
+        </p:txBody>
+      </p:sp>
+      <p:sp>
+        <p:nvSpPr>
+          <p:cNvPr id="25" name="Slide Number Placeholder 0"/>
+          <p:cNvSpPr>
+            <a:spLocks noGrp="1"/>
+          </p:cNvSpPr>
+          <p:nvPr>
+            <p:ph type="sldNum" sz="quarter" idx="4294967295"/>
+          </p:nvPr>
+        </p:nvSpPr>
+        <p:spPr>
+          <a:xfrm>
+            <a:off x="11274552" y="6400800"/>
+            <a:ext cx="365760" cy="228600"/>
+          </a:xfrm>
+          <a:prstGeom prst="rect">
+            <a:avLst/>
+          </a:prstGeom>
+          <a:extLst>
+            <a:ext uri="{C572A759-6A51-4108-AA02-DFA0A04FC94B}">
+              <ma14:wrappingTextBoxFlag xmlns:ma14="http://schemas.microsoft.com/office/mac/drawingml/2011/main" val="0"/>
+            </a:ext>
+          </a:extLst>
+        </p:spPr>
+        <p:txBody>
+          <a:bodyPr/>
+          <a:lstStyle>
+            <a:lvl1pPr>
+              <a:defRPr sz="800">
+                <a:solidFill>
+                  <a:srgbClr val="86868B"/>
+                </a:solidFill>
+                <a:latin typeface="Inter"/>
+                <a:ea typeface="Inter"/>
+                <a:cs typeface="Inter"/>
+              </a:defRPr>
+            </a:lvl1pPr>
+          </a:lstStyle>
+          <a:p>
+            <a:pPr algn="r"/>
+            <a:fld id="{F7021451-1387-4CA6-816F-3879F97B5CBC}" type="slidenum">
+              <a:rPr b="0" lang="en-US"/>
+              <a:t>2</a:t>
+            </a:fld>
+            <a:endParaRPr lang="en-US"/>
+          </a:p>
+        </p:txBody>
+      </p:sp>
+    </p:spTree>
+  </p:cSld>
+  <p:clrMapOvr>
+    <a:masterClrMapping/>
+  </p:clrMapOvr>
+</p:sld>
+</file>
+
+<file path=ppt/slides/slide20.xml><?xml version="1.0" encoding="utf-8"?>
+<p:sld xmlns:a="http://schemas.openxmlformats.org/drawingml/2006/main" xmlns:r="http://schemas.openxmlformats.org/officeDocument/2006/relationships" xmlns:p="http://schemas.openxmlformats.org/presentationml/2006/main">
+  <p:cSld name="Slide 20">
+    <p:spTree>
+      <p:nvGrpSpPr>
+        <p:cNvPr id="1" name=""/>
+        <p:cNvGrpSpPr/>
+        <p:nvPr/>
+      </p:nvGrpSpPr>
+      <p:grpSpPr>
+        <a:xfrm>
+          <a:off x="0" y="0"/>
+          <a:ext cx="0" cy="0"/>
+          <a:chOff x="0" y="0"/>
+          <a:chExt cx="0" cy="0"/>
+        </a:xfrm>
+      </p:grpSpPr>
+      <p:sp>
+        <p:nvSpPr>
+          <p:cNvPr id="2" name="Text 0"/>
+          <p:cNvSpPr/>
+          <p:nvPr>
+            <p:ph idx="100" type="body" hasCustomPrompt="1"/>
+          </p:nvPr>
+        </p:nvSpPr>
+        <p:spPr>
+          <a:xfrm>
+            <a:off x="548640" y="502920"/>
+            <a:ext cx="11064240" cy="274320"/>
+          </a:xfrm>
+          <a:prstGeom prst="rect">
+            <a:avLst/>
+          </a:prstGeom>
+          <a:noFill/>
+          <a:ln/>
+        </p:spPr>
+        <p:txBody>
+          <a:bodyPr wrap="square" lIns="0" tIns="0" rIns="0" bIns="0" rtlCol="0" anchor="t"/>
+          <a:lstStyle/>
+          <a:p>
+            <a:pPr indent="0" marL="0">
+              <a:buNone/>
+            </a:pPr>
+            <a:r>
+              <a:rPr lang="en-US" sz="1200" spc="300" kern="0" dirty="0">
+                <a:solidFill>
+                  <a:srgbClr val="6E6E73"/>
+                </a:solidFill>
+                <a:latin typeface="D-DIN" pitchFamily="34" charset="0"/>
+                <a:ea typeface="D-DIN" pitchFamily="34" charset="-122"/>
+                <a:cs typeface="D-DIN" pitchFamily="34" charset="-120"/>
+              </a:rPr>
+              <a:t>RISERVA  |  MULTIPLI</a:t>
+            </a:r>
+            <a:endParaRPr lang="en-US" sz="1200" dirty="0"/>
+          </a:p>
+        </p:txBody>
+      </p:sp>
+      <p:sp>
+        <p:nvSpPr>
+          <p:cNvPr id="3" name="Text 0"/>
+          <p:cNvSpPr/>
+          <p:nvPr>
+            <p:ph idx="101" type="title" hasCustomPrompt="1"/>
+          </p:nvPr>
+        </p:nvSpPr>
+        <p:spPr>
+          <a:xfrm>
+            <a:off x="548640" y="868680"/>
+            <a:ext cx="11064240" cy="1188720"/>
+          </a:xfrm>
+          <a:prstGeom prst="rect">
+            <a:avLst/>
+          </a:prstGeom>
+          <a:noFill/>
+          <a:ln/>
+        </p:spPr>
+        <p:txBody>
+          <a:bodyPr wrap="square" lIns="0" tIns="0" rIns="0" bIns="0" rtlCol="0" anchor="t"/>
+          <a:lstStyle/>
+          <a:p>
+            <a:pPr algn="l" indent="0" marL="0">
+              <a:buNone/>
+            </a:pPr>
+            <a:r>
+              <a:rPr lang="en-US" sz="4000" b="1" spc="-60" kern="0" dirty="0">
+                <a:solidFill>
+                  <a:srgbClr val="1D1D1F"/>
+                </a:solidFill>
+                <a:latin typeface="Inter Display" pitchFamily="34" charset="0"/>
+                <a:ea typeface="Inter Display" pitchFamily="34" charset="-122"/>
+                <a:cs typeface="Inter Display" pitchFamily="34" charset="-120"/>
+              </a:rPr>
+              <a:t>Il dettaglio dei multipli</a:t>
+            </a:r>
+            <a:endParaRPr lang="en-US" sz="4000" dirty="0"/>
+          </a:p>
+        </p:txBody>
+      </p:sp>
+      <p:sp>
+        <p:nvSpPr>
+          <p:cNvPr id="4" name="Text 0"/>
+          <p:cNvSpPr/>
+          <p:nvPr>
+            <p:ph idx="102" type="body" hasCustomPrompt="1"/>
+          </p:nvPr>
+        </p:nvSpPr>
+        <p:spPr>
+          <a:xfrm>
+            <a:off x="548640" y="6400800"/>
+            <a:ext cx="10424160" cy="228600"/>
+          </a:xfrm>
+          <a:prstGeom prst="rect">
+            <a:avLst/>
+          </a:prstGeom>
+          <a:noFill/>
+          <a:ln/>
+        </p:spPr>
+        <p:txBody>
+          <a:bodyPr wrap="square" lIns="0" tIns="0" rIns="0" bIns="0" rtlCol="0" anchor="t"/>
+          <a:lstStyle/>
+          <a:p>
+            <a:pPr indent="0" marL="0">
+              <a:buNone/>
+            </a:pPr>
+            <a:r>
+              <a:rPr lang="en-US" sz="800" dirty="0">
+                <a:solidFill>
+                  <a:srgbClr val="6E6E73"/>
+                </a:solidFill>
+                <a:latin typeface="Inter" pitchFamily="34" charset="0"/>
+                <a:ea typeface="Inter" pitchFamily="34" charset="-122"/>
+                <a:cs typeface="Inter" pitchFamily="34" charset="-120"/>
+              </a:rPr>
               <a:t>Fonte: Ricavi 2026 stimati dall'autore (H1 effettivo, SEC 10-Q, più H2 stimato, sotto il consenso di 45 mld); multipli: stockanalysis.com 8-9/10/2026; laboratori: Reuters, Bloomberg (2026)</a:t>
             </a:r>
             <a:endParaRPr lang="en-US" sz="800" dirty="0"/>
@@ -10197,7 +11463,7 @@
       </p:sp>
       <p:graphicFrame>
         <p:nvGraphicFramePr>
-          <p:cNvPr id="20" name="Table 0"/>
+          <p:cNvPr id="21" name="Table 0"/>
           <p:cNvGraphicFramePr>
             <a:graphicFrameLocks noGrp="1"/>
           </p:cNvGraphicFramePr>
@@ -11734,883 +13000,6 @@
             <a:pPr algn="r"/>
             <a:fld id="{F7021451-1387-4CA6-816F-3879F97B5CBC}" type="slidenum">
               <a:rPr b="0" lang="en-US"/>
-              <a:t>19</a:t>
-            </a:fld>
-            <a:endParaRPr lang="en-US"/>
-          </a:p>
-        </p:txBody>
-      </p:sp>
-    </p:spTree>
-  </p:cSld>
-  <p:clrMapOvr>
-    <a:masterClrMapping/>
-  </p:clrMapOvr>
-</p:sld>
-</file>
-
-<file path=ppt/slides/slide2.xml><?xml version="1.0" encoding="utf-8"?>
-<p:sld xmlns:a="http://schemas.openxmlformats.org/drawingml/2006/main" xmlns:r="http://schemas.openxmlformats.org/officeDocument/2006/relationships" xmlns:p="http://schemas.openxmlformats.org/presentationml/2006/main">
-  <p:cSld name="Slide 2">
-    <p:spTree>
-      <p:nvGrpSpPr>
-        <p:cNvPr id="1" name=""/>
-        <p:cNvGrpSpPr/>
-        <p:nvPr/>
-      </p:nvGrpSpPr>
-      <p:grpSpPr>
-        <a:xfrm>
-          <a:off x="0" y="0"/>
-          <a:ext cx="0" cy="0"/>
-          <a:chOff x="0" y="0"/>
-          <a:chExt cx="0" cy="0"/>
-        </a:xfrm>
-      </p:grpSpPr>
-      <p:sp>
-        <p:nvSpPr>
-          <p:cNvPr id="2" name="Text 0"/>
-          <p:cNvSpPr/>
-          <p:nvPr>
-            <p:ph idx="100" type="body" hasCustomPrompt="1"/>
-          </p:nvPr>
-        </p:nvSpPr>
-        <p:spPr>
-          <a:xfrm>
-            <a:off x="548640" y="502920"/>
-            <a:ext cx="11064240" cy="274320"/>
-          </a:xfrm>
-          <a:prstGeom prst="rect">
-            <a:avLst/>
-          </a:prstGeom>
-          <a:noFill/>
-          <a:ln/>
-        </p:spPr>
-        <p:txBody>
-          <a:bodyPr wrap="square" lIns="0" tIns="0" rIns="0" bIns="0" rtlCol="0" anchor="t"/>
-          <a:lstStyle/>
-          <a:p>
-            <a:pPr indent="0" marL="0">
-              <a:buNone/>
-            </a:pPr>
-            <a:r>
-              <a:rPr lang="en-US" sz="1200" spc="300" kern="0" dirty="0">
-                <a:solidFill>
-                  <a:srgbClr val="86868B"/>
-                </a:solidFill>
-                <a:latin typeface="D-DIN" pitchFamily="34" charset="0"/>
-                <a:ea typeface="D-DIN" pitchFamily="34" charset="-122"/>
-                <a:cs typeface="D-DIN" pitchFamily="34" charset="-120"/>
-              </a:rPr>
-              <a:t>LA DOMANDA</a:t>
-            </a:r>
-            <a:endParaRPr lang="en-US" sz="1200" dirty="0"/>
-          </a:p>
-        </p:txBody>
-      </p:sp>
-      <p:sp>
-        <p:nvSpPr>
-          <p:cNvPr id="3" name="Text 0"/>
-          <p:cNvSpPr/>
-          <p:nvPr>
-            <p:ph idx="101" type="title" hasCustomPrompt="1"/>
-          </p:nvPr>
-        </p:nvSpPr>
-        <p:spPr>
-          <a:xfrm>
-            <a:off x="548640" y="868680"/>
-            <a:ext cx="11064240" cy="1188720"/>
-          </a:xfrm>
-          <a:prstGeom prst="rect">
-            <a:avLst/>
-          </a:prstGeom>
-          <a:noFill/>
-          <a:ln/>
-        </p:spPr>
-        <p:txBody>
-          <a:bodyPr wrap="square" lIns="0" tIns="0" rIns="0" bIns="0" rtlCol="0" anchor="t"/>
-          <a:lstStyle/>
-          <a:p>
-            <a:pPr algn="l" indent="0" marL="0">
-              <a:buNone/>
-            </a:pPr>
-            <a:r>
-              <a:rPr lang="en-US" sz="4000" b="1" spc="-60" kern="0" dirty="0">
-                <a:solidFill>
-                  <a:srgbClr val="FFFFFF"/>
-                </a:solidFill>
-                <a:latin typeface="Inter Display" pitchFamily="34" charset="0"/>
-                <a:ea typeface="Inter Display" pitchFamily="34" charset="-122"/>
-                <a:cs typeface="Inter Display" pitchFamily="34" charset="-120"/>
-              </a:rPr>
-              <a:t>Prezzo e valore non sono la stessa cosa</a:t>
-            </a:r>
-            <a:endParaRPr lang="en-US" sz="4000" dirty="0"/>
-          </a:p>
-        </p:txBody>
-      </p:sp>
-      <p:sp>
-        <p:nvSpPr>
-          <p:cNvPr id="4" name="Text 0"/>
-          <p:cNvSpPr/>
-          <p:nvPr>
-            <p:ph idx="102" type="body" hasCustomPrompt="1"/>
-          </p:nvPr>
-        </p:nvSpPr>
-        <p:spPr>
-          <a:xfrm>
-            <a:off x="548640" y="6400800"/>
-            <a:ext cx="10424160" cy="228600"/>
-          </a:xfrm>
-          <a:prstGeom prst="rect">
-            <a:avLst/>
-          </a:prstGeom>
-          <a:noFill/>
-          <a:ln/>
-        </p:spPr>
-        <p:txBody>
-          <a:bodyPr wrap="square" lIns="0" tIns="0" rIns="0" bIns="0" rtlCol="0" anchor="t"/>
-          <a:lstStyle/>
-          <a:p>
-            <a:pPr indent="0" marL="0">
-              <a:buNone/>
-            </a:pPr>
-            <a:r>
-              <a:rPr lang="en-US" sz="800" dirty="0">
-                <a:solidFill>
-                  <a:srgbClr val="86868B"/>
-                </a:solidFill>
-                <a:latin typeface="Inter" pitchFamily="34" charset="0"/>
-                <a:ea typeface="Inter" pitchFamily="34" charset="-122"/>
-                <a:cs typeface="Inter" pitchFamily="34" charset="-120"/>
-              </a:rPr>
-              <a:t>Fonte: Corso, Valuation: DCF (slide 5-7) e multipli (slide 53); Fama (1970), Journal of Finance 25(2); Fama (1991), Journal of Finance 46(5)</a:t>
-            </a:r>
-            <a:endParaRPr lang="en-US" sz="800" dirty="0"/>
-          </a:p>
-        </p:txBody>
-      </p:sp>
-      <p:sp>
-        <p:nvSpPr>
-          <p:cNvPr id="6" name="Text 3"/>
-          <p:cNvSpPr/>
-          <p:nvPr/>
-        </p:nvSpPr>
-        <p:spPr>
-          <a:xfrm>
-            <a:off x="548640" y="2103120"/>
-            <a:ext cx="5303520" cy="1005840"/>
-          </a:xfrm>
-          <a:prstGeom prst="rect">
-            <a:avLst/>
-          </a:prstGeom>
-          <a:noFill/>
-          <a:ln/>
-        </p:spPr>
-        <p:txBody>
-          <a:bodyPr wrap="square" lIns="0" tIns="0" rIns="0" bIns="0" rtlCol="0" anchor="b"/>
-          <a:lstStyle/>
-          <a:p>
-            <a:pPr indent="0" marL="0">
-              <a:buNone/>
-            </a:pPr>
-            <a:r>
-              <a:rPr lang="en-US" sz="7200" b="1" spc="-60" kern="0" dirty="0">
-                <a:solidFill>
-                  <a:srgbClr val="2997FF"/>
-                </a:solidFill>
-                <a:latin typeface="Inter Display" pitchFamily="34" charset="0"/>
-                <a:ea typeface="Inter Display" pitchFamily="34" charset="-122"/>
-                <a:cs typeface="Inter Display" pitchFamily="34" charset="-120"/>
-              </a:rPr>
-              <a:t>Valore</a:t>
-            </a:r>
-            <a:endParaRPr lang="en-US" sz="7200" dirty="0"/>
-          </a:p>
-        </p:txBody>
-      </p:sp>
-      <p:sp>
-        <p:nvSpPr>
-          <p:cNvPr id="7" name="Text 4"/>
-          <p:cNvSpPr/>
-          <p:nvPr/>
-        </p:nvSpPr>
-        <p:spPr>
-          <a:xfrm>
-            <a:off x="548640" y="3246120"/>
-            <a:ext cx="5029200" cy="822960"/>
-          </a:xfrm>
-          <a:prstGeom prst="rect">
-            <a:avLst/>
-          </a:prstGeom>
-          <a:noFill/>
-          <a:ln/>
-        </p:spPr>
-        <p:txBody>
-          <a:bodyPr wrap="square" lIns="0" tIns="0" rIns="0" bIns="0" rtlCol="0" anchor="t"/>
-          <a:lstStyle/>
-          <a:p>
-            <a:pPr indent="0" marL="0">
-              <a:lnSpc>
-                <a:spcPct val="110000"/>
-              </a:lnSpc>
-              <a:buNone/>
-            </a:pPr>
-            <a:r>
-              <a:rPr lang="en-US" sz="2000" dirty="0">
-                <a:solidFill>
-                  <a:srgbClr val="FFFFFF"/>
-                </a:solidFill>
-                <a:latin typeface="Inter" pitchFamily="34" charset="0"/>
-                <a:ea typeface="Inter" pitchFamily="34" charset="-122"/>
-                <a:cs typeface="Inter" pitchFamily="34" charset="-120"/>
-              </a:rPr>
-              <a:t>Valore attuale dei flussi di cassa futuri. Lo stima il DCF.</a:t>
-            </a:r>
-            <a:endParaRPr lang="en-US" sz="2000" dirty="0"/>
-          </a:p>
-        </p:txBody>
-      </p:sp>
-      <p:sp>
-        <p:nvSpPr>
-          <p:cNvPr id="8" name="Text 5"/>
-          <p:cNvSpPr/>
-          <p:nvPr/>
-        </p:nvSpPr>
-        <p:spPr>
-          <a:xfrm>
-            <a:off x="6217920" y="2103120"/>
-            <a:ext cx="5303520" cy="1005840"/>
-          </a:xfrm>
-          <a:prstGeom prst="rect">
-            <a:avLst/>
-          </a:prstGeom>
-          <a:noFill/>
-          <a:ln/>
-        </p:spPr>
-        <p:txBody>
-          <a:bodyPr wrap="square" lIns="0" tIns="0" rIns="0" bIns="0" rtlCol="0" anchor="b"/>
-          <a:lstStyle/>
-          <a:p>
-            <a:pPr indent="0" marL="0">
-              <a:buNone/>
-            </a:pPr>
-            <a:r>
-              <a:rPr lang="en-US" sz="7200" b="1" spc="-60" kern="0" dirty="0">
-                <a:solidFill>
-                  <a:srgbClr val="FFB340"/>
-                </a:solidFill>
-                <a:latin typeface="Inter Display" pitchFamily="34" charset="0"/>
-                <a:ea typeface="Inter Display" pitchFamily="34" charset="-122"/>
-                <a:cs typeface="Inter Display" pitchFamily="34" charset="-120"/>
-              </a:rPr>
-              <a:t>Prezzo</a:t>
-            </a:r>
-            <a:endParaRPr lang="en-US" sz="7200" dirty="0"/>
-          </a:p>
-        </p:txBody>
-      </p:sp>
-      <p:sp>
-        <p:nvSpPr>
-          <p:cNvPr id="9" name="Text 6"/>
-          <p:cNvSpPr/>
-          <p:nvPr/>
-        </p:nvSpPr>
-        <p:spPr>
-          <a:xfrm>
-            <a:off x="6217920" y="3246120"/>
-            <a:ext cx="5029200" cy="822960"/>
-          </a:xfrm>
-          <a:prstGeom prst="rect">
-            <a:avLst/>
-          </a:prstGeom>
-          <a:noFill/>
-          <a:ln/>
-        </p:spPr>
-        <p:txBody>
-          <a:bodyPr wrap="square" lIns="0" tIns="0" rIns="0" bIns="0" rtlCol="0" anchor="t"/>
-          <a:lstStyle/>
-          <a:p>
-            <a:pPr indent="0" marL="0">
-              <a:lnSpc>
-                <a:spcPct val="110000"/>
-              </a:lnSpc>
-              <a:buNone/>
-            </a:pPr>
-            <a:r>
-              <a:rPr lang="en-US" sz="2000" dirty="0">
-                <a:solidFill>
-                  <a:srgbClr val="FFFFFF"/>
-                </a:solidFill>
-                <a:latin typeface="Inter" pitchFamily="34" charset="0"/>
-                <a:ea typeface="Inter" pitchFamily="34" charset="-122"/>
-                <a:cs typeface="Inter" pitchFamily="34" charset="-120"/>
-              </a:rPr>
-              <a:t>Quanto paga oggi l'ultimo compratore. Lo leggono i multipli.</a:t>
-            </a:r>
-            <a:endParaRPr lang="en-US" sz="2000" dirty="0"/>
-          </a:p>
-        </p:txBody>
-      </p:sp>
-      <p:sp>
-        <p:nvSpPr>
-          <p:cNvPr id="10" name="Shape 7"/>
-          <p:cNvSpPr/>
-          <p:nvPr/>
-        </p:nvSpPr>
-        <p:spPr>
-          <a:xfrm>
-            <a:off x="548640" y="4343400"/>
-            <a:ext cx="11064240" cy="0"/>
-          </a:xfrm>
-          <a:prstGeom prst="line">
-            <a:avLst/>
-          </a:prstGeom>
-          <a:noFill/>
-          <a:ln w="9525">
-            <a:solidFill>
-              <a:srgbClr val="2C2C2E"/>
-            </a:solidFill>
-            <a:prstDash val="solid"/>
-          </a:ln>
-        </p:spPr>
-      </p:sp>
-      <p:sp>
-        <p:nvSpPr>
-          <p:cNvPr id="11" name="Text 8"/>
-          <p:cNvSpPr/>
-          <p:nvPr/>
-        </p:nvSpPr>
-        <p:spPr>
-          <a:xfrm>
-            <a:off x="548640" y="4572000"/>
-            <a:ext cx="11064240" cy="1097280"/>
-          </a:xfrm>
-          <a:prstGeom prst="rect">
-            <a:avLst/>
-          </a:prstGeom>
-          <a:noFill/>
-          <a:ln/>
-        </p:spPr>
-        <p:txBody>
-          <a:bodyPr wrap="square" lIns="0" tIns="0" rIns="0" bIns="0" rtlCol="0" anchor="t"/>
-          <a:lstStyle/>
-          <a:p>
-            <a:pPr indent="0" marL="0">
-              <a:lnSpc>
-                <a:spcPct val="110000"/>
-              </a:lnSpc>
-              <a:buNone/>
-            </a:pPr>
-            <a:r>
-              <a:rPr lang="en-US" sz="1900" dirty="0">
-                <a:solidFill>
-                  <a:srgbClr val="86868B"/>
-                </a:solidFill>
-                <a:latin typeface="Inter" pitchFamily="34" charset="0"/>
-                <a:ea typeface="Inter" pitchFamily="34" charset="-122"/>
-                <a:cs typeface="Inter" pitchFamily="34" charset="-120"/>
-              </a:rPr>
-              <a:t>In un mercato efficiente coincidono (Fama 1970). Per verificarlo: stimo il valore in modo indipendente e lo confronto con il prezzo. Se divergono, mi chiedo che cosa contiene il prezzo.</a:t>
-            </a:r>
-            <a:endParaRPr lang="en-US" sz="1900" dirty="0"/>
-          </a:p>
-        </p:txBody>
-      </p:sp>
-      <p:sp>
-        <p:nvSpPr>
-          <p:cNvPr id="25" name="Slide Number Placeholder 0"/>
-          <p:cNvSpPr>
-            <a:spLocks noGrp="1"/>
-          </p:cNvSpPr>
-          <p:nvPr>
-            <p:ph type="sldNum" sz="quarter" idx="4294967295"/>
-          </p:nvPr>
-        </p:nvSpPr>
-        <p:spPr>
-          <a:xfrm>
-            <a:off x="11274552" y="6400800"/>
-            <a:ext cx="365760" cy="228600"/>
-          </a:xfrm>
-          <a:prstGeom prst="rect">
-            <a:avLst/>
-          </a:prstGeom>
-          <a:extLst>
-            <a:ext uri="{C572A759-6A51-4108-AA02-DFA0A04FC94B}">
-              <ma14:wrappingTextBoxFlag xmlns:ma14="http://schemas.microsoft.com/office/mac/drawingml/2011/main" val="0"/>
-            </a:ext>
-          </a:extLst>
-        </p:spPr>
-        <p:txBody>
-          <a:bodyPr/>
-          <a:lstStyle>
-            <a:lvl1pPr>
-              <a:defRPr sz="800">
-                <a:solidFill>
-                  <a:srgbClr val="86868B"/>
-                </a:solidFill>
-                <a:latin typeface="Inter"/>
-                <a:ea typeface="Inter"/>
-                <a:cs typeface="Inter"/>
-              </a:defRPr>
-            </a:lvl1pPr>
-          </a:lstStyle>
-          <a:p>
-            <a:pPr algn="r"/>
-            <a:fld id="{F7021451-1387-4CA6-816F-3879F97B5CBC}" type="slidenum">
-              <a:rPr b="0" lang="en-US"/>
-              <a:t>2</a:t>
-            </a:fld>
-            <a:endParaRPr lang="en-US"/>
-          </a:p>
-        </p:txBody>
-      </p:sp>
-    </p:spTree>
-  </p:cSld>
-  <p:clrMapOvr>
-    <a:masterClrMapping/>
-  </p:clrMapOvr>
-</p:sld>
-</file>
-
-<file path=ppt/slides/slide20.xml><?xml version="1.0" encoding="utf-8"?>
-<p:sld xmlns:a="http://schemas.openxmlformats.org/drawingml/2006/main" xmlns:r="http://schemas.openxmlformats.org/officeDocument/2006/relationships" xmlns:p="http://schemas.openxmlformats.org/presentationml/2006/main">
-  <p:cSld name="Slide 20">
-    <p:spTree>
-      <p:nvGrpSpPr>
-        <p:cNvPr id="1" name=""/>
-        <p:cNvGrpSpPr/>
-        <p:nvPr/>
-      </p:nvGrpSpPr>
-      <p:grpSpPr>
-        <a:xfrm>
-          <a:off x="0" y="0"/>
-          <a:ext cx="0" cy="0"/>
-          <a:chOff x="0" y="0"/>
-          <a:chExt cx="0" cy="0"/>
-        </a:xfrm>
-      </p:grpSpPr>
-      <p:sp>
-        <p:nvSpPr>
-          <p:cNvPr id="2" name="Text 0"/>
-          <p:cNvSpPr/>
-          <p:nvPr>
-            <p:ph idx="100" type="body" hasCustomPrompt="1"/>
-          </p:nvPr>
-        </p:nvSpPr>
-        <p:spPr>
-          <a:xfrm>
-            <a:off x="548640" y="502920"/>
-            <a:ext cx="11064240" cy="274320"/>
-          </a:xfrm>
-          <a:prstGeom prst="rect">
-            <a:avLst/>
-          </a:prstGeom>
-          <a:noFill/>
-          <a:ln/>
-        </p:spPr>
-        <p:txBody>
-          <a:bodyPr wrap="square" lIns="0" tIns="0" rIns="0" bIns="0" rtlCol="0" anchor="t"/>
-          <a:lstStyle/>
-          <a:p>
-            <a:pPr indent="0" marL="0">
-              <a:buNone/>
-            </a:pPr>
-            <a:r>
-              <a:rPr lang="en-US" sz="1200" spc="300" kern="0" dirty="0">
-                <a:solidFill>
-                  <a:srgbClr val="6E6E73"/>
-                </a:solidFill>
-                <a:latin typeface="D-DIN" pitchFamily="34" charset="0"/>
-                <a:ea typeface="D-DIN" pitchFamily="34" charset="-122"/>
-                <a:cs typeface="D-DIN" pitchFamily="34" charset="-120"/>
-              </a:rPr>
-              <a:t>RISERVA  |  SENSITIVITÀ</a:t>
-            </a:r>
-            <a:endParaRPr lang="en-US" sz="1200" dirty="0"/>
-          </a:p>
-        </p:txBody>
-      </p:sp>
-      <p:sp>
-        <p:nvSpPr>
-          <p:cNvPr id="3" name="Text 0"/>
-          <p:cNvSpPr/>
-          <p:nvPr>
-            <p:ph idx="101" type="title" hasCustomPrompt="1"/>
-          </p:nvPr>
-        </p:nvSpPr>
-        <p:spPr>
-          <a:xfrm>
-            <a:off x="548640" y="868680"/>
-            <a:ext cx="11064240" cy="1188720"/>
-          </a:xfrm>
-          <a:prstGeom prst="rect">
-            <a:avLst/>
-          </a:prstGeom>
-          <a:noFill/>
-          <a:ln/>
-        </p:spPr>
-        <p:txBody>
-          <a:bodyPr wrap="square" lIns="0" tIns="0" rIns="0" bIns="0" rtlCol="0" anchor="t"/>
-          <a:lstStyle/>
-          <a:p>
-            <a:pPr algn="l" indent="0" marL="0">
-              <a:buNone/>
-            </a:pPr>
-            <a:r>
-              <a:rPr lang="en-US" sz="4000" b="1" spc="-60" kern="0" dirty="0">
-                <a:solidFill>
-                  <a:srgbClr val="1D1D1F"/>
-                </a:solidFill>
-                <a:latin typeface="Inter Display" pitchFamily="34" charset="0"/>
-                <a:ea typeface="Inter Display" pitchFamily="34" charset="-122"/>
-                <a:cs typeface="Inter Display" pitchFamily="34" charset="-120"/>
-              </a:rPr>
-              <a:t>Nessuna leva porta il valore oltre 67 $</a:t>
-            </a:r>
-            <a:endParaRPr lang="en-US" sz="4000" dirty="0"/>
-          </a:p>
-        </p:txBody>
-      </p:sp>
-      <p:sp>
-        <p:nvSpPr>
-          <p:cNvPr id="4" name="Text 0"/>
-          <p:cNvSpPr/>
-          <p:nvPr>
-            <p:ph idx="102" type="body" hasCustomPrompt="1"/>
-          </p:nvPr>
-        </p:nvSpPr>
-        <p:spPr>
-          <a:xfrm>
-            <a:off x="548640" y="6400800"/>
-            <a:ext cx="10424160" cy="228600"/>
-          </a:xfrm>
-          <a:prstGeom prst="rect">
-            <a:avLst/>
-          </a:prstGeom>
-          <a:noFill/>
-          <a:ln/>
-        </p:spPr>
-        <p:txBody>
-          <a:bodyPr wrap="square" lIns="0" tIns="0" rIns="0" bIns="0" rtlCol="0" anchor="t"/>
-          <a:lstStyle/>
-          <a:p>
-            <a:pPr indent="0" marL="0">
-              <a:buNone/>
-            </a:pPr>
-            <a:r>
-              <a:rPr lang="en-US" sz="800" dirty="0">
-                <a:solidFill>
-                  <a:srgbClr val="6E6E73"/>
-                </a:solidFill>
-                <a:latin typeface="Inter" pitchFamily="34" charset="0"/>
-                <a:ea typeface="Inter" pitchFamily="34" charset="-122"/>
-                <a:cs typeface="Inter" pitchFamily="34" charset="-120"/>
-              </a:rPr>
-              <a:t>Fonte: Modello dell'autore; intervalli: probabilità bassa-alta di ogni milestone, beta prima e dopo la milestone, g +-0,5 punti, governance 0-3,5%</a:t>
-            </a:r>
-            <a:endParaRPr lang="en-US" sz="800" dirty="0"/>
-          </a:p>
-        </p:txBody>
-      </p:sp>
-      <p:pic>
-        <p:nvPicPr>
-          <p:cNvPr id="6" name="Image 0" descr="Tornado della sensitività del valore del gruppo per azione">    </p:cNvPr>
-          <p:cNvPicPr>
-            <a:picLocks noChangeAspect="1"/>
-          </p:cNvPicPr>
-          <p:nvPr/>
-        </p:nvPicPr>
-        <p:blipFill>
-          <a:blip r:embed="rId1"/>
-          <a:stretch>
-            <a:fillRect/>
-          </a:stretch>
-        </p:blipFill>
-        <p:spPr>
-          <a:xfrm>
-            <a:off x="411480" y="1874520"/>
-            <a:ext cx="7680960" cy="4320540"/>
-          </a:xfrm>
-          <a:prstGeom prst="rect">
-            <a:avLst/>
-          </a:prstGeom>
-        </p:spPr>
-      </p:pic>
-      <p:sp>
-        <p:nvSpPr>
-          <p:cNvPr id="7" name="Text 3"/>
-          <p:cNvSpPr/>
-          <p:nvPr/>
-        </p:nvSpPr>
-        <p:spPr>
-          <a:xfrm>
-            <a:off x="8503920" y="1920240"/>
-            <a:ext cx="3291840" cy="868680"/>
-          </a:xfrm>
-          <a:prstGeom prst="rect">
-            <a:avLst/>
-          </a:prstGeom>
-          <a:noFill/>
-          <a:ln/>
-        </p:spPr>
-        <p:txBody>
-          <a:bodyPr wrap="square" lIns="0" tIns="0" rIns="0" bIns="0" rtlCol="0" anchor="b"/>
-          <a:lstStyle/>
-          <a:p>
-            <a:pPr indent="0" marL="0">
-              <a:buNone/>
-            </a:pPr>
-            <a:r>
-              <a:rPr lang="en-US" sz="5400" b="1" spc="-60" kern="0" dirty="0">
-                <a:solidFill>
-                  <a:srgbClr val="0B1F3A"/>
-                </a:solidFill>
-                <a:latin typeface="Inter Display" pitchFamily="34" charset="0"/>
-                <a:ea typeface="Inter Display" pitchFamily="34" charset="-122"/>
-                <a:cs typeface="Inter Display" pitchFamily="34" charset="-120"/>
-              </a:rPr>
-              <a:t>47,92 $</a:t>
-            </a:r>
-            <a:endParaRPr lang="en-US" sz="5400" dirty="0"/>
-          </a:p>
-        </p:txBody>
-      </p:sp>
-      <p:sp>
-        <p:nvSpPr>
-          <p:cNvPr id="8" name="Text 4"/>
-          <p:cNvSpPr/>
-          <p:nvPr/>
-        </p:nvSpPr>
-        <p:spPr>
-          <a:xfrm>
-            <a:off x="8503920" y="2834640"/>
-            <a:ext cx="3154680" cy="502920"/>
-          </a:xfrm>
-          <a:prstGeom prst="rect">
-            <a:avLst/>
-          </a:prstGeom>
-          <a:noFill/>
-          <a:ln/>
-        </p:spPr>
-        <p:txBody>
-          <a:bodyPr wrap="square" lIns="0" tIns="0" rIns="0" bIns="0" rtlCol="0" anchor="t"/>
-          <a:lstStyle/>
-          <a:p>
-            <a:pPr indent="0" marL="0">
-              <a:buNone/>
-            </a:pPr>
-            <a:r>
-              <a:rPr lang="en-US" sz="1350" dirty="0">
-                <a:solidFill>
-                  <a:srgbClr val="6E6E73"/>
-                </a:solidFill>
-                <a:latin typeface="Inter" pitchFamily="34" charset="0"/>
-                <a:ea typeface="Inter" pitchFamily="34" charset="-122"/>
-                <a:cs typeface="Inter" pitchFamily="34" charset="-120"/>
-              </a:rPr>
-              <a:t>con il beta di Starlink degli operatori satellitari (0,74)</a:t>
-            </a:r>
-            <a:endParaRPr lang="en-US" sz="1350" dirty="0"/>
-          </a:p>
-        </p:txBody>
-      </p:sp>
-      <p:sp>
-        <p:nvSpPr>
-          <p:cNvPr id="9" name="Text 5"/>
-          <p:cNvSpPr/>
-          <p:nvPr/>
-        </p:nvSpPr>
-        <p:spPr>
-          <a:xfrm>
-            <a:off x="8503920" y="3383280"/>
-            <a:ext cx="3291840" cy="868680"/>
-          </a:xfrm>
-          <a:prstGeom prst="rect">
-            <a:avLst/>
-          </a:prstGeom>
-          <a:noFill/>
-          <a:ln/>
-        </p:spPr>
-        <p:txBody>
-          <a:bodyPr wrap="square" lIns="0" tIns="0" rIns="0" bIns="0" rtlCol="0" anchor="b"/>
-          <a:lstStyle/>
-          <a:p>
-            <a:pPr indent="0" marL="0">
-              <a:buNone/>
-            </a:pPr>
-            <a:r>
-              <a:rPr lang="en-US" sz="5400" b="1" spc="-60" kern="0" dirty="0">
-                <a:solidFill>
-                  <a:srgbClr val="0B1F3A"/>
-                </a:solidFill>
-                <a:latin typeface="Inter Display" pitchFamily="34" charset="0"/>
-                <a:ea typeface="Inter Display" pitchFamily="34" charset="-122"/>
-                <a:cs typeface="Inter Display" pitchFamily="34" charset="-120"/>
-              </a:rPr>
-              <a:t>66 $</a:t>
-            </a:r>
-            <a:endParaRPr lang="en-US" sz="5400" dirty="0"/>
-          </a:p>
-        </p:txBody>
-      </p:sp>
-      <p:sp>
-        <p:nvSpPr>
-          <p:cNvPr id="10" name="Text 6"/>
-          <p:cNvSpPr/>
-          <p:nvPr/>
-        </p:nvSpPr>
-        <p:spPr>
-          <a:xfrm>
-            <a:off x="8503920" y="4297680"/>
-            <a:ext cx="3154680" cy="502920"/>
-          </a:xfrm>
-          <a:prstGeom prst="rect">
-            <a:avLst/>
-          </a:prstGeom>
-          <a:noFill/>
-          <a:ln/>
-        </p:spPr>
-        <p:txBody>
-          <a:bodyPr wrap="square" lIns="0" tIns="0" rIns="0" bIns="0" rtlCol="0" anchor="t"/>
-          <a:lstStyle/>
-          <a:p>
-            <a:pPr indent="0" marL="0">
-              <a:buNone/>
-            </a:pPr>
-            <a:r>
-              <a:rPr lang="en-US" sz="1350" dirty="0">
-                <a:solidFill>
-                  <a:srgbClr val="6E6E73"/>
-                </a:solidFill>
-                <a:latin typeface="Inter" pitchFamily="34" charset="0"/>
-                <a:ea typeface="Inter" pitchFamily="34" charset="-122"/>
-                <a:cs typeface="Inter" pitchFamily="34" charset="-120"/>
-              </a:rPr>
-              <a:t>il massimo con una leva alla volta</a:t>
-            </a:r>
-            <a:endParaRPr lang="en-US" sz="1350" dirty="0"/>
-          </a:p>
-        </p:txBody>
-      </p:sp>
-      <p:sp>
-        <p:nvSpPr>
-          <p:cNvPr id="11" name="Text 7"/>
-          <p:cNvSpPr/>
-          <p:nvPr/>
-        </p:nvSpPr>
-        <p:spPr>
-          <a:xfrm>
-            <a:off x="8503920" y="4846320"/>
-            <a:ext cx="3291840" cy="868680"/>
-          </a:xfrm>
-          <a:prstGeom prst="rect">
-            <a:avLst/>
-          </a:prstGeom>
-          <a:noFill/>
-          <a:ln/>
-        </p:spPr>
-        <p:txBody>
-          <a:bodyPr wrap="square" lIns="0" tIns="0" rIns="0" bIns="0" rtlCol="0" anchor="b"/>
-          <a:lstStyle/>
-          <a:p>
-            <a:pPr indent="0" marL="0">
-              <a:buNone/>
-            </a:pPr>
-            <a:r>
-              <a:rPr lang="en-US" sz="5400" b="1" spc="-60" kern="0" dirty="0">
-                <a:solidFill>
-                  <a:srgbClr val="6E6E73"/>
-                </a:solidFill>
-                <a:latin typeface="Inter Display" pitchFamily="34" charset="0"/>
-                <a:ea typeface="Inter Display" pitchFamily="34" charset="-122"/>
-                <a:cs typeface="Inter Display" pitchFamily="34" charset="-120"/>
-              </a:rPr>
-              <a:t>135 $</a:t>
-            </a:r>
-            <a:endParaRPr lang="en-US" sz="5400" dirty="0"/>
-          </a:p>
-        </p:txBody>
-      </p:sp>
-      <p:sp>
-        <p:nvSpPr>
-          <p:cNvPr id="12" name="Text 8"/>
-          <p:cNvSpPr/>
-          <p:nvPr/>
-        </p:nvSpPr>
-        <p:spPr>
-          <a:xfrm>
-            <a:off x="8503920" y="5760720"/>
-            <a:ext cx="3154680" cy="502920"/>
-          </a:xfrm>
-          <a:prstGeom prst="rect">
-            <a:avLst/>
-          </a:prstGeom>
-          <a:noFill/>
-          <a:ln/>
-        </p:spPr>
-        <p:txBody>
-          <a:bodyPr wrap="square" lIns="0" tIns="0" rIns="0" bIns="0" rtlCol="0" anchor="t"/>
-          <a:lstStyle/>
-          <a:p>
-            <a:pPr indent="0" marL="0">
-              <a:buNone/>
-            </a:pPr>
-            <a:r>
-              <a:rPr lang="en-US" sz="1350" dirty="0">
-                <a:solidFill>
-                  <a:srgbClr val="6E6E73"/>
-                </a:solidFill>
-                <a:latin typeface="Inter" pitchFamily="34" charset="0"/>
-                <a:ea typeface="Inter" pitchFamily="34" charset="-122"/>
-                <a:cs typeface="Inter" pitchFamily="34" charset="-120"/>
-              </a:rPr>
-              <a:t>il prezzo di collocamento</a:t>
-            </a:r>
-            <a:endParaRPr lang="en-US" sz="1350" dirty="0"/>
-          </a:p>
-        </p:txBody>
-      </p:sp>
-      <p:sp>
-        <p:nvSpPr>
-          <p:cNvPr id="25" name="Slide Number Placeholder 0"/>
-          <p:cNvSpPr>
-            <a:spLocks noGrp="1"/>
-          </p:cNvSpPr>
-          <p:nvPr>
-            <p:ph type="sldNum" sz="quarter" idx="4294967295"/>
-          </p:nvPr>
-        </p:nvSpPr>
-        <p:spPr>
-          <a:xfrm>
-            <a:off x="11274552" y="6400800"/>
-            <a:ext cx="365760" cy="228600"/>
-          </a:xfrm>
-          <a:prstGeom prst="rect">
-            <a:avLst/>
-          </a:prstGeom>
-          <a:extLst>
-            <a:ext uri="{C572A759-6A51-4108-AA02-DFA0A04FC94B}">
-              <ma14:wrappingTextBoxFlag xmlns:ma14="http://schemas.microsoft.com/office/mac/drawingml/2011/main" val="0"/>
-            </a:ext>
-          </a:extLst>
-        </p:spPr>
-        <p:txBody>
-          <a:bodyPr/>
-          <a:lstStyle>
-            <a:lvl1pPr>
-              <a:defRPr sz="800">
-                <a:solidFill>
-                  <a:srgbClr val="6E6E73"/>
-                </a:solidFill>
-                <a:latin typeface="Inter"/>
-                <a:ea typeface="Inter"/>
-                <a:cs typeface="Inter"/>
-              </a:defRPr>
-            </a:lvl1pPr>
-          </a:lstStyle>
-          <a:p>
-            <a:pPr algn="r"/>
-            <a:fld id="{F7021451-1387-4CA6-816F-3879F97B5CBC}" type="slidenum">
-              <a:rPr b="0" lang="en-US"/>
               <a:t>20</a:t>
             </a:fld>
             <a:endParaRPr lang="en-US"/>
@@ -12677,7 +13066,7 @@
                 <a:ea typeface="D-DIN" pitchFamily="34" charset="-122"/>
                 <a:cs typeface="D-DIN" pitchFamily="34" charset="-120"/>
               </a:rPr>
-              <a:t>RISERVA  |  ALTRI VALUTATORI</a:t>
+              <a:t>RISERVA  |  SENSITIVITÀ</a:t>
             </a:r>
             <a:endParaRPr lang="en-US" sz="1200" dirty="0"/>
           </a:p>
@@ -12718,7 +13107,7 @@
                 <a:ea typeface="Inter Display" pitchFamily="34" charset="-122"/>
                 <a:cs typeface="Inter Display" pitchFamily="34" charset="-120"/>
               </a:rPr>
-              <a:t>Chi valuta i flussi sta sotto il prezzo</a:t>
+              <a:t>Nessuna leva porta il valore oltre 67 $</a:t>
             </a:r>
             <a:endParaRPr lang="en-US" sz="4000" dirty="0"/>
           </a:p>
@@ -12759,6 +13148,460 @@
                 <a:ea typeface="Inter" pitchFamily="34" charset="-122"/>
                 <a:cs typeface="Inter" pitchFamily="34" charset="-120"/>
               </a:rPr>
+              <a:t>Fonte: Modello dell'autore; intervalli: probabilità bassa-alta di ogni milestone, beta prima e dopo la milestone, g +-0,5 punti, governance 0-3,5%</a:t>
+            </a:r>
+            <a:endParaRPr lang="en-US" sz="800" dirty="0"/>
+          </a:p>
+        </p:txBody>
+      </p:sp>
+      <p:pic>
+        <p:nvPicPr>
+          <p:cNvPr id="6" name="Image 0" descr="Tornado della sensitività del valore del gruppo per azione">    </p:cNvPr>
+          <p:cNvPicPr>
+            <a:picLocks noChangeAspect="1"/>
+          </p:cNvPicPr>
+          <p:nvPr/>
+        </p:nvPicPr>
+        <p:blipFill>
+          <a:blip r:embed="rId1"/>
+          <a:stretch>
+            <a:fillRect/>
+          </a:stretch>
+        </p:blipFill>
+        <p:spPr>
+          <a:xfrm>
+            <a:off x="411480" y="1874520"/>
+            <a:ext cx="7680960" cy="4320540"/>
+          </a:xfrm>
+          <a:prstGeom prst="rect">
+            <a:avLst/>
+          </a:prstGeom>
+        </p:spPr>
+      </p:pic>
+      <p:sp>
+        <p:nvSpPr>
+          <p:cNvPr id="7" name="Text 3"/>
+          <p:cNvSpPr/>
+          <p:nvPr/>
+        </p:nvSpPr>
+        <p:spPr>
+          <a:xfrm>
+            <a:off x="8503920" y="1920240"/>
+            <a:ext cx="3291840" cy="868680"/>
+          </a:xfrm>
+          <a:prstGeom prst="rect">
+            <a:avLst/>
+          </a:prstGeom>
+          <a:noFill/>
+          <a:ln/>
+        </p:spPr>
+        <p:txBody>
+          <a:bodyPr wrap="square" lIns="0" tIns="0" rIns="0" bIns="0" rtlCol="0" anchor="b"/>
+          <a:lstStyle/>
+          <a:p>
+            <a:pPr indent="0" marL="0">
+              <a:buNone/>
+            </a:pPr>
+            <a:r>
+              <a:rPr lang="en-US" sz="5400" b="1" spc="-60" kern="0" dirty="0">
+                <a:solidFill>
+                  <a:srgbClr val="0B1F3A"/>
+                </a:solidFill>
+                <a:latin typeface="Inter Display" pitchFamily="34" charset="0"/>
+                <a:ea typeface="Inter Display" pitchFamily="34" charset="-122"/>
+                <a:cs typeface="Inter Display" pitchFamily="34" charset="-120"/>
+              </a:rPr>
+              <a:t>47,92 $</a:t>
+            </a:r>
+            <a:endParaRPr lang="en-US" sz="5400" dirty="0"/>
+          </a:p>
+        </p:txBody>
+      </p:sp>
+      <p:sp>
+        <p:nvSpPr>
+          <p:cNvPr id="8" name="Text 4"/>
+          <p:cNvSpPr/>
+          <p:nvPr/>
+        </p:nvSpPr>
+        <p:spPr>
+          <a:xfrm>
+            <a:off x="8503920" y="2834640"/>
+            <a:ext cx="3154680" cy="502920"/>
+          </a:xfrm>
+          <a:prstGeom prst="rect">
+            <a:avLst/>
+          </a:prstGeom>
+          <a:noFill/>
+          <a:ln/>
+        </p:spPr>
+        <p:txBody>
+          <a:bodyPr wrap="square" lIns="0" tIns="0" rIns="0" bIns="0" rtlCol="0" anchor="t"/>
+          <a:lstStyle/>
+          <a:p>
+            <a:pPr indent="0" marL="0">
+              <a:buNone/>
+            </a:pPr>
+            <a:r>
+              <a:rPr lang="en-US" sz="1350" dirty="0">
+                <a:solidFill>
+                  <a:srgbClr val="6E6E73"/>
+                </a:solidFill>
+                <a:latin typeface="Inter" pitchFamily="34" charset="0"/>
+                <a:ea typeface="Inter" pitchFamily="34" charset="-122"/>
+                <a:cs typeface="Inter" pitchFamily="34" charset="-120"/>
+              </a:rPr>
+              <a:t>con il beta di Starlink degli operatori satellitari (0,74)</a:t>
+            </a:r>
+            <a:endParaRPr lang="en-US" sz="1350" dirty="0"/>
+          </a:p>
+        </p:txBody>
+      </p:sp>
+      <p:sp>
+        <p:nvSpPr>
+          <p:cNvPr id="9" name="Text 5"/>
+          <p:cNvSpPr/>
+          <p:nvPr/>
+        </p:nvSpPr>
+        <p:spPr>
+          <a:xfrm>
+            <a:off x="8503920" y="3383280"/>
+            <a:ext cx="3291840" cy="868680"/>
+          </a:xfrm>
+          <a:prstGeom prst="rect">
+            <a:avLst/>
+          </a:prstGeom>
+          <a:noFill/>
+          <a:ln/>
+        </p:spPr>
+        <p:txBody>
+          <a:bodyPr wrap="square" lIns="0" tIns="0" rIns="0" bIns="0" rtlCol="0" anchor="b"/>
+          <a:lstStyle/>
+          <a:p>
+            <a:pPr indent="0" marL="0">
+              <a:buNone/>
+            </a:pPr>
+            <a:r>
+              <a:rPr lang="en-US" sz="5400" b="1" spc="-60" kern="0" dirty="0">
+                <a:solidFill>
+                  <a:srgbClr val="0B1F3A"/>
+                </a:solidFill>
+                <a:latin typeface="Inter Display" pitchFamily="34" charset="0"/>
+                <a:ea typeface="Inter Display" pitchFamily="34" charset="-122"/>
+                <a:cs typeface="Inter Display" pitchFamily="34" charset="-120"/>
+              </a:rPr>
+              <a:t>66 $</a:t>
+            </a:r>
+            <a:endParaRPr lang="en-US" sz="5400" dirty="0"/>
+          </a:p>
+        </p:txBody>
+      </p:sp>
+      <p:sp>
+        <p:nvSpPr>
+          <p:cNvPr id="10" name="Text 6"/>
+          <p:cNvSpPr/>
+          <p:nvPr/>
+        </p:nvSpPr>
+        <p:spPr>
+          <a:xfrm>
+            <a:off x="8503920" y="4297680"/>
+            <a:ext cx="3154680" cy="502920"/>
+          </a:xfrm>
+          <a:prstGeom prst="rect">
+            <a:avLst/>
+          </a:prstGeom>
+          <a:noFill/>
+          <a:ln/>
+        </p:spPr>
+        <p:txBody>
+          <a:bodyPr wrap="square" lIns="0" tIns="0" rIns="0" bIns="0" rtlCol="0" anchor="t"/>
+          <a:lstStyle/>
+          <a:p>
+            <a:pPr indent="0" marL="0">
+              <a:buNone/>
+            </a:pPr>
+            <a:r>
+              <a:rPr lang="en-US" sz="1350" dirty="0">
+                <a:solidFill>
+                  <a:srgbClr val="6E6E73"/>
+                </a:solidFill>
+                <a:latin typeface="Inter" pitchFamily="34" charset="0"/>
+                <a:ea typeface="Inter" pitchFamily="34" charset="-122"/>
+                <a:cs typeface="Inter" pitchFamily="34" charset="-120"/>
+              </a:rPr>
+              <a:t>il massimo con una leva alla volta</a:t>
+            </a:r>
+            <a:endParaRPr lang="en-US" sz="1350" dirty="0"/>
+          </a:p>
+        </p:txBody>
+      </p:sp>
+      <p:sp>
+        <p:nvSpPr>
+          <p:cNvPr id="11" name="Text 7"/>
+          <p:cNvSpPr/>
+          <p:nvPr/>
+        </p:nvSpPr>
+        <p:spPr>
+          <a:xfrm>
+            <a:off x="8503920" y="4846320"/>
+            <a:ext cx="3291840" cy="868680"/>
+          </a:xfrm>
+          <a:prstGeom prst="rect">
+            <a:avLst/>
+          </a:prstGeom>
+          <a:noFill/>
+          <a:ln/>
+        </p:spPr>
+        <p:txBody>
+          <a:bodyPr wrap="square" lIns="0" tIns="0" rIns="0" bIns="0" rtlCol="0" anchor="b"/>
+          <a:lstStyle/>
+          <a:p>
+            <a:pPr indent="0" marL="0">
+              <a:buNone/>
+            </a:pPr>
+            <a:r>
+              <a:rPr lang="en-US" sz="5400" b="1" spc="-60" kern="0" dirty="0">
+                <a:solidFill>
+                  <a:srgbClr val="6E6E73"/>
+                </a:solidFill>
+                <a:latin typeface="Inter Display" pitchFamily="34" charset="0"/>
+                <a:ea typeface="Inter Display" pitchFamily="34" charset="-122"/>
+                <a:cs typeface="Inter Display" pitchFamily="34" charset="-120"/>
+              </a:rPr>
+              <a:t>135 $</a:t>
+            </a:r>
+            <a:endParaRPr lang="en-US" sz="5400" dirty="0"/>
+          </a:p>
+        </p:txBody>
+      </p:sp>
+      <p:sp>
+        <p:nvSpPr>
+          <p:cNvPr id="12" name="Text 8"/>
+          <p:cNvSpPr/>
+          <p:nvPr/>
+        </p:nvSpPr>
+        <p:spPr>
+          <a:xfrm>
+            <a:off x="8503920" y="5760720"/>
+            <a:ext cx="3154680" cy="502920"/>
+          </a:xfrm>
+          <a:prstGeom prst="rect">
+            <a:avLst/>
+          </a:prstGeom>
+          <a:noFill/>
+          <a:ln/>
+        </p:spPr>
+        <p:txBody>
+          <a:bodyPr wrap="square" lIns="0" tIns="0" rIns="0" bIns="0" rtlCol="0" anchor="t"/>
+          <a:lstStyle/>
+          <a:p>
+            <a:pPr indent="0" marL="0">
+              <a:buNone/>
+            </a:pPr>
+            <a:r>
+              <a:rPr lang="en-US" sz="1350" dirty="0">
+                <a:solidFill>
+                  <a:srgbClr val="6E6E73"/>
+                </a:solidFill>
+                <a:latin typeface="Inter" pitchFamily="34" charset="0"/>
+                <a:ea typeface="Inter" pitchFamily="34" charset="-122"/>
+                <a:cs typeface="Inter" pitchFamily="34" charset="-120"/>
+              </a:rPr>
+              <a:t>il prezzo di collocamento</a:t>
+            </a:r>
+            <a:endParaRPr lang="en-US" sz="1350" dirty="0"/>
+          </a:p>
+        </p:txBody>
+      </p:sp>
+      <p:sp>
+        <p:nvSpPr>
+          <p:cNvPr id="25" name="Slide Number Placeholder 0"/>
+          <p:cNvSpPr>
+            <a:spLocks noGrp="1"/>
+          </p:cNvSpPr>
+          <p:nvPr>
+            <p:ph type="sldNum" sz="quarter" idx="4294967295"/>
+          </p:nvPr>
+        </p:nvSpPr>
+        <p:spPr>
+          <a:xfrm>
+            <a:off x="11274552" y="6400800"/>
+            <a:ext cx="365760" cy="228600"/>
+          </a:xfrm>
+          <a:prstGeom prst="rect">
+            <a:avLst/>
+          </a:prstGeom>
+          <a:extLst>
+            <a:ext uri="{C572A759-6A51-4108-AA02-DFA0A04FC94B}">
+              <ma14:wrappingTextBoxFlag xmlns:ma14="http://schemas.microsoft.com/office/mac/drawingml/2011/main" val="0"/>
+            </a:ext>
+          </a:extLst>
+        </p:spPr>
+        <p:txBody>
+          <a:bodyPr/>
+          <a:lstStyle>
+            <a:lvl1pPr>
+              <a:defRPr sz="800">
+                <a:solidFill>
+                  <a:srgbClr val="6E6E73"/>
+                </a:solidFill>
+                <a:latin typeface="Inter"/>
+                <a:ea typeface="Inter"/>
+                <a:cs typeface="Inter"/>
+              </a:defRPr>
+            </a:lvl1pPr>
+          </a:lstStyle>
+          <a:p>
+            <a:pPr algn="r"/>
+            <a:fld id="{F7021451-1387-4CA6-816F-3879F97B5CBC}" type="slidenum">
+              <a:rPr b="0" lang="en-US"/>
+              <a:t>21</a:t>
+            </a:fld>
+            <a:endParaRPr lang="en-US"/>
+          </a:p>
+        </p:txBody>
+      </p:sp>
+    </p:spTree>
+  </p:cSld>
+  <p:clrMapOvr>
+    <a:masterClrMapping/>
+  </p:clrMapOvr>
+</p:sld>
+</file>
+
+<file path=ppt/slides/slide22.xml><?xml version="1.0" encoding="utf-8"?>
+<p:sld xmlns:a="http://schemas.openxmlformats.org/drawingml/2006/main" xmlns:r="http://schemas.openxmlformats.org/officeDocument/2006/relationships" xmlns:p="http://schemas.openxmlformats.org/presentationml/2006/main">
+  <p:cSld name="Slide 22">
+    <p:spTree>
+      <p:nvGrpSpPr>
+        <p:cNvPr id="1" name=""/>
+        <p:cNvGrpSpPr/>
+        <p:nvPr/>
+      </p:nvGrpSpPr>
+      <p:grpSpPr>
+        <a:xfrm>
+          <a:off x="0" y="0"/>
+          <a:ext cx="0" cy="0"/>
+          <a:chOff x="0" y="0"/>
+          <a:chExt cx="0" cy="0"/>
+        </a:xfrm>
+      </p:grpSpPr>
+      <p:sp>
+        <p:nvSpPr>
+          <p:cNvPr id="2" name="Text 0"/>
+          <p:cNvSpPr/>
+          <p:nvPr>
+            <p:ph idx="100" type="body" hasCustomPrompt="1"/>
+          </p:nvPr>
+        </p:nvSpPr>
+        <p:spPr>
+          <a:xfrm>
+            <a:off x="548640" y="502920"/>
+            <a:ext cx="11064240" cy="274320"/>
+          </a:xfrm>
+          <a:prstGeom prst="rect">
+            <a:avLst/>
+          </a:prstGeom>
+          <a:noFill/>
+          <a:ln/>
+        </p:spPr>
+        <p:txBody>
+          <a:bodyPr wrap="square" lIns="0" tIns="0" rIns="0" bIns="0" rtlCol="0" anchor="t"/>
+          <a:lstStyle/>
+          <a:p>
+            <a:pPr indent="0" marL="0">
+              <a:buNone/>
+            </a:pPr>
+            <a:r>
+              <a:rPr lang="en-US" sz="1200" spc="300" kern="0" dirty="0">
+                <a:solidFill>
+                  <a:srgbClr val="6E6E73"/>
+                </a:solidFill>
+                <a:latin typeface="D-DIN" pitchFamily="34" charset="0"/>
+                <a:ea typeface="D-DIN" pitchFamily="34" charset="-122"/>
+                <a:cs typeface="D-DIN" pitchFamily="34" charset="-120"/>
+              </a:rPr>
+              <a:t>RISERVA  |  ALTRI VALUTATORI</a:t>
+            </a:r>
+            <a:endParaRPr lang="en-US" sz="1200" dirty="0"/>
+          </a:p>
+        </p:txBody>
+      </p:sp>
+      <p:sp>
+        <p:nvSpPr>
+          <p:cNvPr id="3" name="Text 0"/>
+          <p:cNvSpPr/>
+          <p:nvPr>
+            <p:ph idx="101" type="title" hasCustomPrompt="1"/>
+          </p:nvPr>
+        </p:nvSpPr>
+        <p:spPr>
+          <a:xfrm>
+            <a:off x="548640" y="868680"/>
+            <a:ext cx="11064240" cy="1188720"/>
+          </a:xfrm>
+          <a:prstGeom prst="rect">
+            <a:avLst/>
+          </a:prstGeom>
+          <a:noFill/>
+          <a:ln/>
+        </p:spPr>
+        <p:txBody>
+          <a:bodyPr wrap="square" lIns="0" tIns="0" rIns="0" bIns="0" rtlCol="0" anchor="t"/>
+          <a:lstStyle/>
+          <a:p>
+            <a:pPr algn="l" indent="0" marL="0">
+              <a:buNone/>
+            </a:pPr>
+            <a:r>
+              <a:rPr lang="en-US" sz="4000" b="1" spc="-60" kern="0" dirty="0">
+                <a:solidFill>
+                  <a:srgbClr val="1D1D1F"/>
+                </a:solidFill>
+                <a:latin typeface="Inter Display" pitchFamily="34" charset="0"/>
+                <a:ea typeface="Inter Display" pitchFamily="34" charset="-122"/>
+                <a:cs typeface="Inter Display" pitchFamily="34" charset="-120"/>
+              </a:rPr>
+              <a:t>Chi valuta i flussi sta sotto il prezzo</a:t>
+            </a:r>
+            <a:endParaRPr lang="en-US" sz="4000" dirty="0"/>
+          </a:p>
+        </p:txBody>
+      </p:sp>
+      <p:sp>
+        <p:nvSpPr>
+          <p:cNvPr id="4" name="Text 0"/>
+          <p:cNvSpPr/>
+          <p:nvPr>
+            <p:ph idx="102" type="body" hasCustomPrompt="1"/>
+          </p:nvPr>
+        </p:nvSpPr>
+        <p:spPr>
+          <a:xfrm>
+            <a:off x="548640" y="6400800"/>
+            <a:ext cx="10424160" cy="228600"/>
+          </a:xfrm>
+          <a:prstGeom prst="rect">
+            <a:avLst/>
+          </a:prstGeom>
+          <a:noFill/>
+          <a:ln/>
+        </p:spPr>
+        <p:txBody>
+          <a:bodyPr wrap="square" lIns="0" tIns="0" rIns="0" bIns="0" rtlCol="0" anchor="t"/>
+          <a:lstStyle/>
+          <a:p>
+            <a:pPr indent="0" marL="0">
+              <a:buNone/>
+            </a:pPr>
+            <a:r>
+              <a:rPr lang="en-US" sz="800" dirty="0">
+                <a:solidFill>
+                  <a:srgbClr val="6E6E73"/>
+                </a:solidFill>
+                <a:latin typeface="Inter" pitchFamily="34" charset="0"/>
+                <a:ea typeface="Inter" pitchFamily="34" charset="-122"/>
+                <a:cs typeface="Inter" pitchFamily="34" charset="-120"/>
+              </a:rPr>
               <a:t>Fonte: Morningstar (N. Owens), giugno 2026; Damodaran, "Revisiting the SpaceX Valuation", 4/6/2026; Morgan Stanley (A. Jonas) e RBC Capital Markets (K. Herbert), 7/7/2026 [stampa e report]; prezzi: 424B4 e Yahoo Finance</a:t>
             </a:r>
             <a:endParaRPr lang="en-US" sz="800" dirty="0"/>
@@ -12767,7 +13610,7 @@
       </p:sp>
       <p:graphicFrame>
         <p:nvGraphicFramePr>
-          <p:cNvPr id="22" name="Table 0"/>
+          <p:cNvPr id="23" name="Table 0"/>
           <p:cNvGraphicFramePr>
             <a:graphicFrameLocks noGrp="1"/>
           </p:cNvGraphicFramePr>
@@ -13893,454 +14736,6 @@
             <a:pPr algn="r"/>
             <a:fld id="{F7021451-1387-4CA6-816F-3879F97B5CBC}" type="slidenum">
               <a:rPr b="0" lang="en-US"/>
-              <a:t>21</a:t>
-            </a:fld>
-            <a:endParaRPr lang="en-US"/>
-          </a:p>
-        </p:txBody>
-      </p:sp>
-    </p:spTree>
-  </p:cSld>
-  <p:clrMapOvr>
-    <a:masterClrMapping/>
-  </p:clrMapOvr>
-</p:sld>
-</file>
-
-<file path=ppt/slides/slide22.xml><?xml version="1.0" encoding="utf-8"?>
-<p:sld xmlns:a="http://schemas.openxmlformats.org/drawingml/2006/main" xmlns:r="http://schemas.openxmlformats.org/officeDocument/2006/relationships" xmlns:p="http://schemas.openxmlformats.org/presentationml/2006/main">
-  <p:cSld name="Slide 22">
-    <p:spTree>
-      <p:nvGrpSpPr>
-        <p:cNvPr id="1" name=""/>
-        <p:cNvGrpSpPr/>
-        <p:nvPr/>
-      </p:nvGrpSpPr>
-      <p:grpSpPr>
-        <a:xfrm>
-          <a:off x="0" y="0"/>
-          <a:ext cx="0" cy="0"/>
-          <a:chOff x="0" y="0"/>
-          <a:chExt cx="0" cy="0"/>
-        </a:xfrm>
-      </p:grpSpPr>
-      <p:sp>
-        <p:nvSpPr>
-          <p:cNvPr id="2" name="Text 0"/>
-          <p:cNvSpPr/>
-          <p:nvPr>
-            <p:ph idx="100" type="body" hasCustomPrompt="1"/>
-          </p:nvPr>
-        </p:nvSpPr>
-        <p:spPr>
-          <a:xfrm>
-            <a:off x="548640" y="502920"/>
-            <a:ext cx="11064240" cy="274320"/>
-          </a:xfrm>
-          <a:prstGeom prst="rect">
-            <a:avLst/>
-          </a:prstGeom>
-          <a:noFill/>
-          <a:ln/>
-        </p:spPr>
-        <p:txBody>
-          <a:bodyPr wrap="square" lIns="0" tIns="0" rIns="0" bIns="0" rtlCol="0" anchor="t"/>
-          <a:lstStyle/>
-          <a:p>
-            <a:pPr indent="0" marL="0">
-              <a:buNone/>
-            </a:pPr>
-            <a:r>
-              <a:rPr lang="en-US" sz="1200" spc="300" kern="0" dirty="0">
-                <a:solidFill>
-                  <a:srgbClr val="6E6E73"/>
-                </a:solidFill>
-                <a:latin typeface="D-DIN" pitchFamily="34" charset="0"/>
-                <a:ea typeface="D-DIN" pitchFamily="34" charset="-122"/>
-                <a:cs typeface="D-DIN" pitchFamily="34" charset="-120"/>
-              </a:rPr>
-              <a:t>RISERVA  |  VALORE DELL'INSIEME</a:t>
-            </a:r>
-            <a:endParaRPr lang="en-US" sz="1200" dirty="0"/>
-          </a:p>
-        </p:txBody>
-      </p:sp>
-      <p:sp>
-        <p:nvSpPr>
-          <p:cNvPr id="3" name="Text 0"/>
-          <p:cNvSpPr/>
-          <p:nvPr>
-            <p:ph idx="101" type="title" hasCustomPrompt="1"/>
-          </p:nvPr>
-        </p:nvSpPr>
-        <p:spPr>
-          <a:xfrm>
-            <a:off x="548640" y="868680"/>
-            <a:ext cx="11064240" cy="1188720"/>
-          </a:xfrm>
-          <a:prstGeom prst="rect">
-            <a:avLst/>
-          </a:prstGeom>
-          <a:noFill/>
-          <a:ln/>
-        </p:spPr>
-        <p:txBody>
-          <a:bodyPr wrap="square" lIns="0" tIns="0" rIns="0" bIns="0" rtlCol="0" anchor="t"/>
-          <a:lstStyle/>
-          <a:p>
-            <a:pPr algn="l" indent="0" marL="0">
-              <a:buNone/>
-            </a:pPr>
-            <a:r>
-              <a:rPr lang="en-US" sz="4000" b="1" spc="-60" kern="0" dirty="0">
-                <a:solidFill>
-                  <a:srgbClr val="1D1D1F"/>
-                </a:solidFill>
-                <a:latin typeface="Inter Display" pitchFamily="34" charset="0"/>
-                <a:ea typeface="Inter Display" pitchFamily="34" charset="-122"/>
-                <a:cs typeface="Inter Display" pitchFamily="34" charset="-120"/>
-              </a:rPr>
-              <a:t>Tre cose che sembrano sinergie e non lo sono</a:t>
-            </a:r>
-            <a:endParaRPr lang="en-US" sz="4000" dirty="0"/>
-          </a:p>
-        </p:txBody>
-      </p:sp>
-      <p:sp>
-        <p:nvSpPr>
-          <p:cNvPr id="4" name="Text 0"/>
-          <p:cNvSpPr/>
-          <p:nvPr>
-            <p:ph idx="102" type="body" hasCustomPrompt="1"/>
-          </p:nvPr>
-        </p:nvSpPr>
-        <p:spPr>
-          <a:xfrm>
-            <a:off x="548640" y="6400800"/>
-            <a:ext cx="10424160" cy="228600"/>
-          </a:xfrm>
-          <a:prstGeom prst="rect">
-            <a:avLst/>
-          </a:prstGeom>
-          <a:noFill/>
-          <a:ln/>
-        </p:spPr>
-        <p:txBody>
-          <a:bodyPr wrap="square" lIns="0" tIns="0" rIns="0" bIns="0" rtlCol="0" anchor="t"/>
-          <a:lstStyle/>
-          <a:p>
-            <a:pPr indent="0" marL="0">
-              <a:buNone/>
-            </a:pPr>
-            <a:r>
-              <a:rPr lang="en-US" sz="800" dirty="0">
-                <a:solidFill>
-                  <a:srgbClr val="6E6E73"/>
-                </a:solidFill>
-                <a:latin typeface="Inter" pitchFamily="34" charset="0"/>
-                <a:ea typeface="Inter" pitchFamily="34" charset="-122"/>
-                <a:cs typeface="Inter" pitchFamily="34" charset="-120"/>
-              </a:rPr>
-              <a:t>Fonte: Corso, parte M&amp;A; Lewellen (1971); Higgins e Schall (1975); lanci: Space.com (2025); debito xAI: Reuters (giugno 2025)</a:t>
-            </a:r>
-            <a:endParaRPr lang="en-US" sz="800" dirty="0"/>
-          </a:p>
-        </p:txBody>
-      </p:sp>
-      <p:sp>
-        <p:nvSpPr>
-          <p:cNvPr id="6" name="Text 3"/>
-          <p:cNvSpPr/>
-          <p:nvPr/>
-        </p:nvSpPr>
-        <p:spPr>
-          <a:xfrm>
-            <a:off x="548640" y="2194560"/>
-            <a:ext cx="3566160" cy="822960"/>
-          </a:xfrm>
-          <a:prstGeom prst="rect">
-            <a:avLst/>
-          </a:prstGeom>
-          <a:noFill/>
-          <a:ln/>
-        </p:spPr>
-        <p:txBody>
-          <a:bodyPr wrap="square" lIns="0" tIns="0" rIns="0" bIns="0" rtlCol="0" anchor="t"/>
-          <a:lstStyle/>
-          <a:p>
-            <a:pPr indent="0" marL="0">
-              <a:lnSpc>
-                <a:spcPct val="105000"/>
-              </a:lnSpc>
-              <a:buNone/>
-            </a:pPr>
-            <a:r>
-              <a:rPr lang="en-US" sz="2400" b="1" spc="-40" kern="0" dirty="0">
-                <a:solidFill>
-                  <a:srgbClr val="1D1D1F"/>
-                </a:solidFill>
-                <a:latin typeface="Inter Display" pitchFamily="34" charset="0"/>
-                <a:ea typeface="Inter Display" pitchFamily="34" charset="-122"/>
-                <a:cs typeface="Inter Display" pitchFamily="34" charset="-120"/>
-              </a:rPr>
-              <a:t>Il prezzo interno dei lanci</a:t>
-            </a:r>
-            <a:endParaRPr lang="en-US" sz="2400" dirty="0"/>
-          </a:p>
-        </p:txBody>
-      </p:sp>
-      <p:sp>
-        <p:nvSpPr>
-          <p:cNvPr id="7" name="Text 4"/>
-          <p:cNvSpPr/>
-          <p:nvPr/>
-        </p:nvSpPr>
-        <p:spPr>
-          <a:xfrm>
-            <a:off x="548640" y="3154680"/>
-            <a:ext cx="3474720" cy="1828800"/>
-          </a:xfrm>
-          <a:prstGeom prst="rect">
-            <a:avLst/>
-          </a:prstGeom>
-          <a:noFill/>
-          <a:ln/>
-        </p:spPr>
-        <p:txBody>
-          <a:bodyPr wrap="square" lIns="0" tIns="0" rIns="0" bIns="0" rtlCol="0" anchor="t"/>
-          <a:lstStyle/>
-          <a:p>
-            <a:pPr indent="0" marL="0">
-              <a:lnSpc>
-                <a:spcPct val="110000"/>
-              </a:lnSpc>
-              <a:buNone/>
-            </a:pPr>
-            <a:r>
-              <a:rPr lang="en-US" sz="1600" dirty="0">
-                <a:solidFill>
-                  <a:srgbClr val="6E6E73"/>
-                </a:solidFill>
-                <a:latin typeface="Inter" pitchFamily="34" charset="0"/>
-                <a:ea typeface="Inter" pitchFamily="34" charset="-122"/>
-                <a:cs typeface="Inter" pitchFamily="34" charset="-120"/>
-              </a:rPr>
-              <a:t>Starlink paga i lanci al costo: è un trasferimento fra segmenti. La sinergia vera è la cadenza che dà a Starship.</a:t>
-            </a:r>
-            <a:endParaRPr lang="en-US" sz="1600" dirty="0"/>
-          </a:p>
-        </p:txBody>
-      </p:sp>
-      <p:sp>
-        <p:nvSpPr>
-          <p:cNvPr id="8" name="Text 5"/>
-          <p:cNvSpPr/>
-          <p:nvPr/>
-        </p:nvSpPr>
-        <p:spPr>
-          <a:xfrm>
-            <a:off x="4343400" y="2194560"/>
-            <a:ext cx="3566160" cy="822960"/>
-          </a:xfrm>
-          <a:prstGeom prst="rect">
-            <a:avLst/>
-          </a:prstGeom>
-          <a:noFill/>
-          <a:ln/>
-        </p:spPr>
-        <p:txBody>
-          <a:bodyPr wrap="square" lIns="0" tIns="0" rIns="0" bIns="0" rtlCol="0" anchor="t"/>
-          <a:lstStyle/>
-          <a:p>
-            <a:pPr indent="0" marL="0">
-              <a:lnSpc>
-                <a:spcPct val="105000"/>
-              </a:lnSpc>
-              <a:buNone/>
-            </a:pPr>
-            <a:r>
-              <a:rPr lang="en-US" sz="2400" b="1" spc="-40" kern="0" dirty="0">
-                <a:solidFill>
-                  <a:srgbClr val="1D1D1F"/>
-                </a:solidFill>
-                <a:latin typeface="Inter Display" pitchFamily="34" charset="0"/>
-                <a:ea typeface="Inter Display" pitchFamily="34" charset="-122"/>
-                <a:cs typeface="Inter Display" pitchFamily="34" charset="-120"/>
-              </a:rPr>
-              <a:t>Il tasso più basso sul debito</a:t>
-            </a:r>
-            <a:endParaRPr lang="en-US" sz="2400" dirty="0"/>
-          </a:p>
-        </p:txBody>
-      </p:sp>
-      <p:sp>
-        <p:nvSpPr>
-          <p:cNvPr id="9" name="Text 6"/>
-          <p:cNvSpPr/>
-          <p:nvPr/>
-        </p:nvSpPr>
-        <p:spPr>
-          <a:xfrm>
-            <a:off x="4343400" y="3154680"/>
-            <a:ext cx="3474720" cy="1828800"/>
-          </a:xfrm>
-          <a:prstGeom prst="rect">
-            <a:avLst/>
-          </a:prstGeom>
-          <a:noFill/>
-          <a:ln/>
-        </p:spPr>
-        <p:txBody>
-          <a:bodyPr wrap="square" lIns="0" tIns="0" rIns="0" bIns="0" rtlCol="0" anchor="t"/>
-          <a:lstStyle/>
-          <a:p>
-            <a:pPr indent="0" marL="0">
-              <a:lnSpc>
-                <a:spcPct val="110000"/>
-              </a:lnSpc>
-              <a:buNone/>
-            </a:pPr>
-            <a:r>
-              <a:rPr lang="en-US" sz="1600" dirty="0">
-                <a:solidFill>
-                  <a:srgbClr val="6E6E73"/>
-                </a:solidFill>
-                <a:latin typeface="Inter" pitchFamily="34" charset="0"/>
-                <a:ea typeface="Inter" pitchFamily="34" charset="-122"/>
-                <a:cs typeface="Inter" pitchFamily="34" charset="-120"/>
-              </a:rPr>
-              <a:t>6% contro il 12,5% di xAI: in gran parte un trasferimento ai creditori. Vale solo lo scudo fiscale sul debito in più.</a:t>
-            </a:r>
-            <a:endParaRPr lang="en-US" sz="1600" dirty="0"/>
-          </a:p>
-        </p:txBody>
-      </p:sp>
-      <p:sp>
-        <p:nvSpPr>
-          <p:cNvPr id="10" name="Text 7"/>
-          <p:cNvSpPr/>
-          <p:nvPr/>
-        </p:nvSpPr>
-        <p:spPr>
-          <a:xfrm>
-            <a:off x="8138160" y="2194560"/>
-            <a:ext cx="3566160" cy="822960"/>
-          </a:xfrm>
-          <a:prstGeom prst="rect">
-            <a:avLst/>
-          </a:prstGeom>
-          <a:noFill/>
-          <a:ln/>
-        </p:spPr>
-        <p:txBody>
-          <a:bodyPr wrap="square" lIns="0" tIns="0" rIns="0" bIns="0" rtlCol="0" anchor="t"/>
-          <a:lstStyle/>
-          <a:p>
-            <a:pPr indent="0" marL="0">
-              <a:lnSpc>
-                <a:spcPct val="105000"/>
-              </a:lnSpc>
-              <a:buNone/>
-            </a:pPr>
-            <a:r>
-              <a:rPr lang="en-US" sz="2400" b="1" spc="-40" kern="0" dirty="0">
-                <a:solidFill>
-                  <a:srgbClr val="1D1D1F"/>
-                </a:solidFill>
-                <a:latin typeface="Inter Display" pitchFamily="34" charset="0"/>
-                <a:ea typeface="Inter Display" pitchFamily="34" charset="-122"/>
-                <a:cs typeface="Inter Display" pitchFamily="34" charset="-120"/>
-              </a:rPr>
-              <a:t>La diversificazione</a:t>
-            </a:r>
-            <a:endParaRPr lang="en-US" sz="2400" dirty="0"/>
-          </a:p>
-        </p:txBody>
-      </p:sp>
-      <p:sp>
-        <p:nvSpPr>
-          <p:cNvPr id="11" name="Text 8"/>
-          <p:cNvSpPr/>
-          <p:nvPr/>
-        </p:nvSpPr>
-        <p:spPr>
-          <a:xfrm>
-            <a:off x="8138160" y="3154680"/>
-            <a:ext cx="3474720" cy="1828800"/>
-          </a:xfrm>
-          <a:prstGeom prst="rect">
-            <a:avLst/>
-          </a:prstGeom>
-          <a:noFill/>
-          <a:ln/>
-        </p:spPr>
-        <p:txBody>
-          <a:bodyPr wrap="square" lIns="0" tIns="0" rIns="0" bIns="0" rtlCol="0" anchor="t"/>
-          <a:lstStyle/>
-          <a:p>
-            <a:pPr indent="0" marL="0">
-              <a:lnSpc>
-                <a:spcPct val="110000"/>
-              </a:lnSpc>
-              <a:buNone/>
-            </a:pPr>
-            <a:r>
-              <a:rPr lang="en-US" sz="1600" dirty="0">
-                <a:solidFill>
-                  <a:srgbClr val="6E6E73"/>
-                </a:solidFill>
-                <a:latin typeface="Inter" pitchFamily="34" charset="0"/>
-                <a:ea typeface="Inter" pitchFamily="34" charset="-122"/>
-                <a:cs typeface="Inter" pitchFamily="34" charset="-120"/>
-              </a:rPr>
-              <a:t>Riduce la volatilità del gruppo, ma l'azionista diversifica da solo. Per questo i tassi non cambiano.</a:t>
-            </a:r>
-            <a:endParaRPr lang="en-US" sz="1600" dirty="0"/>
-          </a:p>
-        </p:txBody>
-      </p:sp>
-      <p:sp>
-        <p:nvSpPr>
-          <p:cNvPr id="25" name="Slide Number Placeholder 0"/>
-          <p:cNvSpPr>
-            <a:spLocks noGrp="1"/>
-          </p:cNvSpPr>
-          <p:nvPr>
-            <p:ph type="sldNum" sz="quarter" idx="4294967295"/>
-          </p:nvPr>
-        </p:nvSpPr>
-        <p:spPr>
-          <a:xfrm>
-            <a:off x="11274552" y="6400800"/>
-            <a:ext cx="365760" cy="228600"/>
-          </a:xfrm>
-          <a:prstGeom prst="rect">
-            <a:avLst/>
-          </a:prstGeom>
-          <a:extLst>
-            <a:ext uri="{C572A759-6A51-4108-AA02-DFA0A04FC94B}">
-              <ma14:wrappingTextBoxFlag xmlns:ma14="http://schemas.microsoft.com/office/mac/drawingml/2011/main" val="0"/>
-            </a:ext>
-          </a:extLst>
-        </p:spPr>
-        <p:txBody>
-          <a:bodyPr/>
-          <a:lstStyle>
-            <a:lvl1pPr>
-              <a:defRPr sz="800">
-                <a:solidFill>
-                  <a:srgbClr val="6E6E73"/>
-                </a:solidFill>
-                <a:latin typeface="Inter"/>
-                <a:ea typeface="Inter"/>
-                <a:cs typeface="Inter"/>
-              </a:defRPr>
-            </a:lvl1pPr>
-          </a:lstStyle>
-          <a:p>
-            <a:pPr algn="r"/>
-            <a:fld id="{F7021451-1387-4CA6-816F-3879F97B5CBC}" type="slidenum">
-              <a:rPr b="0" lang="en-US"/>
               <a:t>22</a:t>
             </a:fld>
             <a:endParaRPr lang="en-US"/>
@@ -14448,7 +14843,7 @@
                 <a:ea typeface="Inter Display" pitchFamily="34" charset="-122"/>
                 <a:cs typeface="Inter Display" pitchFamily="34" charset="-120"/>
               </a:rPr>
-              <a:t>Solo un gruppo integrato vale più delle sue parti</a:t>
+              <a:t>Tre cose che sembrano sinergie e non lo sono</a:t>
             </a:r>
             <a:endParaRPr lang="en-US" sz="4000" dirty="0"/>
           </a:p>
@@ -14489,85 +14884,64 @@
                 <a:ea typeface="Inter" pitchFamily="34" charset="-122"/>
                 <a:cs typeface="Inter" pitchFamily="34" charset="-120"/>
               </a:rPr>
-              <a:t>Fonte: Berger e Ofek (1995); EV ed EV/EBIT: stockanalysis.com, 9/10/2026; segmenti: bilanci 2025 depositati; holding: sconto sul NAV dalle relazioni 2026</a:t>
+              <a:t>Fonte: Corso, parte M&amp;A; Lewellen (1971); Higgins e Schall (1975); lanci: Space.com (2025); debito xAI: Reuters (giugno 2025)</a:t>
             </a:r>
             <a:endParaRPr lang="en-US" sz="800" dirty="0"/>
           </a:p>
         </p:txBody>
       </p:sp>
-      <p:pic>
-        <p:nvPicPr>
-          <p:cNvPr id="6" name="Image 0" descr="Excess value dei gruppi multi-settore e di SpaceX">    </p:cNvPr>
-          <p:cNvPicPr>
-            <a:picLocks noChangeAspect="1"/>
-          </p:cNvPicPr>
-          <p:nvPr/>
-        </p:nvPicPr>
-        <p:blipFill>
-          <a:blip r:embed="rId1"/>
-          <a:stretch>
-            <a:fillRect/>
-          </a:stretch>
-        </p:blipFill>
-        <p:spPr>
-          <a:xfrm>
-            <a:off x="411480" y="1874520"/>
-            <a:ext cx="7680960" cy="4320540"/>
-          </a:xfrm>
-          <a:prstGeom prst="rect">
-            <a:avLst/>
-          </a:prstGeom>
-        </p:spPr>
-      </p:pic>
-      <p:sp>
-        <p:nvSpPr>
-          <p:cNvPr id="7" name="Text 3"/>
-          <p:cNvSpPr/>
-          <p:nvPr/>
-        </p:nvSpPr>
-        <p:spPr>
-          <a:xfrm>
-            <a:off x="8503920" y="1920240"/>
-            <a:ext cx="3291840" cy="868680"/>
-          </a:xfrm>
-          <a:prstGeom prst="rect">
-            <a:avLst/>
-          </a:prstGeom>
-          <a:noFill/>
-          <a:ln/>
-        </p:spPr>
-        <p:txBody>
-          <a:bodyPr wrap="square" lIns="0" tIns="0" rIns="0" bIns="0" rtlCol="0" anchor="b"/>
-          <a:lstStyle/>
-          <a:p>
-            <a:pPr indent="0" marL="0">
-              <a:buNone/>
-            </a:pPr>
-            <a:r>
-              <a:rPr lang="en-US" sz="5400" b="1" spc="-60" kern="0" dirty="0">
-                <a:solidFill>
-                  <a:srgbClr val="0B1F3A"/>
+      <p:sp>
+        <p:nvSpPr>
+          <p:cNvPr id="6" name="Text 3"/>
+          <p:cNvSpPr/>
+          <p:nvPr/>
+        </p:nvSpPr>
+        <p:spPr>
+          <a:xfrm>
+            <a:off x="548640" y="2194560"/>
+            <a:ext cx="3566160" cy="822960"/>
+          </a:xfrm>
+          <a:prstGeom prst="rect">
+            <a:avLst/>
+          </a:prstGeom>
+          <a:noFill/>
+          <a:ln/>
+        </p:spPr>
+        <p:txBody>
+          <a:bodyPr wrap="square" lIns="0" tIns="0" rIns="0" bIns="0" rtlCol="0" anchor="t"/>
+          <a:lstStyle/>
+          <a:p>
+            <a:pPr indent="0" marL="0">
+              <a:lnSpc>
+                <a:spcPct val="105000"/>
+              </a:lnSpc>
+              <a:buNone/>
+            </a:pPr>
+            <a:r>
+              <a:rPr lang="en-US" sz="2400" b="1" spc="-40" kern="0" dirty="0">
+                <a:solidFill>
+                  <a:srgbClr val="1D1D1F"/>
                 </a:solidFill>
                 <a:latin typeface="Inter Display" pitchFamily="34" charset="0"/>
                 <a:ea typeface="Inter Display" pitchFamily="34" charset="-122"/>
                 <a:cs typeface="Inter Display" pitchFamily="34" charset="-120"/>
               </a:rPr>
-              <a:t>+20%</a:t>
-            </a:r>
-            <a:endParaRPr lang="en-US" sz="5400" dirty="0"/>
-          </a:p>
-        </p:txBody>
-      </p:sp>
-      <p:sp>
-        <p:nvSpPr>
-          <p:cNvPr id="8" name="Text 4"/>
-          <p:cNvSpPr/>
-          <p:nvPr/>
-        </p:nvSpPr>
-        <p:spPr>
-          <a:xfrm>
-            <a:off x="8503920" y="2834640"/>
-            <a:ext cx="3154680" cy="502920"/>
+              <a:t>Il prezzo interno dei lanci</a:t>
+            </a:r>
+            <a:endParaRPr lang="en-US" sz="2400" dirty="0"/>
+          </a:p>
+        </p:txBody>
+      </p:sp>
+      <p:sp>
+        <p:nvSpPr>
+          <p:cNvPr id="7" name="Text 4"/>
+          <p:cNvSpPr/>
+          <p:nvPr/>
+        </p:nvSpPr>
+        <p:spPr>
+          <a:xfrm>
+            <a:off x="548640" y="3154680"/>
+            <a:ext cx="3474720" cy="1828800"/>
           </a:xfrm>
           <a:prstGeom prst="rect">
             <a:avLst/>
@@ -14580,10 +14954,13 @@
           <a:lstStyle/>
           <a:p>
             <a:pPr indent="0" marL="0">
-              <a:buNone/>
-            </a:pPr>
-            <a:r>
-              <a:rPr lang="en-US" sz="1350" dirty="0">
+              <a:lnSpc>
+                <a:spcPct val="110000"/>
+              </a:lnSpc>
+              <a:buNone/>
+            </a:pPr>
+            <a:r>
+              <a:rPr lang="en-US" sz="1600" dirty="0">
                 <a:solidFill>
                   <a:srgbClr val="6E6E73"/>
                 </a:solidFill>
@@ -14591,61 +14968,64 @@
                 <a:ea typeface="Inter" pitchFamily="34" charset="-122"/>
                 <a:cs typeface="Inter" pitchFamily="34" charset="-120"/>
               </a:rPr>
-              <a:t>Amazon, l'unico premio del campione</a:t>
-            </a:r>
-            <a:endParaRPr lang="en-US" sz="1350" dirty="0"/>
-          </a:p>
-        </p:txBody>
-      </p:sp>
-      <p:sp>
-        <p:nvSpPr>
-          <p:cNvPr id="9" name="Text 5"/>
-          <p:cNvSpPr/>
-          <p:nvPr/>
-        </p:nvSpPr>
-        <p:spPr>
-          <a:xfrm>
-            <a:off x="8503920" y="3383280"/>
-            <a:ext cx="3291840" cy="868680"/>
-          </a:xfrm>
-          <a:prstGeom prst="rect">
-            <a:avLst/>
-          </a:prstGeom>
-          <a:noFill/>
-          <a:ln/>
-        </p:spPr>
-        <p:txBody>
-          <a:bodyPr wrap="square" lIns="0" tIns="0" rIns="0" bIns="0" rtlCol="0" anchor="b"/>
-          <a:lstStyle/>
-          <a:p>
-            <a:pPr indent="0" marL="0">
-              <a:buNone/>
-            </a:pPr>
-            <a:r>
-              <a:rPr lang="en-US" sz="5400" b="1" spc="-60" kern="0" dirty="0">
-                <a:solidFill>
-                  <a:srgbClr val="0071E3"/>
+              <a:t>Starlink paga i lanci al costo: è un trasferimento fra segmenti. La sinergia vera è la cadenza che dà a Starship.</a:t>
+            </a:r>
+            <a:endParaRPr lang="en-US" sz="1600" dirty="0"/>
+          </a:p>
+        </p:txBody>
+      </p:sp>
+      <p:sp>
+        <p:nvSpPr>
+          <p:cNvPr id="8" name="Text 5"/>
+          <p:cNvSpPr/>
+          <p:nvPr/>
+        </p:nvSpPr>
+        <p:spPr>
+          <a:xfrm>
+            <a:off x="4343400" y="2194560"/>
+            <a:ext cx="3566160" cy="822960"/>
+          </a:xfrm>
+          <a:prstGeom prst="rect">
+            <a:avLst/>
+          </a:prstGeom>
+          <a:noFill/>
+          <a:ln/>
+        </p:spPr>
+        <p:txBody>
+          <a:bodyPr wrap="square" lIns="0" tIns="0" rIns="0" bIns="0" rtlCol="0" anchor="t"/>
+          <a:lstStyle/>
+          <a:p>
+            <a:pPr indent="0" marL="0">
+              <a:lnSpc>
+                <a:spcPct val="105000"/>
+              </a:lnSpc>
+              <a:buNone/>
+            </a:pPr>
+            <a:r>
+              <a:rPr lang="en-US" sz="2400" b="1" spc="-40" kern="0" dirty="0">
+                <a:solidFill>
+                  <a:srgbClr val="1D1D1F"/>
                 </a:solidFill>
                 <a:latin typeface="Inter Display" pitchFamily="34" charset="0"/>
                 <a:ea typeface="Inter Display" pitchFamily="34" charset="-122"/>
                 <a:cs typeface="Inter Display" pitchFamily="34" charset="-120"/>
               </a:rPr>
-              <a:t>+7%</a:t>
-            </a:r>
-            <a:endParaRPr lang="en-US" sz="5400" dirty="0"/>
-          </a:p>
-        </p:txBody>
-      </p:sp>
-      <p:sp>
-        <p:nvSpPr>
-          <p:cNvPr id="10" name="Text 6"/>
-          <p:cNvSpPr/>
-          <p:nvPr/>
-        </p:nvSpPr>
-        <p:spPr>
-          <a:xfrm>
-            <a:off x="8503920" y="4297680"/>
-            <a:ext cx="3154680" cy="502920"/>
+              <a:t>Il tasso più basso sul debito</a:t>
+            </a:r>
+            <a:endParaRPr lang="en-US" sz="2400" dirty="0"/>
+          </a:p>
+        </p:txBody>
+      </p:sp>
+      <p:sp>
+        <p:nvSpPr>
+          <p:cNvPr id="9" name="Text 6"/>
+          <p:cNvSpPr/>
+          <p:nvPr/>
+        </p:nvSpPr>
+        <p:spPr>
+          <a:xfrm>
+            <a:off x="4343400" y="3154680"/>
+            <a:ext cx="3474720" cy="1828800"/>
           </a:xfrm>
           <a:prstGeom prst="rect">
             <a:avLst/>
@@ -14658,10 +15038,13 @@
           <a:lstStyle/>
           <a:p>
             <a:pPr indent="0" marL="0">
-              <a:buNone/>
-            </a:pPr>
-            <a:r>
-              <a:rPr lang="en-US" sz="1350" dirty="0">
+              <a:lnSpc>
+                <a:spcPct val="110000"/>
+              </a:lnSpc>
+              <a:buNone/>
+            </a:pPr>
+            <a:r>
+              <a:rPr lang="en-US" sz="1600" dirty="0">
                 <a:solidFill>
                   <a:srgbClr val="6E6E73"/>
                 </a:solidFill>
@@ -14669,61 +15052,64 @@
                 <a:ea typeface="Inter" pitchFamily="34" charset="-122"/>
                 <a:cs typeface="Inter" pitchFamily="34" charset="-120"/>
               </a:rPr>
-              <a:t>SpaceX, il gruppo sulle parti</a:t>
-            </a:r>
-            <a:endParaRPr lang="en-US" sz="1350" dirty="0"/>
-          </a:p>
-        </p:txBody>
-      </p:sp>
-      <p:sp>
-        <p:nvSpPr>
-          <p:cNvPr id="11" name="Text 7"/>
-          <p:cNvSpPr/>
-          <p:nvPr/>
-        </p:nvSpPr>
-        <p:spPr>
-          <a:xfrm>
-            <a:off x="8503920" y="4846320"/>
-            <a:ext cx="3291840" cy="868680"/>
-          </a:xfrm>
-          <a:prstGeom prst="rect">
-            <a:avLst/>
-          </a:prstGeom>
-          <a:noFill/>
-          <a:ln/>
-        </p:spPr>
-        <p:txBody>
-          <a:bodyPr wrap="square" lIns="0" tIns="0" rIns="0" bIns="0" rtlCol="0" anchor="b"/>
-          <a:lstStyle/>
-          <a:p>
-            <a:pPr indent="0" marL="0">
-              <a:buNone/>
-            </a:pPr>
-            <a:r>
-              <a:rPr lang="en-US" sz="5400" b="1" spc="-60" kern="0" dirty="0">
-                <a:solidFill>
-                  <a:srgbClr val="B86E00"/>
+              <a:t>6% contro il 12,5% di xAI: in gran parte un trasferimento ai creditori. Vale solo lo scudo fiscale sul debito in più.</a:t>
+            </a:r>
+            <a:endParaRPr lang="en-US" sz="1600" dirty="0"/>
+          </a:p>
+        </p:txBody>
+      </p:sp>
+      <p:sp>
+        <p:nvSpPr>
+          <p:cNvPr id="10" name="Text 7"/>
+          <p:cNvSpPr/>
+          <p:nvPr/>
+        </p:nvSpPr>
+        <p:spPr>
+          <a:xfrm>
+            <a:off x="8138160" y="2194560"/>
+            <a:ext cx="3566160" cy="822960"/>
+          </a:xfrm>
+          <a:prstGeom prst="rect">
+            <a:avLst/>
+          </a:prstGeom>
+          <a:noFill/>
+          <a:ln/>
+        </p:spPr>
+        <p:txBody>
+          <a:bodyPr wrap="square" lIns="0" tIns="0" rIns="0" bIns="0" rtlCol="0" anchor="t"/>
+          <a:lstStyle/>
+          <a:p>
+            <a:pPr indent="0" marL="0">
+              <a:lnSpc>
+                <a:spcPct val="105000"/>
+              </a:lnSpc>
+              <a:buNone/>
+            </a:pPr>
+            <a:r>
+              <a:rPr lang="en-US" sz="2400" b="1" spc="-40" kern="0" dirty="0">
+                <a:solidFill>
+                  <a:srgbClr val="1D1D1F"/>
                 </a:solidFill>
                 <a:latin typeface="Inter Display" pitchFamily="34" charset="0"/>
                 <a:ea typeface="Inter Display" pitchFamily="34" charset="-122"/>
                 <a:cs typeface="Inter Display" pitchFamily="34" charset="-120"/>
               </a:rPr>
-              <a:t>+117%</a:t>
-            </a:r>
-            <a:endParaRPr lang="en-US" sz="5400" dirty="0"/>
-          </a:p>
-        </p:txBody>
-      </p:sp>
-      <p:sp>
-        <p:nvSpPr>
-          <p:cNvPr id="12" name="Text 8"/>
-          <p:cNvSpPr/>
-          <p:nvPr/>
-        </p:nvSpPr>
-        <p:spPr>
-          <a:xfrm>
-            <a:off x="8503920" y="5760720"/>
-            <a:ext cx="3154680" cy="502920"/>
+              <a:t>La diversificazione</a:t>
+            </a:r>
+            <a:endParaRPr lang="en-US" sz="2400" dirty="0"/>
+          </a:p>
+        </p:txBody>
+      </p:sp>
+      <p:sp>
+        <p:nvSpPr>
+          <p:cNvPr id="11" name="Text 8"/>
+          <p:cNvSpPr/>
+          <p:nvPr/>
+        </p:nvSpPr>
+        <p:spPr>
+          <a:xfrm>
+            <a:off x="8138160" y="3154680"/>
+            <a:ext cx="3474720" cy="1828800"/>
           </a:xfrm>
           <a:prstGeom prst="rect">
             <a:avLst/>
@@ -14736,10 +15122,13 @@
           <a:lstStyle/>
           <a:p>
             <a:pPr indent="0" marL="0">
-              <a:buNone/>
-            </a:pPr>
-            <a:r>
-              <a:rPr lang="en-US" sz="1350" dirty="0">
+              <a:lnSpc>
+                <a:spcPct val="110000"/>
+              </a:lnSpc>
+              <a:buNone/>
+            </a:pPr>
+            <a:r>
+              <a:rPr lang="en-US" sz="1600" dirty="0">
                 <a:solidFill>
                   <a:srgbClr val="6E6E73"/>
                 </a:solidFill>
@@ -14747,9 +15136,9 @@
                 <a:ea typeface="Inter" pitchFamily="34" charset="-122"/>
                 <a:cs typeface="Inter" pitchFamily="34" charset="-120"/>
               </a:rPr>
-              <a:t>quello che chiederebbe il prezzo</a:t>
-            </a:r>
-            <a:endParaRPr lang="en-US" sz="1350" dirty="0"/>
+              <a:t>Riduce la volatilità del gruppo, ma l'azionista diversifica da solo. Per questo i tassi non cambiano.</a:t>
+            </a:r>
+            <a:endParaRPr lang="en-US" sz="1600" dirty="0"/>
           </a:p>
         </p:txBody>
       </p:sp>
@@ -14861,7 +15250,7 @@
                 <a:ea typeface="D-DIN" pitchFamily="34" charset="-122"/>
                 <a:cs typeface="D-DIN" pitchFamily="34" charset="-120"/>
               </a:rPr>
-              <a:t>RISERVA  |  M&amp;A</a:t>
+              <a:t>RISERVA  |  VALORE DELL'INSIEME</a:t>
             </a:r>
             <a:endParaRPr lang="en-US" sz="1200" dirty="0"/>
           </a:p>
@@ -14902,7 +15291,7 @@
                 <a:ea typeface="Inter Display" pitchFamily="34" charset="-122"/>
                 <a:cs typeface="Inter Display" pitchFamily="34" charset="-120"/>
               </a:rPr>
-              <a:t>La fusione con xAI ha premiato i soci SpaceX</a:t>
+              <a:t>Solo un gruppo integrato vale più delle sue parti</a:t>
             </a:r>
             <a:endParaRPr lang="en-US" sz="4000" dirty="0"/>
           </a:p>
@@ -14943,7 +15332,7 @@
                 <a:ea typeface="Inter" pitchFamily="34" charset="-122"/>
                 <a:cs typeface="Inter" pitchFamily="34" charset="-120"/>
               </a:rPr>
-              <a:t>Fonte: Modello dell'autore; termini della fusione (1.000 e 250 mld, 20% a xAI): Bloomberg via Yahoo Finance e Taipei Times, febbraio 2026 [stampa, non depositati]</a:t>
+              <a:t>Fonte: Berger e Ofek (1995); EV ed EV/EBIT: stockanalysis.com, 9/10/2026; segmenti: bilanci 2025 depositati; holding: sconto sul NAV dalle relazioni 2026</a:t>
             </a:r>
             <a:endParaRPr lang="en-US" sz="800" dirty="0"/>
           </a:p>
@@ -14951,7 +15340,7 @@
       </p:sp>
       <p:pic>
         <p:nvPicPr>
-          <p:cNvPr id="6" name="Image 0" descr="Divisione delle sinergie della fusione fra soci SpaceX e xAI">    </p:cNvPr>
+          <p:cNvPr id="6" name="Image 0" descr="Excess value dei gruppi multi-settore e di SpaceX">    </p:cNvPr>
           <p:cNvPicPr>
             <a:picLocks noChangeAspect="1"/>
           </p:cNvPicPr>
@@ -15006,7 +15395,7 @@
                 <a:ea typeface="Inter Display" pitchFamily="34" charset="-122"/>
                 <a:cs typeface="Inter Display" pitchFamily="34" charset="-120"/>
               </a:rPr>
-              <a:t>20%</a:t>
+              <a:t>+20%</a:t>
             </a:r>
             <a:endParaRPr lang="en-US" sz="5400" dirty="0"/>
           </a:p>
@@ -15045,7 +15434,7 @@
                 <a:ea typeface="Inter" pitchFamily="34" charset="-122"/>
                 <a:cs typeface="Inter" pitchFamily="34" charset="-120"/>
               </a:rPr>
-              <a:t>del gruppo ceduto agli azionisti di xAI</a:t>
+              <a:t>Amazon, l'unico premio del campione</a:t>
             </a:r>
             <a:endParaRPr lang="en-US" sz="1350" dirty="0"/>
           </a:p>
@@ -15078,13 +15467,13 @@
             <a:r>
               <a:rPr lang="en-US" sz="5400" b="1" spc="-60" kern="0" dirty="0">
                 <a:solidFill>
-                  <a:srgbClr val="0B1F3A"/>
+                  <a:srgbClr val="0071E3"/>
                 </a:solidFill>
                 <a:latin typeface="Inter Display" pitchFamily="34" charset="0"/>
                 <a:ea typeface="Inter Display" pitchFamily="34" charset="-122"/>
                 <a:cs typeface="Inter Display" pitchFamily="34" charset="-120"/>
               </a:rPr>
-              <a:t>26,3%</a:t>
+              <a:t>+7%</a:t>
             </a:r>
             <a:endParaRPr lang="en-US" sz="5400" dirty="0"/>
           </a:p>
@@ -15123,7 +15512,7 @@
                 <a:ea typeface="Inter" pitchFamily="34" charset="-122"/>
                 <a:cs typeface="Inter" pitchFamily="34" charset="-120"/>
               </a:rPr>
-              <a:t>la quota massima che SpaceX poteva cedere</a:t>
+              <a:t>SpaceX, il gruppo sulle parti</a:t>
             </a:r>
             <a:endParaRPr lang="en-US" sz="1350" dirty="0"/>
           </a:p>
@@ -15156,13 +15545,13 @@
             <a:r>
               <a:rPr lang="en-US" sz="5400" b="1" spc="-60" kern="0" dirty="0">
                 <a:solidFill>
-                  <a:srgbClr val="0071E3"/>
+                  <a:srgbClr val="B86E00"/>
                 </a:solidFill>
                 <a:latin typeface="Inter Display" pitchFamily="34" charset="0"/>
                 <a:ea typeface="Inter Display" pitchFamily="34" charset="-122"/>
                 <a:cs typeface="Inter Display" pitchFamily="34" charset="-120"/>
               </a:rPr>
-              <a:t>+47</a:t>
+              <a:t>+117%</a:t>
             </a:r>
             <a:endParaRPr lang="en-US" sz="5400" dirty="0"/>
           </a:p>
@@ -15201,7 +15590,7 @@
                 <a:ea typeface="Inter" pitchFamily="34" charset="-122"/>
                 <a:cs typeface="Inter" pitchFamily="34" charset="-120"/>
               </a:rPr>
-              <a:t>mld di guadagno per i soci SpaceX</a:t>
+              <a:t>quello che chiederebbe il prezzo</a:t>
             </a:r>
             <a:endParaRPr lang="en-US" sz="1350" dirty="0"/>
           </a:p>
@@ -15315,7 +15704,7 @@
                 <a:ea typeface="D-DIN" pitchFamily="34" charset="-122"/>
                 <a:cs typeface="D-DIN" pitchFamily="34" charset="-120"/>
               </a:rPr>
-              <a:t>RISERVA  |  IL MODELLO</a:t>
+              <a:t>RISERVA  |  M&amp;A</a:t>
             </a:r>
             <a:endParaRPr lang="en-US" sz="1200" dirty="0"/>
           </a:p>
@@ -15356,7 +15745,7 @@
                 <a:ea typeface="Inter Display" pitchFamily="34" charset="-122"/>
                 <a:cs typeface="Inter Display" pitchFamily="34" charset="-120"/>
               </a:rPr>
-              <a:t>Tutto in un file Excel, in formule</a:t>
+              <a:t>La fusione con xAI ha premiato i soci SpaceX</a:t>
             </a:r>
             <a:endParaRPr lang="en-US" sz="4000" dirty="0"/>
           </a:p>
@@ -15397,100 +15786,85 @@
                 <a:ea typeface="Inter" pitchFamily="34" charset="-122"/>
                 <a:cs typeface="Inter" pitchFamily="34" charset="-120"/>
               </a:rPr>
-              <a:t>Fonte: SpaceX_modello.xlsx: input con la loro fonte, formule, controllo incrociato con il modello in Python</a:t>
+              <a:t>Fonte: Modello dell'autore; termini della fusione (1.000 e 250 mld, 20% a xAI): Bloomberg via Yahoo Finance e Taipei Times, febbraio 2026 [stampa, non depositati]</a:t>
             </a:r>
             <a:endParaRPr lang="en-US" sz="800" dirty="0"/>
           </a:p>
         </p:txBody>
       </p:sp>
-      <p:sp>
-        <p:nvSpPr>
-          <p:cNvPr id="6" name="Text 3"/>
-          <p:cNvSpPr/>
-          <p:nvPr/>
-        </p:nvSpPr>
-        <p:spPr>
-          <a:xfrm>
-            <a:off x="548640" y="2011680"/>
-            <a:ext cx="548640" cy="457200"/>
-          </a:xfrm>
-          <a:prstGeom prst="rect">
-            <a:avLst/>
-          </a:prstGeom>
-          <a:noFill/>
-          <a:ln/>
-        </p:spPr>
-        <p:txBody>
-          <a:bodyPr wrap="square" lIns="0" tIns="0" rIns="0" bIns="0" rtlCol="0" anchor="t"/>
-          <a:lstStyle/>
-          <a:p>
-            <a:pPr indent="0" marL="0">
-              <a:buNone/>
-            </a:pPr>
-            <a:r>
-              <a:rPr lang="en-US" sz="1400" dirty="0">
-                <a:solidFill>
-                  <a:srgbClr val="6E6E73"/>
-                </a:solidFill>
-                <a:latin typeface="D-DIN" pitchFamily="34" charset="0"/>
-                <a:ea typeface="D-DIN" pitchFamily="34" charset="-122"/>
-                <a:cs typeface="D-DIN" pitchFamily="34" charset="-120"/>
-              </a:rPr>
-              <a:t>01</a:t>
-            </a:r>
-            <a:endParaRPr lang="en-US" sz="1400" dirty="0"/>
-          </a:p>
-        </p:txBody>
-      </p:sp>
-      <p:sp>
-        <p:nvSpPr>
-          <p:cNvPr id="7" name="Text 4"/>
-          <p:cNvSpPr/>
-          <p:nvPr/>
-        </p:nvSpPr>
-        <p:spPr>
-          <a:xfrm>
-            <a:off x="1097280" y="1965960"/>
-            <a:ext cx="2194560" cy="502920"/>
-          </a:xfrm>
-          <a:prstGeom prst="rect">
-            <a:avLst/>
-          </a:prstGeom>
-          <a:noFill/>
-          <a:ln/>
-        </p:spPr>
-        <p:txBody>
-          <a:bodyPr wrap="square" lIns="0" tIns="0" rIns="0" bIns="0" rtlCol="0" anchor="t"/>
-          <a:lstStyle/>
-          <a:p>
-            <a:pPr indent="0" marL="0">
-              <a:buNone/>
-            </a:pPr>
-            <a:r>
-              <a:rPr lang="en-US" sz="2200" b="1" spc="-60" kern="0" dirty="0">
-                <a:solidFill>
-                  <a:srgbClr val="0071E3"/>
+      <p:pic>
+        <p:nvPicPr>
+          <p:cNvPr id="6" name="Image 0" descr="Divisione delle sinergie della fusione fra soci SpaceX e xAI">    </p:cNvPr>
+          <p:cNvPicPr>
+            <a:picLocks noChangeAspect="1"/>
+          </p:cNvPicPr>
+          <p:nvPr/>
+        </p:nvPicPr>
+        <p:blipFill>
+          <a:blip r:embed="rId1"/>
+          <a:stretch>
+            <a:fillRect/>
+          </a:stretch>
+        </p:blipFill>
+        <p:spPr>
+          <a:xfrm>
+            <a:off x="411480" y="1874520"/>
+            <a:ext cx="7680960" cy="4320540"/>
+          </a:xfrm>
+          <a:prstGeom prst="rect">
+            <a:avLst/>
+          </a:prstGeom>
+        </p:spPr>
+      </p:pic>
+      <p:sp>
+        <p:nvSpPr>
+          <p:cNvPr id="7" name="Text 3"/>
+          <p:cNvSpPr/>
+          <p:nvPr/>
+        </p:nvSpPr>
+        <p:spPr>
+          <a:xfrm>
+            <a:off x="8503920" y="1920240"/>
+            <a:ext cx="3291840" cy="868680"/>
+          </a:xfrm>
+          <a:prstGeom prst="rect">
+            <a:avLst/>
+          </a:prstGeom>
+          <a:noFill/>
+          <a:ln/>
+        </p:spPr>
+        <p:txBody>
+          <a:bodyPr wrap="square" lIns="0" tIns="0" rIns="0" bIns="0" rtlCol="0" anchor="b"/>
+          <a:lstStyle/>
+          <a:p>
+            <a:pPr indent="0" marL="0">
+              <a:buNone/>
+            </a:pPr>
+            <a:r>
+              <a:rPr lang="en-US" sz="5400" b="1" spc="-60" kern="0" dirty="0">
+                <a:solidFill>
+                  <a:srgbClr val="0B1F3A"/>
                 </a:solidFill>
                 <a:latin typeface="Inter Display" pitchFamily="34" charset="0"/>
                 <a:ea typeface="Inter Display" pitchFamily="34" charset="-122"/>
                 <a:cs typeface="Inter Display" pitchFamily="34" charset="-120"/>
               </a:rPr>
-              <a:t>Prezzo</a:t>
-            </a:r>
-            <a:endParaRPr lang="en-US" sz="2200" dirty="0"/>
-          </a:p>
-        </p:txBody>
-      </p:sp>
-      <p:sp>
-        <p:nvSpPr>
-          <p:cNvPr id="8" name="Text 5"/>
-          <p:cNvSpPr/>
-          <p:nvPr/>
-        </p:nvSpPr>
-        <p:spPr>
-          <a:xfrm>
-            <a:off x="3337560" y="2011680"/>
-            <a:ext cx="548640" cy="457200"/>
+              <a:t>20%</a:t>
+            </a:r>
+            <a:endParaRPr lang="en-US" sz="5400" dirty="0"/>
+          </a:p>
+        </p:txBody>
+      </p:sp>
+      <p:sp>
+        <p:nvSpPr>
+          <p:cNvPr id="8" name="Text 4"/>
+          <p:cNvSpPr/>
+          <p:nvPr/>
+        </p:nvSpPr>
+        <p:spPr>
+          <a:xfrm>
+            <a:off x="8503920" y="2834640"/>
+            <a:ext cx="3154680" cy="502920"/>
           </a:xfrm>
           <a:prstGeom prst="rect">
             <a:avLst/>
@@ -15506,69 +15880,69 @@
               <a:buNone/>
             </a:pPr>
             <a:r>
-              <a:rPr lang="en-US" sz="1400" dirty="0">
+              <a:rPr lang="en-US" sz="1350" dirty="0">
                 <a:solidFill>
                   <a:srgbClr val="6E6E73"/>
                 </a:solidFill>
-                <a:latin typeface="D-DIN" pitchFamily="34" charset="0"/>
-                <a:ea typeface="D-DIN" pitchFamily="34" charset="-122"/>
-                <a:cs typeface="D-DIN" pitchFamily="34" charset="-120"/>
-              </a:rPr>
-              <a:t>02</a:t>
-            </a:r>
-            <a:endParaRPr lang="en-US" sz="1400" dirty="0"/>
-          </a:p>
-        </p:txBody>
-      </p:sp>
-      <p:sp>
-        <p:nvSpPr>
-          <p:cNvPr id="9" name="Text 6"/>
-          <p:cNvSpPr/>
-          <p:nvPr/>
-        </p:nvSpPr>
-        <p:spPr>
-          <a:xfrm>
-            <a:off x="3886200" y="1965960"/>
-            <a:ext cx="2194560" cy="502920"/>
-          </a:xfrm>
-          <a:prstGeom prst="rect">
-            <a:avLst/>
-          </a:prstGeom>
-          <a:noFill/>
-          <a:ln/>
-        </p:spPr>
-        <p:txBody>
-          <a:bodyPr wrap="square" lIns="0" tIns="0" rIns="0" bIns="0" rtlCol="0" anchor="t"/>
-          <a:lstStyle/>
-          <a:p>
-            <a:pPr indent="0" marL="0">
-              <a:buNone/>
-            </a:pPr>
-            <a:r>
-              <a:rPr lang="en-US" sz="2200" b="1" spc="-60" kern="0" dirty="0">
-                <a:solidFill>
-                  <a:srgbClr val="1D1D1F"/>
+                <a:latin typeface="Inter" pitchFamily="34" charset="0"/>
+                <a:ea typeface="Inter" pitchFamily="34" charset="-122"/>
+                <a:cs typeface="Inter" pitchFamily="34" charset="-120"/>
+              </a:rPr>
+              <a:t>del gruppo ceduto agli azionisti di xAI</a:t>
+            </a:r>
+            <a:endParaRPr lang="en-US" sz="1350" dirty="0"/>
+          </a:p>
+        </p:txBody>
+      </p:sp>
+      <p:sp>
+        <p:nvSpPr>
+          <p:cNvPr id="9" name="Text 5"/>
+          <p:cNvSpPr/>
+          <p:nvPr/>
+        </p:nvSpPr>
+        <p:spPr>
+          <a:xfrm>
+            <a:off x="8503920" y="3383280"/>
+            <a:ext cx="3291840" cy="868680"/>
+          </a:xfrm>
+          <a:prstGeom prst="rect">
+            <a:avLst/>
+          </a:prstGeom>
+          <a:noFill/>
+          <a:ln/>
+        </p:spPr>
+        <p:txBody>
+          <a:bodyPr wrap="square" lIns="0" tIns="0" rIns="0" bIns="0" rtlCol="0" anchor="b"/>
+          <a:lstStyle/>
+          <a:p>
+            <a:pPr indent="0" marL="0">
+              <a:buNone/>
+            </a:pPr>
+            <a:r>
+              <a:rPr lang="en-US" sz="5400" b="1" spc="-60" kern="0" dirty="0">
+                <a:solidFill>
+                  <a:srgbClr val="0B1F3A"/>
                 </a:solidFill>
                 <a:latin typeface="Inter Display" pitchFamily="34" charset="0"/>
                 <a:ea typeface="Inter Display" pitchFamily="34" charset="-122"/>
                 <a:cs typeface="Inter Display" pitchFamily="34" charset="-120"/>
               </a:rPr>
-              <a:t>Input</a:t>
-            </a:r>
-            <a:endParaRPr lang="en-US" sz="2200" dirty="0"/>
-          </a:p>
-        </p:txBody>
-      </p:sp>
-      <p:sp>
-        <p:nvSpPr>
-          <p:cNvPr id="10" name="Text 7"/>
-          <p:cNvSpPr/>
-          <p:nvPr/>
-        </p:nvSpPr>
-        <p:spPr>
-          <a:xfrm>
-            <a:off x="6126480" y="2011680"/>
-            <a:ext cx="548640" cy="457200"/>
+              <a:t>26,3%</a:t>
+            </a:r>
+            <a:endParaRPr lang="en-US" sz="5400" dirty="0"/>
+          </a:p>
+        </p:txBody>
+      </p:sp>
+      <p:sp>
+        <p:nvSpPr>
+          <p:cNvPr id="10" name="Text 6"/>
+          <p:cNvSpPr/>
+          <p:nvPr/>
+        </p:nvSpPr>
+        <p:spPr>
+          <a:xfrm>
+            <a:off x="8503920" y="4297680"/>
+            <a:ext cx="3154680" cy="502920"/>
           </a:xfrm>
           <a:prstGeom prst="rect">
             <a:avLst/>
@@ -15584,69 +15958,69 @@
               <a:buNone/>
             </a:pPr>
             <a:r>
-              <a:rPr lang="en-US" sz="1400" dirty="0">
+              <a:rPr lang="en-US" sz="1350" dirty="0">
                 <a:solidFill>
                   <a:srgbClr val="6E6E73"/>
                 </a:solidFill>
-                <a:latin typeface="D-DIN" pitchFamily="34" charset="0"/>
-                <a:ea typeface="D-DIN" pitchFamily="34" charset="-122"/>
-                <a:cs typeface="D-DIN" pitchFamily="34" charset="-120"/>
-              </a:rPr>
-              <a:t>03</a:t>
-            </a:r>
-            <a:endParaRPr lang="en-US" sz="1400" dirty="0"/>
-          </a:p>
-        </p:txBody>
-      </p:sp>
-      <p:sp>
-        <p:nvSpPr>
-          <p:cNvPr id="11" name="Text 8"/>
-          <p:cNvSpPr/>
-          <p:nvPr/>
-        </p:nvSpPr>
-        <p:spPr>
-          <a:xfrm>
-            <a:off x="6675120" y="1965960"/>
-            <a:ext cx="2194560" cy="502920"/>
-          </a:xfrm>
-          <a:prstGeom prst="rect">
-            <a:avLst/>
-          </a:prstGeom>
-          <a:noFill/>
-          <a:ln/>
-        </p:spPr>
-        <p:txBody>
-          <a:bodyPr wrap="square" lIns="0" tIns="0" rIns="0" bIns="0" rtlCol="0" anchor="t"/>
-          <a:lstStyle/>
-          <a:p>
-            <a:pPr indent="0" marL="0">
-              <a:buNone/>
-            </a:pPr>
-            <a:r>
-              <a:rPr lang="en-US" sz="2200" b="1" spc="-60" kern="0" dirty="0">
-                <a:solidFill>
-                  <a:srgbClr val="1D1D1F"/>
+                <a:latin typeface="Inter" pitchFamily="34" charset="0"/>
+                <a:ea typeface="Inter" pitchFamily="34" charset="-122"/>
+                <a:cs typeface="Inter" pitchFamily="34" charset="-120"/>
+              </a:rPr>
+              <a:t>la quota massima che SpaceX poteva cedere</a:t>
+            </a:r>
+            <a:endParaRPr lang="en-US" sz="1350" dirty="0"/>
+          </a:p>
+        </p:txBody>
+      </p:sp>
+      <p:sp>
+        <p:nvSpPr>
+          <p:cNvPr id="11" name="Text 7"/>
+          <p:cNvSpPr/>
+          <p:nvPr/>
+        </p:nvSpPr>
+        <p:spPr>
+          <a:xfrm>
+            <a:off x="8503920" y="4846320"/>
+            <a:ext cx="3291840" cy="868680"/>
+          </a:xfrm>
+          <a:prstGeom prst="rect">
+            <a:avLst/>
+          </a:prstGeom>
+          <a:noFill/>
+          <a:ln/>
+        </p:spPr>
+        <p:txBody>
+          <a:bodyPr wrap="square" lIns="0" tIns="0" rIns="0" bIns="0" rtlCol="0" anchor="b"/>
+          <a:lstStyle/>
+          <a:p>
+            <a:pPr indent="0" marL="0">
+              <a:buNone/>
+            </a:pPr>
+            <a:r>
+              <a:rPr lang="en-US" sz="5400" b="1" spc="-60" kern="0" dirty="0">
+                <a:solidFill>
+                  <a:srgbClr val="0071E3"/>
                 </a:solidFill>
                 <a:latin typeface="Inter Display" pitchFamily="34" charset="0"/>
                 <a:ea typeface="Inter Display" pitchFamily="34" charset="-122"/>
                 <a:cs typeface="Inter Display" pitchFamily="34" charset="-120"/>
               </a:rPr>
-              <a:t>Tassi</a:t>
-            </a:r>
-            <a:endParaRPr lang="en-US" sz="2200" dirty="0"/>
-          </a:p>
-        </p:txBody>
-      </p:sp>
-      <p:sp>
-        <p:nvSpPr>
-          <p:cNvPr id="12" name="Text 9"/>
-          <p:cNvSpPr/>
-          <p:nvPr/>
-        </p:nvSpPr>
-        <p:spPr>
-          <a:xfrm>
-            <a:off x="8915400" y="2011680"/>
-            <a:ext cx="548640" cy="457200"/>
+              <a:t>+47</a:t>
+            </a:r>
+            <a:endParaRPr lang="en-US" sz="5400" dirty="0"/>
+          </a:p>
+        </p:txBody>
+      </p:sp>
+      <p:sp>
+        <p:nvSpPr>
+          <p:cNvPr id="12" name="Text 8"/>
+          <p:cNvSpPr/>
+          <p:nvPr/>
+        </p:nvSpPr>
+        <p:spPr>
+          <a:xfrm>
+            <a:off x="8503920" y="5760720"/>
+            <a:ext cx="3154680" cy="502920"/>
           </a:xfrm>
           <a:prstGeom prst="rect">
             <a:avLst/>
@@ -15662,748 +16036,7 @@
               <a:buNone/>
             </a:pPr>
             <a:r>
-              <a:rPr lang="en-US" sz="1400" dirty="0">
-                <a:solidFill>
-                  <a:srgbClr val="6E6E73"/>
-                </a:solidFill>
-                <a:latin typeface="D-DIN" pitchFamily="34" charset="0"/>
-                <a:ea typeface="D-DIN" pitchFamily="34" charset="-122"/>
-                <a:cs typeface="D-DIN" pitchFamily="34" charset="-120"/>
-              </a:rPr>
-              <a:t>04</a:t>
-            </a:r>
-            <a:endParaRPr lang="en-US" sz="1400" dirty="0"/>
-          </a:p>
-        </p:txBody>
-      </p:sp>
-      <p:sp>
-        <p:nvSpPr>
-          <p:cNvPr id="13" name="Text 10"/>
-          <p:cNvSpPr/>
-          <p:nvPr/>
-        </p:nvSpPr>
-        <p:spPr>
-          <a:xfrm>
-            <a:off x="9464040" y="1965960"/>
-            <a:ext cx="2194560" cy="502920"/>
-          </a:xfrm>
-          <a:prstGeom prst="rect">
-            <a:avLst/>
-          </a:prstGeom>
-          <a:noFill/>
-          <a:ln/>
-        </p:spPr>
-        <p:txBody>
-          <a:bodyPr wrap="square" lIns="0" tIns="0" rIns="0" bIns="0" rtlCol="0" anchor="t"/>
-          <a:lstStyle/>
-          <a:p>
-            <a:pPr indent="0" marL="0">
-              <a:buNone/>
-            </a:pPr>
-            <a:r>
-              <a:rPr lang="en-US" sz="2200" b="1" spc="-60" kern="0" dirty="0">
-                <a:solidFill>
-                  <a:srgbClr val="1D1D1F"/>
-                </a:solidFill>
-                <a:latin typeface="Inter Display" pitchFamily="34" charset="0"/>
-                <a:ea typeface="Inter Display" pitchFamily="34" charset="-122"/>
-                <a:cs typeface="Inter Display" pitchFamily="34" charset="-120"/>
-              </a:rPr>
-              <a:t>Probabilità</a:t>
-            </a:r>
-            <a:endParaRPr lang="en-US" sz="2200" dirty="0"/>
-          </a:p>
-        </p:txBody>
-      </p:sp>
-      <p:sp>
-        <p:nvSpPr>
-          <p:cNvPr id="14" name="Text 11"/>
-          <p:cNvSpPr/>
-          <p:nvPr/>
-        </p:nvSpPr>
-        <p:spPr>
-          <a:xfrm>
-            <a:off x="548640" y="2880360"/>
-            <a:ext cx="548640" cy="457200"/>
-          </a:xfrm>
-          <a:prstGeom prst="rect">
-            <a:avLst/>
-          </a:prstGeom>
-          <a:noFill/>
-          <a:ln/>
-        </p:spPr>
-        <p:txBody>
-          <a:bodyPr wrap="square" lIns="0" tIns="0" rIns="0" bIns="0" rtlCol="0" anchor="t"/>
-          <a:lstStyle/>
-          <a:p>
-            <a:pPr indent="0" marL="0">
-              <a:buNone/>
-            </a:pPr>
-            <a:r>
-              <a:rPr lang="en-US" sz="1400" dirty="0">
-                <a:solidFill>
-                  <a:srgbClr val="6E6E73"/>
-                </a:solidFill>
-                <a:latin typeface="D-DIN" pitchFamily="34" charset="0"/>
-                <a:ea typeface="D-DIN" pitchFamily="34" charset="-122"/>
-                <a:cs typeface="D-DIN" pitchFamily="34" charset="-120"/>
-              </a:rPr>
-              <a:t>05</a:t>
-            </a:r>
-            <a:endParaRPr lang="en-US" sz="1400" dirty="0"/>
-          </a:p>
-        </p:txBody>
-      </p:sp>
-      <p:sp>
-        <p:nvSpPr>
-          <p:cNvPr id="15" name="Text 12"/>
-          <p:cNvSpPr/>
-          <p:nvPr/>
-        </p:nvSpPr>
-        <p:spPr>
-          <a:xfrm>
-            <a:off x="1097280" y="2834640"/>
-            <a:ext cx="2194560" cy="502920"/>
-          </a:xfrm>
-          <a:prstGeom prst="rect">
-            <a:avLst/>
-          </a:prstGeom>
-          <a:noFill/>
-          <a:ln/>
-        </p:spPr>
-        <p:txBody>
-          <a:bodyPr wrap="square" lIns="0" tIns="0" rIns="0" bIns="0" rtlCol="0" anchor="t"/>
-          <a:lstStyle/>
-          <a:p>
-            <a:pPr indent="0" marL="0">
-              <a:buNone/>
-            </a:pPr>
-            <a:r>
-              <a:rPr lang="en-US" sz="2200" b="1" spc="-60" kern="0" dirty="0">
-                <a:solidFill>
-                  <a:srgbClr val="1D1D1F"/>
-                </a:solidFill>
-                <a:latin typeface="Inter Display" pitchFamily="34" charset="0"/>
-                <a:ea typeface="Inter Display" pitchFamily="34" charset="-122"/>
-                <a:cs typeface="Inter Display" pitchFamily="34" charset="-120"/>
-              </a:rPr>
-              <a:t>Blocchi</a:t>
-            </a:r>
-            <a:endParaRPr lang="en-US" sz="2200" dirty="0"/>
-          </a:p>
-        </p:txBody>
-      </p:sp>
-      <p:sp>
-        <p:nvSpPr>
-          <p:cNvPr id="16" name="Text 13"/>
-          <p:cNvSpPr/>
-          <p:nvPr/>
-        </p:nvSpPr>
-        <p:spPr>
-          <a:xfrm>
-            <a:off x="3337560" y="2880360"/>
-            <a:ext cx="548640" cy="457200"/>
-          </a:xfrm>
-          <a:prstGeom prst="rect">
-            <a:avLst/>
-          </a:prstGeom>
-          <a:noFill/>
-          <a:ln/>
-        </p:spPr>
-        <p:txBody>
-          <a:bodyPr wrap="square" lIns="0" tIns="0" rIns="0" bIns="0" rtlCol="0" anchor="t"/>
-          <a:lstStyle/>
-          <a:p>
-            <a:pPr indent="0" marL="0">
-              <a:buNone/>
-            </a:pPr>
-            <a:r>
-              <a:rPr lang="en-US" sz="1400" dirty="0">
-                <a:solidFill>
-                  <a:srgbClr val="6E6E73"/>
-                </a:solidFill>
-                <a:latin typeface="D-DIN" pitchFamily="34" charset="0"/>
-                <a:ea typeface="D-DIN" pitchFamily="34" charset="-122"/>
-                <a:cs typeface="D-DIN" pitchFamily="34" charset="-120"/>
-              </a:rPr>
-              <a:t>06</a:t>
-            </a:r>
-            <a:endParaRPr lang="en-US" sz="1400" dirty="0"/>
-          </a:p>
-        </p:txBody>
-      </p:sp>
-      <p:sp>
-        <p:nvSpPr>
-          <p:cNvPr id="17" name="Text 14"/>
-          <p:cNvSpPr/>
-          <p:nvPr/>
-        </p:nvSpPr>
-        <p:spPr>
-          <a:xfrm>
-            <a:off x="3886200" y="2834640"/>
-            <a:ext cx="2194560" cy="502920"/>
-          </a:xfrm>
-          <a:prstGeom prst="rect">
-            <a:avLst/>
-          </a:prstGeom>
-          <a:noFill/>
-          <a:ln/>
-        </p:spPr>
-        <p:txBody>
-          <a:bodyPr wrap="square" lIns="0" tIns="0" rIns="0" bIns="0" rtlCol="0" anchor="t"/>
-          <a:lstStyle/>
-          <a:p>
-            <a:pPr indent="0" marL="0">
-              <a:buNone/>
-            </a:pPr>
-            <a:r>
-              <a:rPr lang="en-US" sz="2200" b="1" spc="-60" kern="0" dirty="0">
-                <a:solidFill>
-                  <a:srgbClr val="1D1D1F"/>
-                </a:solidFill>
-                <a:latin typeface="Inter Display" pitchFamily="34" charset="0"/>
-                <a:ea typeface="Inter Display" pitchFamily="34" charset="-122"/>
-                <a:cs typeface="Inter Display" pitchFamily="34" charset="-120"/>
-              </a:rPr>
-              <a:t>Segmenti</a:t>
-            </a:r>
-            <a:endParaRPr lang="en-US" sz="2200" dirty="0"/>
-          </a:p>
-        </p:txBody>
-      </p:sp>
-      <p:sp>
-        <p:nvSpPr>
-          <p:cNvPr id="18" name="Text 15"/>
-          <p:cNvSpPr/>
-          <p:nvPr/>
-        </p:nvSpPr>
-        <p:spPr>
-          <a:xfrm>
-            <a:off x="6126480" y="2880360"/>
-            <a:ext cx="548640" cy="457200"/>
-          </a:xfrm>
-          <a:prstGeom prst="rect">
-            <a:avLst/>
-          </a:prstGeom>
-          <a:noFill/>
-          <a:ln/>
-        </p:spPr>
-        <p:txBody>
-          <a:bodyPr wrap="square" lIns="0" tIns="0" rIns="0" bIns="0" rtlCol="0" anchor="t"/>
-          <a:lstStyle/>
-          <a:p>
-            <a:pPr indent="0" marL="0">
-              <a:buNone/>
-            </a:pPr>
-            <a:r>
-              <a:rPr lang="en-US" sz="1400" dirty="0">
-                <a:solidFill>
-                  <a:srgbClr val="6E6E73"/>
-                </a:solidFill>
-                <a:latin typeface="D-DIN" pitchFamily="34" charset="0"/>
-                <a:ea typeface="D-DIN" pitchFamily="34" charset="-122"/>
-                <a:cs typeface="D-DIN" pitchFamily="34" charset="-120"/>
-              </a:rPr>
-              <a:t>07</a:t>
-            </a:r>
-            <a:endParaRPr lang="en-US" sz="1400" dirty="0"/>
-          </a:p>
-        </p:txBody>
-      </p:sp>
-      <p:sp>
-        <p:nvSpPr>
-          <p:cNvPr id="19" name="Text 16"/>
-          <p:cNvSpPr/>
-          <p:nvPr/>
-        </p:nvSpPr>
-        <p:spPr>
-          <a:xfrm>
-            <a:off x="6675120" y="2834640"/>
-            <a:ext cx="2194560" cy="502920"/>
-          </a:xfrm>
-          <a:prstGeom prst="rect">
-            <a:avLst/>
-          </a:prstGeom>
-          <a:noFill/>
-          <a:ln/>
-        </p:spPr>
-        <p:txBody>
-          <a:bodyPr wrap="square" lIns="0" tIns="0" rIns="0" bIns="0" rtlCol="0" anchor="t"/>
-          <a:lstStyle/>
-          <a:p>
-            <a:pPr indent="0" marL="0">
-              <a:buNone/>
-            </a:pPr>
-            <a:r>
-              <a:rPr lang="en-US" sz="2200" b="1" spc="-60" kern="0" dirty="0">
-                <a:solidFill>
-                  <a:srgbClr val="1D1D1F"/>
-                </a:solidFill>
-                <a:latin typeface="Inter Display" pitchFamily="34" charset="0"/>
-                <a:ea typeface="Inter Display" pitchFamily="34" charset="-122"/>
-                <a:cs typeface="Inter Display" pitchFamily="34" charset="-120"/>
-              </a:rPr>
-              <a:t>Fisco</a:t>
-            </a:r>
-            <a:endParaRPr lang="en-US" sz="2200" dirty="0"/>
-          </a:p>
-        </p:txBody>
-      </p:sp>
-      <p:sp>
-        <p:nvSpPr>
-          <p:cNvPr id="20" name="Text 17"/>
-          <p:cNvSpPr/>
-          <p:nvPr/>
-        </p:nvSpPr>
-        <p:spPr>
-          <a:xfrm>
-            <a:off x="8915400" y="2880360"/>
-            <a:ext cx="548640" cy="457200"/>
-          </a:xfrm>
-          <a:prstGeom prst="rect">
-            <a:avLst/>
-          </a:prstGeom>
-          <a:noFill/>
-          <a:ln/>
-        </p:spPr>
-        <p:txBody>
-          <a:bodyPr wrap="square" lIns="0" tIns="0" rIns="0" bIns="0" rtlCol="0" anchor="t"/>
-          <a:lstStyle/>
-          <a:p>
-            <a:pPr indent="0" marL="0">
-              <a:buNone/>
-            </a:pPr>
-            <a:r>
-              <a:rPr lang="en-US" sz="1400" dirty="0">
-                <a:solidFill>
-                  <a:srgbClr val="6E6E73"/>
-                </a:solidFill>
-                <a:latin typeface="D-DIN" pitchFamily="34" charset="0"/>
-                <a:ea typeface="D-DIN" pitchFamily="34" charset="-122"/>
-                <a:cs typeface="D-DIN" pitchFamily="34" charset="-120"/>
-              </a:rPr>
-              <a:t>08</a:t>
-            </a:r>
-            <a:endParaRPr lang="en-US" sz="1400" dirty="0"/>
-          </a:p>
-        </p:txBody>
-      </p:sp>
-      <p:sp>
-        <p:nvSpPr>
-          <p:cNvPr id="21" name="Text 18"/>
-          <p:cNvSpPr/>
-          <p:nvPr/>
-        </p:nvSpPr>
-        <p:spPr>
-          <a:xfrm>
-            <a:off x="9464040" y="2834640"/>
-            <a:ext cx="2194560" cy="502920"/>
-          </a:xfrm>
-          <a:prstGeom prst="rect">
-            <a:avLst/>
-          </a:prstGeom>
-          <a:noFill/>
-          <a:ln/>
-        </p:spPr>
-        <p:txBody>
-          <a:bodyPr wrap="square" lIns="0" tIns="0" rIns="0" bIns="0" rtlCol="0" anchor="t"/>
-          <a:lstStyle/>
-          <a:p>
-            <a:pPr indent="0" marL="0">
-              <a:buNone/>
-            </a:pPr>
-            <a:r>
-              <a:rPr lang="en-US" sz="2200" b="1" spc="-60" kern="0" dirty="0">
-                <a:solidFill>
-                  <a:srgbClr val="1D1D1F"/>
-                </a:solidFill>
-                <a:latin typeface="Inter Display" pitchFamily="34" charset="0"/>
-                <a:ea typeface="Inter Display" pitchFamily="34" charset="-122"/>
-                <a:cs typeface="Inter Display" pitchFamily="34" charset="-120"/>
-              </a:rPr>
-              <a:t>Finanziamento</a:t>
-            </a:r>
-            <a:endParaRPr lang="en-US" sz="2200" dirty="0"/>
-          </a:p>
-        </p:txBody>
-      </p:sp>
-      <p:sp>
-        <p:nvSpPr>
-          <p:cNvPr id="22" name="Text 19"/>
-          <p:cNvSpPr/>
-          <p:nvPr/>
-        </p:nvSpPr>
-        <p:spPr>
-          <a:xfrm>
-            <a:off x="548640" y="3749040"/>
-            <a:ext cx="548640" cy="457200"/>
-          </a:xfrm>
-          <a:prstGeom prst="rect">
-            <a:avLst/>
-          </a:prstGeom>
-          <a:noFill/>
-          <a:ln/>
-        </p:spPr>
-        <p:txBody>
-          <a:bodyPr wrap="square" lIns="0" tIns="0" rIns="0" bIns="0" rtlCol="0" anchor="t"/>
-          <a:lstStyle/>
-          <a:p>
-            <a:pPr indent="0" marL="0">
-              <a:buNone/>
-            </a:pPr>
-            <a:r>
-              <a:rPr lang="en-US" sz="1400" dirty="0">
-                <a:solidFill>
-                  <a:srgbClr val="6E6E73"/>
-                </a:solidFill>
-                <a:latin typeface="D-DIN" pitchFamily="34" charset="0"/>
-                <a:ea typeface="D-DIN" pitchFamily="34" charset="-122"/>
-                <a:cs typeface="D-DIN" pitchFamily="34" charset="-120"/>
-              </a:rPr>
-              <a:t>09</a:t>
-            </a:r>
-            <a:endParaRPr lang="en-US" sz="1400" dirty="0"/>
-          </a:p>
-        </p:txBody>
-      </p:sp>
-      <p:sp>
-        <p:nvSpPr>
-          <p:cNvPr id="23" name="Text 20"/>
-          <p:cNvSpPr/>
-          <p:nvPr/>
-        </p:nvSpPr>
-        <p:spPr>
-          <a:xfrm>
-            <a:off x="1097280" y="3703320"/>
-            <a:ext cx="2194560" cy="502920"/>
-          </a:xfrm>
-          <a:prstGeom prst="rect">
-            <a:avLst/>
-          </a:prstGeom>
-          <a:noFill/>
-          <a:ln/>
-        </p:spPr>
-        <p:txBody>
-          <a:bodyPr wrap="square" lIns="0" tIns="0" rIns="0" bIns="0" rtlCol="0" anchor="t"/>
-          <a:lstStyle/>
-          <a:p>
-            <a:pPr indent="0" marL="0">
-              <a:buNone/>
-            </a:pPr>
-            <a:r>
-              <a:rPr lang="en-US" sz="2200" b="1" spc="-60" kern="0" dirty="0">
-                <a:solidFill>
-                  <a:srgbClr val="1D1D1F"/>
-                </a:solidFill>
-                <a:latin typeface="Inter Display" pitchFamily="34" charset="0"/>
-                <a:ea typeface="Inter Display" pitchFamily="34" charset="-122"/>
-                <a:cs typeface="Inter Display" pitchFamily="34" charset="-120"/>
-              </a:rPr>
-              <a:t>Sinergie</a:t>
-            </a:r>
-            <a:endParaRPr lang="en-US" sz="2200" dirty="0"/>
-          </a:p>
-        </p:txBody>
-      </p:sp>
-      <p:sp>
-        <p:nvSpPr>
-          <p:cNvPr id="24" name="Text 21"/>
-          <p:cNvSpPr/>
-          <p:nvPr/>
-        </p:nvSpPr>
-        <p:spPr>
-          <a:xfrm>
-            <a:off x="3337560" y="3749040"/>
-            <a:ext cx="548640" cy="457200"/>
-          </a:xfrm>
-          <a:prstGeom prst="rect">
-            <a:avLst/>
-          </a:prstGeom>
-          <a:noFill/>
-          <a:ln/>
-        </p:spPr>
-        <p:txBody>
-          <a:bodyPr wrap="square" lIns="0" tIns="0" rIns="0" bIns="0" rtlCol="0" anchor="t"/>
-          <a:lstStyle/>
-          <a:p>
-            <a:pPr indent="0" marL="0">
-              <a:buNone/>
-            </a:pPr>
-            <a:r>
-              <a:rPr lang="en-US" sz="1400" dirty="0">
-                <a:solidFill>
-                  <a:srgbClr val="6E6E73"/>
-                </a:solidFill>
-                <a:latin typeface="D-DIN" pitchFamily="34" charset="0"/>
-                <a:ea typeface="D-DIN" pitchFamily="34" charset="-122"/>
-                <a:cs typeface="D-DIN" pitchFamily="34" charset="-120"/>
-              </a:rPr>
-              <a:t>10</a:t>
-            </a:r>
-            <a:endParaRPr lang="en-US" sz="1400" dirty="0"/>
-          </a:p>
-        </p:txBody>
-      </p:sp>
-      <p:sp>
-        <p:nvSpPr>
-          <p:cNvPr id="25" name="Text 22"/>
-          <p:cNvSpPr/>
-          <p:nvPr/>
-        </p:nvSpPr>
-        <p:spPr>
-          <a:xfrm>
-            <a:off x="3886200" y="3703320"/>
-            <a:ext cx="2194560" cy="502920"/>
-          </a:xfrm>
-          <a:prstGeom prst="rect">
-            <a:avLst/>
-          </a:prstGeom>
-          <a:noFill/>
-          <a:ln/>
-        </p:spPr>
-        <p:txBody>
-          <a:bodyPr wrap="square" lIns="0" tIns="0" rIns="0" bIns="0" rtlCol="0" anchor="t"/>
-          <a:lstStyle/>
-          <a:p>
-            <a:pPr indent="0" marL="0">
-              <a:buNone/>
-            </a:pPr>
-            <a:r>
-              <a:rPr lang="en-US" sz="2200" b="1" spc="-60" kern="0" dirty="0">
-                <a:solidFill>
-                  <a:srgbClr val="1D1D1F"/>
-                </a:solidFill>
-                <a:latin typeface="Inter Display" pitchFamily="34" charset="0"/>
-                <a:ea typeface="Inter Display" pitchFamily="34" charset="-122"/>
-                <a:cs typeface="Inter Display" pitchFamily="34" charset="-120"/>
-              </a:rPr>
-              <a:t>Ponte</a:t>
-            </a:r>
-            <a:endParaRPr lang="en-US" sz="2200" dirty="0"/>
-          </a:p>
-        </p:txBody>
-      </p:sp>
-      <p:sp>
-        <p:nvSpPr>
-          <p:cNvPr id="26" name="Text 23"/>
-          <p:cNvSpPr/>
-          <p:nvPr/>
-        </p:nvSpPr>
-        <p:spPr>
-          <a:xfrm>
-            <a:off x="6126480" y="3749040"/>
-            <a:ext cx="548640" cy="457200"/>
-          </a:xfrm>
-          <a:prstGeom prst="rect">
-            <a:avLst/>
-          </a:prstGeom>
-          <a:noFill/>
-          <a:ln/>
-        </p:spPr>
-        <p:txBody>
-          <a:bodyPr wrap="square" lIns="0" tIns="0" rIns="0" bIns="0" rtlCol="0" anchor="t"/>
-          <a:lstStyle/>
-          <a:p>
-            <a:pPr indent="0" marL="0">
-              <a:buNone/>
-            </a:pPr>
-            <a:r>
-              <a:rPr lang="en-US" sz="1400" dirty="0">
-                <a:solidFill>
-                  <a:srgbClr val="6E6E73"/>
-                </a:solidFill>
-                <a:latin typeface="D-DIN" pitchFamily="34" charset="0"/>
-                <a:ea typeface="D-DIN" pitchFamily="34" charset="-122"/>
-                <a:cs typeface="D-DIN" pitchFamily="34" charset="-120"/>
-              </a:rPr>
-              <a:t>11</a:t>
-            </a:r>
-            <a:endParaRPr lang="en-US" sz="1400" dirty="0"/>
-          </a:p>
-        </p:txBody>
-      </p:sp>
-      <p:sp>
-        <p:nvSpPr>
-          <p:cNvPr id="27" name="Text 24"/>
-          <p:cNvSpPr/>
-          <p:nvPr/>
-        </p:nvSpPr>
-        <p:spPr>
-          <a:xfrm>
-            <a:off x="6675120" y="3703320"/>
-            <a:ext cx="2194560" cy="502920"/>
-          </a:xfrm>
-          <a:prstGeom prst="rect">
-            <a:avLst/>
-          </a:prstGeom>
-          <a:noFill/>
-          <a:ln/>
-        </p:spPr>
-        <p:txBody>
-          <a:bodyPr wrap="square" lIns="0" tIns="0" rIns="0" bIns="0" rtlCol="0" anchor="t"/>
-          <a:lstStyle/>
-          <a:p>
-            <a:pPr indent="0" marL="0">
-              <a:buNone/>
-            </a:pPr>
-            <a:r>
-              <a:rPr lang="en-US" sz="2200" b="1" spc="-60" kern="0" dirty="0">
-                <a:solidFill>
-                  <a:srgbClr val="1D1D1F"/>
-                </a:solidFill>
-                <a:latin typeface="Inter Display" pitchFamily="34" charset="0"/>
-                <a:ea typeface="Inter Display" pitchFamily="34" charset="-122"/>
-                <a:cs typeface="Inter Display" pitchFamily="34" charset="-120"/>
-              </a:rPr>
-              <a:t>Fusione</a:t>
-            </a:r>
-            <a:endParaRPr lang="en-US" sz="2200" dirty="0"/>
-          </a:p>
-        </p:txBody>
-      </p:sp>
-      <p:sp>
-        <p:nvSpPr>
-          <p:cNvPr id="28" name="Text 25"/>
-          <p:cNvSpPr/>
-          <p:nvPr/>
-        </p:nvSpPr>
-        <p:spPr>
-          <a:xfrm>
-            <a:off x="8915400" y="3749040"/>
-            <a:ext cx="548640" cy="457200"/>
-          </a:xfrm>
-          <a:prstGeom prst="rect">
-            <a:avLst/>
-          </a:prstGeom>
-          <a:noFill/>
-          <a:ln/>
-        </p:spPr>
-        <p:txBody>
-          <a:bodyPr wrap="square" lIns="0" tIns="0" rIns="0" bIns="0" rtlCol="0" anchor="t"/>
-          <a:lstStyle/>
-          <a:p>
-            <a:pPr indent="0" marL="0">
-              <a:buNone/>
-            </a:pPr>
-            <a:r>
-              <a:rPr lang="en-US" sz="1400" dirty="0">
-                <a:solidFill>
-                  <a:srgbClr val="6E6E73"/>
-                </a:solidFill>
-                <a:latin typeface="D-DIN" pitchFamily="34" charset="0"/>
-                <a:ea typeface="D-DIN" pitchFamily="34" charset="-122"/>
-                <a:cs typeface="D-DIN" pitchFamily="34" charset="-120"/>
-              </a:rPr>
-              <a:t>12</a:t>
-            </a:r>
-            <a:endParaRPr lang="en-US" sz="1400" dirty="0"/>
-          </a:p>
-        </p:txBody>
-      </p:sp>
-      <p:sp>
-        <p:nvSpPr>
-          <p:cNvPr id="29" name="Text 26"/>
-          <p:cNvSpPr/>
-          <p:nvPr/>
-        </p:nvSpPr>
-        <p:spPr>
-          <a:xfrm>
-            <a:off x="9464040" y="3703320"/>
-            <a:ext cx="2194560" cy="502920"/>
-          </a:xfrm>
-          <a:prstGeom prst="rect">
-            <a:avLst/>
-          </a:prstGeom>
-          <a:noFill/>
-          <a:ln/>
-        </p:spPr>
-        <p:txBody>
-          <a:bodyPr wrap="square" lIns="0" tIns="0" rIns="0" bIns="0" rtlCol="0" anchor="t"/>
-          <a:lstStyle/>
-          <a:p>
-            <a:pPr indent="0" marL="0">
-              <a:buNone/>
-            </a:pPr>
-            <a:r>
-              <a:rPr lang="en-US" sz="2200" b="1" spc="-60" kern="0" dirty="0">
-                <a:solidFill>
-                  <a:srgbClr val="1D1D1F"/>
-                </a:solidFill>
-                <a:latin typeface="Inter Display" pitchFamily="34" charset="0"/>
-                <a:ea typeface="Inter Display" pitchFamily="34" charset="-122"/>
-                <a:cs typeface="Inter Display" pitchFamily="34" charset="-120"/>
-              </a:rPr>
-              <a:t>Conglomerati</a:t>
-            </a:r>
-            <a:endParaRPr lang="en-US" sz="2200" dirty="0"/>
-          </a:p>
-        </p:txBody>
-      </p:sp>
-      <p:sp>
-        <p:nvSpPr>
-          <p:cNvPr id="30" name="Text 27"/>
-          <p:cNvSpPr/>
-          <p:nvPr/>
-        </p:nvSpPr>
-        <p:spPr>
-          <a:xfrm>
-            <a:off x="548640" y="4800600"/>
-            <a:ext cx="3200400" cy="914400"/>
-          </a:xfrm>
-          <a:prstGeom prst="rect">
-            <a:avLst/>
-          </a:prstGeom>
-          <a:noFill/>
-          <a:ln/>
-        </p:spPr>
-        <p:txBody>
-          <a:bodyPr wrap="square" lIns="0" tIns="0" rIns="0" bIns="0" rtlCol="0" anchor="b"/>
-          <a:lstStyle/>
-          <a:p>
-            <a:pPr indent="0" marL="0">
-              <a:buNone/>
-            </a:pPr>
-            <a:r>
-              <a:rPr lang="en-US" sz="6000" b="1" spc="-60" kern="0" dirty="0">
-                <a:solidFill>
-                  <a:srgbClr val="0B1F3A"/>
-                </a:solidFill>
-                <a:latin typeface="Inter Display" pitchFamily="34" charset="0"/>
-                <a:ea typeface="Inter Display" pitchFamily="34" charset="-122"/>
-                <a:cs typeface="Inter Display" pitchFamily="34" charset="-120"/>
-              </a:rPr>
-              <a:t>2.000</a:t>
-            </a:r>
-            <a:endParaRPr lang="en-US" sz="6000" dirty="0"/>
-          </a:p>
-        </p:txBody>
-      </p:sp>
-      <p:sp>
-        <p:nvSpPr>
-          <p:cNvPr id="31" name="Text 28"/>
-          <p:cNvSpPr/>
-          <p:nvPr/>
-        </p:nvSpPr>
-        <p:spPr>
-          <a:xfrm>
-            <a:off x="3657600" y="5120640"/>
-            <a:ext cx="7315200" cy="457200"/>
-          </a:xfrm>
-          <a:prstGeom prst="rect">
-            <a:avLst/>
-          </a:prstGeom>
-          <a:noFill/>
-          <a:ln/>
-        </p:spPr>
-        <p:txBody>
-          <a:bodyPr wrap="square" lIns="0" tIns="0" rIns="0" bIns="0" rtlCol="0" anchor="t"/>
-          <a:lstStyle/>
-          <a:p>
-            <a:pPr indent="0" marL="0">
-              <a:buNone/>
-            </a:pPr>
-            <a:r>
-              <a:rPr lang="en-US" sz="1800" dirty="0">
+              <a:rPr lang="en-US" sz="1350" dirty="0">
                 <a:solidFill>
                   <a:srgbClr val="6E6E73"/>
                 </a:solidFill>
@@ -16411,9 +16044,9 @@
                 <a:ea typeface="Inter" pitchFamily="34" charset="-122"/>
                 <a:cs typeface="Inter" pitchFamily="34" charset="-120"/>
               </a:rPr>
-              <a:t>formule, zero errori; Excel e Python coincidono al centesimo</a:t>
-            </a:r>
-            <a:endParaRPr lang="en-US" sz="1800" dirty="0"/>
+              <a:t>mld di guadagno per i soci SpaceX</a:t>
+            </a:r>
+            <a:endParaRPr lang="en-US" sz="1350" dirty="0"/>
           </a:p>
         </p:txBody>
       </p:sp>
@@ -16460,6 +16093,1216 @@
             <a:fld id="{F7021451-1387-4CA6-816F-3879F97B5CBC}" type="slidenum">
               <a:rPr b="0" lang="en-US"/>
               <a:t>25</a:t>
+            </a:fld>
+            <a:endParaRPr lang="en-US"/>
+          </a:p>
+        </p:txBody>
+      </p:sp>
+    </p:spTree>
+  </p:cSld>
+  <p:clrMapOvr>
+    <a:masterClrMapping/>
+  </p:clrMapOvr>
+</p:sld>
+</file>
+
+<file path=ppt/slides/slide26.xml><?xml version="1.0" encoding="utf-8"?>
+<p:sld xmlns:a="http://schemas.openxmlformats.org/drawingml/2006/main" xmlns:r="http://schemas.openxmlformats.org/officeDocument/2006/relationships" xmlns:p="http://schemas.openxmlformats.org/presentationml/2006/main">
+  <p:cSld name="Slide 26">
+    <p:spTree>
+      <p:nvGrpSpPr>
+        <p:cNvPr id="1" name=""/>
+        <p:cNvGrpSpPr/>
+        <p:nvPr/>
+      </p:nvGrpSpPr>
+      <p:grpSpPr>
+        <a:xfrm>
+          <a:off x="0" y="0"/>
+          <a:ext cx="0" cy="0"/>
+          <a:chOff x="0" y="0"/>
+          <a:chExt cx="0" cy="0"/>
+        </a:xfrm>
+      </p:grpSpPr>
+      <p:sp>
+        <p:nvSpPr>
+          <p:cNvPr id="2" name="Text 0"/>
+          <p:cNvSpPr/>
+          <p:nvPr>
+            <p:ph idx="100" type="body" hasCustomPrompt="1"/>
+          </p:nvPr>
+        </p:nvSpPr>
+        <p:spPr>
+          <a:xfrm>
+            <a:off x="548640" y="502920"/>
+            <a:ext cx="11064240" cy="274320"/>
+          </a:xfrm>
+          <a:prstGeom prst="rect">
+            <a:avLst/>
+          </a:prstGeom>
+          <a:noFill/>
+          <a:ln/>
+        </p:spPr>
+        <p:txBody>
+          <a:bodyPr wrap="square" lIns="0" tIns="0" rIns="0" bIns="0" rtlCol="0" anchor="t"/>
+          <a:lstStyle/>
+          <a:p>
+            <a:pPr indent="0" marL="0">
+              <a:buNone/>
+            </a:pPr>
+            <a:r>
+              <a:rPr lang="en-US" sz="1200" spc="300" kern="0" dirty="0">
+                <a:solidFill>
+                  <a:srgbClr val="6E6E73"/>
+                </a:solidFill>
+                <a:latin typeface="D-DIN" pitchFamily="34" charset="0"/>
+                <a:ea typeface="D-DIN" pitchFamily="34" charset="-122"/>
+                <a:cs typeface="D-DIN" pitchFamily="34" charset="-120"/>
+              </a:rPr>
+              <a:t>RISERVA  |  IL MODELLO</a:t>
+            </a:r>
+            <a:endParaRPr lang="en-US" sz="1200" dirty="0"/>
+          </a:p>
+        </p:txBody>
+      </p:sp>
+      <p:sp>
+        <p:nvSpPr>
+          <p:cNvPr id="3" name="Text 0"/>
+          <p:cNvSpPr/>
+          <p:nvPr>
+            <p:ph idx="101" type="title" hasCustomPrompt="1"/>
+          </p:nvPr>
+        </p:nvSpPr>
+        <p:spPr>
+          <a:xfrm>
+            <a:off x="548640" y="868680"/>
+            <a:ext cx="11064240" cy="1188720"/>
+          </a:xfrm>
+          <a:prstGeom prst="rect">
+            <a:avLst/>
+          </a:prstGeom>
+          <a:noFill/>
+          <a:ln/>
+        </p:spPr>
+        <p:txBody>
+          <a:bodyPr wrap="square" lIns="0" tIns="0" rIns="0" bIns="0" rtlCol="0" anchor="t"/>
+          <a:lstStyle/>
+          <a:p>
+            <a:pPr algn="l" indent="0" marL="0">
+              <a:buNone/>
+            </a:pPr>
+            <a:r>
+              <a:rPr lang="en-US" sz="4000" b="1" spc="-60" kern="0" dirty="0">
+                <a:solidFill>
+                  <a:srgbClr val="1D1D1F"/>
+                </a:solidFill>
+                <a:latin typeface="Inter Display" pitchFamily="34" charset="0"/>
+                <a:ea typeface="Inter Display" pitchFamily="34" charset="-122"/>
+                <a:cs typeface="Inter Display" pitchFamily="34" charset="-120"/>
+              </a:rPr>
+              <a:t>Tutto in un file Excel, in formule</a:t>
+            </a:r>
+            <a:endParaRPr lang="en-US" sz="4000" dirty="0"/>
+          </a:p>
+        </p:txBody>
+      </p:sp>
+      <p:sp>
+        <p:nvSpPr>
+          <p:cNvPr id="4" name="Text 0"/>
+          <p:cNvSpPr/>
+          <p:nvPr>
+            <p:ph idx="102" type="body" hasCustomPrompt="1"/>
+          </p:nvPr>
+        </p:nvSpPr>
+        <p:spPr>
+          <a:xfrm>
+            <a:off x="548640" y="6400800"/>
+            <a:ext cx="10424160" cy="228600"/>
+          </a:xfrm>
+          <a:prstGeom prst="rect">
+            <a:avLst/>
+          </a:prstGeom>
+          <a:noFill/>
+          <a:ln/>
+        </p:spPr>
+        <p:txBody>
+          <a:bodyPr wrap="square" lIns="0" tIns="0" rIns="0" bIns="0" rtlCol="0" anchor="t"/>
+          <a:lstStyle/>
+          <a:p>
+            <a:pPr indent="0" marL="0">
+              <a:buNone/>
+            </a:pPr>
+            <a:r>
+              <a:rPr lang="en-US" sz="800" dirty="0">
+                <a:solidFill>
+                  <a:srgbClr val="6E6E73"/>
+                </a:solidFill>
+                <a:latin typeface="Inter" pitchFamily="34" charset="0"/>
+                <a:ea typeface="Inter" pitchFamily="34" charset="-122"/>
+                <a:cs typeface="Inter" pitchFamily="34" charset="-120"/>
+              </a:rPr>
+              <a:t>Fonte: SpaceX_modello.xlsx: input con la loro fonte, formule, controllo incrociato con il modello in Python</a:t>
+            </a:r>
+            <a:endParaRPr lang="en-US" sz="800" dirty="0"/>
+          </a:p>
+        </p:txBody>
+      </p:sp>
+      <p:sp>
+        <p:nvSpPr>
+          <p:cNvPr id="6" name="Text 3"/>
+          <p:cNvSpPr/>
+          <p:nvPr/>
+        </p:nvSpPr>
+        <p:spPr>
+          <a:xfrm>
+            <a:off x="548640" y="2011680"/>
+            <a:ext cx="548640" cy="457200"/>
+          </a:xfrm>
+          <a:prstGeom prst="rect">
+            <a:avLst/>
+          </a:prstGeom>
+          <a:noFill/>
+          <a:ln/>
+        </p:spPr>
+        <p:txBody>
+          <a:bodyPr wrap="square" lIns="0" tIns="0" rIns="0" bIns="0" rtlCol="0" anchor="t"/>
+          <a:lstStyle/>
+          <a:p>
+            <a:pPr indent="0" marL="0">
+              <a:buNone/>
+            </a:pPr>
+            <a:r>
+              <a:rPr lang="en-US" sz="1400" dirty="0">
+                <a:solidFill>
+                  <a:srgbClr val="6E6E73"/>
+                </a:solidFill>
+                <a:latin typeface="D-DIN" pitchFamily="34" charset="0"/>
+                <a:ea typeface="D-DIN" pitchFamily="34" charset="-122"/>
+                <a:cs typeface="D-DIN" pitchFamily="34" charset="-120"/>
+              </a:rPr>
+              <a:t>01</a:t>
+            </a:r>
+            <a:endParaRPr lang="en-US" sz="1400" dirty="0"/>
+          </a:p>
+        </p:txBody>
+      </p:sp>
+      <p:sp>
+        <p:nvSpPr>
+          <p:cNvPr id="7" name="Text 4"/>
+          <p:cNvSpPr/>
+          <p:nvPr/>
+        </p:nvSpPr>
+        <p:spPr>
+          <a:xfrm>
+            <a:off x="1097280" y="1965960"/>
+            <a:ext cx="2194560" cy="502920"/>
+          </a:xfrm>
+          <a:prstGeom prst="rect">
+            <a:avLst/>
+          </a:prstGeom>
+          <a:noFill/>
+          <a:ln/>
+        </p:spPr>
+        <p:txBody>
+          <a:bodyPr wrap="square" lIns="0" tIns="0" rIns="0" bIns="0" rtlCol="0" anchor="t"/>
+          <a:lstStyle/>
+          <a:p>
+            <a:pPr indent="0" marL="0">
+              <a:buNone/>
+            </a:pPr>
+            <a:r>
+              <a:rPr lang="en-US" sz="2200" b="1" spc="-60" kern="0" dirty="0">
+                <a:solidFill>
+                  <a:srgbClr val="0071E3"/>
+                </a:solidFill>
+                <a:latin typeface="Inter Display" pitchFamily="34" charset="0"/>
+                <a:ea typeface="Inter Display" pitchFamily="34" charset="-122"/>
+                <a:cs typeface="Inter Display" pitchFamily="34" charset="-120"/>
+              </a:rPr>
+              <a:t>Prezzo</a:t>
+            </a:r>
+            <a:endParaRPr lang="en-US" sz="2200" dirty="0"/>
+          </a:p>
+        </p:txBody>
+      </p:sp>
+      <p:sp>
+        <p:nvSpPr>
+          <p:cNvPr id="8" name="Text 5"/>
+          <p:cNvSpPr/>
+          <p:nvPr/>
+        </p:nvSpPr>
+        <p:spPr>
+          <a:xfrm>
+            <a:off x="3337560" y="2011680"/>
+            <a:ext cx="548640" cy="457200"/>
+          </a:xfrm>
+          <a:prstGeom prst="rect">
+            <a:avLst/>
+          </a:prstGeom>
+          <a:noFill/>
+          <a:ln/>
+        </p:spPr>
+        <p:txBody>
+          <a:bodyPr wrap="square" lIns="0" tIns="0" rIns="0" bIns="0" rtlCol="0" anchor="t"/>
+          <a:lstStyle/>
+          <a:p>
+            <a:pPr indent="0" marL="0">
+              <a:buNone/>
+            </a:pPr>
+            <a:r>
+              <a:rPr lang="en-US" sz="1400" dirty="0">
+                <a:solidFill>
+                  <a:srgbClr val="6E6E73"/>
+                </a:solidFill>
+                <a:latin typeface="D-DIN" pitchFamily="34" charset="0"/>
+                <a:ea typeface="D-DIN" pitchFamily="34" charset="-122"/>
+                <a:cs typeface="D-DIN" pitchFamily="34" charset="-120"/>
+              </a:rPr>
+              <a:t>02</a:t>
+            </a:r>
+            <a:endParaRPr lang="en-US" sz="1400" dirty="0"/>
+          </a:p>
+        </p:txBody>
+      </p:sp>
+      <p:sp>
+        <p:nvSpPr>
+          <p:cNvPr id="9" name="Text 6"/>
+          <p:cNvSpPr/>
+          <p:nvPr/>
+        </p:nvSpPr>
+        <p:spPr>
+          <a:xfrm>
+            <a:off x="3886200" y="1965960"/>
+            <a:ext cx="2194560" cy="502920"/>
+          </a:xfrm>
+          <a:prstGeom prst="rect">
+            <a:avLst/>
+          </a:prstGeom>
+          <a:noFill/>
+          <a:ln/>
+        </p:spPr>
+        <p:txBody>
+          <a:bodyPr wrap="square" lIns="0" tIns="0" rIns="0" bIns="0" rtlCol="0" anchor="t"/>
+          <a:lstStyle/>
+          <a:p>
+            <a:pPr indent="0" marL="0">
+              <a:buNone/>
+            </a:pPr>
+            <a:r>
+              <a:rPr lang="en-US" sz="2200" b="1" spc="-60" kern="0" dirty="0">
+                <a:solidFill>
+                  <a:srgbClr val="1D1D1F"/>
+                </a:solidFill>
+                <a:latin typeface="Inter Display" pitchFamily="34" charset="0"/>
+                <a:ea typeface="Inter Display" pitchFamily="34" charset="-122"/>
+                <a:cs typeface="Inter Display" pitchFamily="34" charset="-120"/>
+              </a:rPr>
+              <a:t>Input</a:t>
+            </a:r>
+            <a:endParaRPr lang="en-US" sz="2200" dirty="0"/>
+          </a:p>
+        </p:txBody>
+      </p:sp>
+      <p:sp>
+        <p:nvSpPr>
+          <p:cNvPr id="10" name="Text 7"/>
+          <p:cNvSpPr/>
+          <p:nvPr/>
+        </p:nvSpPr>
+        <p:spPr>
+          <a:xfrm>
+            <a:off x="6126480" y="2011680"/>
+            <a:ext cx="548640" cy="457200"/>
+          </a:xfrm>
+          <a:prstGeom prst="rect">
+            <a:avLst/>
+          </a:prstGeom>
+          <a:noFill/>
+          <a:ln/>
+        </p:spPr>
+        <p:txBody>
+          <a:bodyPr wrap="square" lIns="0" tIns="0" rIns="0" bIns="0" rtlCol="0" anchor="t"/>
+          <a:lstStyle/>
+          <a:p>
+            <a:pPr indent="0" marL="0">
+              <a:buNone/>
+            </a:pPr>
+            <a:r>
+              <a:rPr lang="en-US" sz="1400" dirty="0">
+                <a:solidFill>
+                  <a:srgbClr val="6E6E73"/>
+                </a:solidFill>
+                <a:latin typeface="D-DIN" pitchFamily="34" charset="0"/>
+                <a:ea typeface="D-DIN" pitchFamily="34" charset="-122"/>
+                <a:cs typeface="D-DIN" pitchFamily="34" charset="-120"/>
+              </a:rPr>
+              <a:t>03</a:t>
+            </a:r>
+            <a:endParaRPr lang="en-US" sz="1400" dirty="0"/>
+          </a:p>
+        </p:txBody>
+      </p:sp>
+      <p:sp>
+        <p:nvSpPr>
+          <p:cNvPr id="11" name="Text 8"/>
+          <p:cNvSpPr/>
+          <p:nvPr/>
+        </p:nvSpPr>
+        <p:spPr>
+          <a:xfrm>
+            <a:off x="6675120" y="1965960"/>
+            <a:ext cx="2194560" cy="502920"/>
+          </a:xfrm>
+          <a:prstGeom prst="rect">
+            <a:avLst/>
+          </a:prstGeom>
+          <a:noFill/>
+          <a:ln/>
+        </p:spPr>
+        <p:txBody>
+          <a:bodyPr wrap="square" lIns="0" tIns="0" rIns="0" bIns="0" rtlCol="0" anchor="t"/>
+          <a:lstStyle/>
+          <a:p>
+            <a:pPr indent="0" marL="0">
+              <a:buNone/>
+            </a:pPr>
+            <a:r>
+              <a:rPr lang="en-US" sz="2200" b="1" spc="-60" kern="0" dirty="0">
+                <a:solidFill>
+                  <a:srgbClr val="1D1D1F"/>
+                </a:solidFill>
+                <a:latin typeface="Inter Display" pitchFamily="34" charset="0"/>
+                <a:ea typeface="Inter Display" pitchFamily="34" charset="-122"/>
+                <a:cs typeface="Inter Display" pitchFamily="34" charset="-120"/>
+              </a:rPr>
+              <a:t>Tassi</a:t>
+            </a:r>
+            <a:endParaRPr lang="en-US" sz="2200" dirty="0"/>
+          </a:p>
+        </p:txBody>
+      </p:sp>
+      <p:sp>
+        <p:nvSpPr>
+          <p:cNvPr id="12" name="Text 9"/>
+          <p:cNvSpPr/>
+          <p:nvPr/>
+        </p:nvSpPr>
+        <p:spPr>
+          <a:xfrm>
+            <a:off x="8915400" y="2011680"/>
+            <a:ext cx="548640" cy="457200"/>
+          </a:xfrm>
+          <a:prstGeom prst="rect">
+            <a:avLst/>
+          </a:prstGeom>
+          <a:noFill/>
+          <a:ln/>
+        </p:spPr>
+        <p:txBody>
+          <a:bodyPr wrap="square" lIns="0" tIns="0" rIns="0" bIns="0" rtlCol="0" anchor="t"/>
+          <a:lstStyle/>
+          <a:p>
+            <a:pPr indent="0" marL="0">
+              <a:buNone/>
+            </a:pPr>
+            <a:r>
+              <a:rPr lang="en-US" sz="1400" dirty="0">
+                <a:solidFill>
+                  <a:srgbClr val="6E6E73"/>
+                </a:solidFill>
+                <a:latin typeface="D-DIN" pitchFamily="34" charset="0"/>
+                <a:ea typeface="D-DIN" pitchFamily="34" charset="-122"/>
+                <a:cs typeface="D-DIN" pitchFamily="34" charset="-120"/>
+              </a:rPr>
+              <a:t>04</a:t>
+            </a:r>
+            <a:endParaRPr lang="en-US" sz="1400" dirty="0"/>
+          </a:p>
+        </p:txBody>
+      </p:sp>
+      <p:sp>
+        <p:nvSpPr>
+          <p:cNvPr id="13" name="Text 10"/>
+          <p:cNvSpPr/>
+          <p:nvPr/>
+        </p:nvSpPr>
+        <p:spPr>
+          <a:xfrm>
+            <a:off x="9464040" y="1965960"/>
+            <a:ext cx="2194560" cy="502920"/>
+          </a:xfrm>
+          <a:prstGeom prst="rect">
+            <a:avLst/>
+          </a:prstGeom>
+          <a:noFill/>
+          <a:ln/>
+        </p:spPr>
+        <p:txBody>
+          <a:bodyPr wrap="square" lIns="0" tIns="0" rIns="0" bIns="0" rtlCol="0" anchor="t"/>
+          <a:lstStyle/>
+          <a:p>
+            <a:pPr indent="0" marL="0">
+              <a:buNone/>
+            </a:pPr>
+            <a:r>
+              <a:rPr lang="en-US" sz="2200" b="1" spc="-60" kern="0" dirty="0">
+                <a:solidFill>
+                  <a:srgbClr val="1D1D1F"/>
+                </a:solidFill>
+                <a:latin typeface="Inter Display" pitchFamily="34" charset="0"/>
+                <a:ea typeface="Inter Display" pitchFamily="34" charset="-122"/>
+                <a:cs typeface="Inter Display" pitchFamily="34" charset="-120"/>
+              </a:rPr>
+              <a:t>Probabilità</a:t>
+            </a:r>
+            <a:endParaRPr lang="en-US" sz="2200" dirty="0"/>
+          </a:p>
+        </p:txBody>
+      </p:sp>
+      <p:sp>
+        <p:nvSpPr>
+          <p:cNvPr id="14" name="Text 11"/>
+          <p:cNvSpPr/>
+          <p:nvPr/>
+        </p:nvSpPr>
+        <p:spPr>
+          <a:xfrm>
+            <a:off x="548640" y="2880360"/>
+            <a:ext cx="548640" cy="457200"/>
+          </a:xfrm>
+          <a:prstGeom prst="rect">
+            <a:avLst/>
+          </a:prstGeom>
+          <a:noFill/>
+          <a:ln/>
+        </p:spPr>
+        <p:txBody>
+          <a:bodyPr wrap="square" lIns="0" tIns="0" rIns="0" bIns="0" rtlCol="0" anchor="t"/>
+          <a:lstStyle/>
+          <a:p>
+            <a:pPr indent="0" marL="0">
+              <a:buNone/>
+            </a:pPr>
+            <a:r>
+              <a:rPr lang="en-US" sz="1400" dirty="0">
+                <a:solidFill>
+                  <a:srgbClr val="6E6E73"/>
+                </a:solidFill>
+                <a:latin typeface="D-DIN" pitchFamily="34" charset="0"/>
+                <a:ea typeface="D-DIN" pitchFamily="34" charset="-122"/>
+                <a:cs typeface="D-DIN" pitchFamily="34" charset="-120"/>
+              </a:rPr>
+              <a:t>05</a:t>
+            </a:r>
+            <a:endParaRPr lang="en-US" sz="1400" dirty="0"/>
+          </a:p>
+        </p:txBody>
+      </p:sp>
+      <p:sp>
+        <p:nvSpPr>
+          <p:cNvPr id="15" name="Text 12"/>
+          <p:cNvSpPr/>
+          <p:nvPr/>
+        </p:nvSpPr>
+        <p:spPr>
+          <a:xfrm>
+            <a:off x="1097280" y="2834640"/>
+            <a:ext cx="2194560" cy="502920"/>
+          </a:xfrm>
+          <a:prstGeom prst="rect">
+            <a:avLst/>
+          </a:prstGeom>
+          <a:noFill/>
+          <a:ln/>
+        </p:spPr>
+        <p:txBody>
+          <a:bodyPr wrap="square" lIns="0" tIns="0" rIns="0" bIns="0" rtlCol="0" anchor="t"/>
+          <a:lstStyle/>
+          <a:p>
+            <a:pPr indent="0" marL="0">
+              <a:buNone/>
+            </a:pPr>
+            <a:r>
+              <a:rPr lang="en-US" sz="2200" b="1" spc="-60" kern="0" dirty="0">
+                <a:solidFill>
+                  <a:srgbClr val="1D1D1F"/>
+                </a:solidFill>
+                <a:latin typeface="Inter Display" pitchFamily="34" charset="0"/>
+                <a:ea typeface="Inter Display" pitchFamily="34" charset="-122"/>
+                <a:cs typeface="Inter Display" pitchFamily="34" charset="-120"/>
+              </a:rPr>
+              <a:t>Blocchi</a:t>
+            </a:r>
+            <a:endParaRPr lang="en-US" sz="2200" dirty="0"/>
+          </a:p>
+        </p:txBody>
+      </p:sp>
+      <p:sp>
+        <p:nvSpPr>
+          <p:cNvPr id="16" name="Text 13"/>
+          <p:cNvSpPr/>
+          <p:nvPr/>
+        </p:nvSpPr>
+        <p:spPr>
+          <a:xfrm>
+            <a:off x="3337560" y="2880360"/>
+            <a:ext cx="548640" cy="457200"/>
+          </a:xfrm>
+          <a:prstGeom prst="rect">
+            <a:avLst/>
+          </a:prstGeom>
+          <a:noFill/>
+          <a:ln/>
+        </p:spPr>
+        <p:txBody>
+          <a:bodyPr wrap="square" lIns="0" tIns="0" rIns="0" bIns="0" rtlCol="0" anchor="t"/>
+          <a:lstStyle/>
+          <a:p>
+            <a:pPr indent="0" marL="0">
+              <a:buNone/>
+            </a:pPr>
+            <a:r>
+              <a:rPr lang="en-US" sz="1400" dirty="0">
+                <a:solidFill>
+                  <a:srgbClr val="6E6E73"/>
+                </a:solidFill>
+                <a:latin typeface="D-DIN" pitchFamily="34" charset="0"/>
+                <a:ea typeface="D-DIN" pitchFamily="34" charset="-122"/>
+                <a:cs typeface="D-DIN" pitchFamily="34" charset="-120"/>
+              </a:rPr>
+              <a:t>06</a:t>
+            </a:r>
+            <a:endParaRPr lang="en-US" sz="1400" dirty="0"/>
+          </a:p>
+        </p:txBody>
+      </p:sp>
+      <p:sp>
+        <p:nvSpPr>
+          <p:cNvPr id="17" name="Text 14"/>
+          <p:cNvSpPr/>
+          <p:nvPr/>
+        </p:nvSpPr>
+        <p:spPr>
+          <a:xfrm>
+            <a:off x="3886200" y="2834640"/>
+            <a:ext cx="2194560" cy="502920"/>
+          </a:xfrm>
+          <a:prstGeom prst="rect">
+            <a:avLst/>
+          </a:prstGeom>
+          <a:noFill/>
+          <a:ln/>
+        </p:spPr>
+        <p:txBody>
+          <a:bodyPr wrap="square" lIns="0" tIns="0" rIns="0" bIns="0" rtlCol="0" anchor="t"/>
+          <a:lstStyle/>
+          <a:p>
+            <a:pPr indent="0" marL="0">
+              <a:buNone/>
+            </a:pPr>
+            <a:r>
+              <a:rPr lang="en-US" sz="2200" b="1" spc="-60" kern="0" dirty="0">
+                <a:solidFill>
+                  <a:srgbClr val="1D1D1F"/>
+                </a:solidFill>
+                <a:latin typeface="Inter Display" pitchFamily="34" charset="0"/>
+                <a:ea typeface="Inter Display" pitchFamily="34" charset="-122"/>
+                <a:cs typeface="Inter Display" pitchFamily="34" charset="-120"/>
+              </a:rPr>
+              <a:t>Segmenti</a:t>
+            </a:r>
+            <a:endParaRPr lang="en-US" sz="2200" dirty="0"/>
+          </a:p>
+        </p:txBody>
+      </p:sp>
+      <p:sp>
+        <p:nvSpPr>
+          <p:cNvPr id="18" name="Text 15"/>
+          <p:cNvSpPr/>
+          <p:nvPr/>
+        </p:nvSpPr>
+        <p:spPr>
+          <a:xfrm>
+            <a:off x="6126480" y="2880360"/>
+            <a:ext cx="548640" cy="457200"/>
+          </a:xfrm>
+          <a:prstGeom prst="rect">
+            <a:avLst/>
+          </a:prstGeom>
+          <a:noFill/>
+          <a:ln/>
+        </p:spPr>
+        <p:txBody>
+          <a:bodyPr wrap="square" lIns="0" tIns="0" rIns="0" bIns="0" rtlCol="0" anchor="t"/>
+          <a:lstStyle/>
+          <a:p>
+            <a:pPr indent="0" marL="0">
+              <a:buNone/>
+            </a:pPr>
+            <a:r>
+              <a:rPr lang="en-US" sz="1400" dirty="0">
+                <a:solidFill>
+                  <a:srgbClr val="6E6E73"/>
+                </a:solidFill>
+                <a:latin typeface="D-DIN" pitchFamily="34" charset="0"/>
+                <a:ea typeface="D-DIN" pitchFamily="34" charset="-122"/>
+                <a:cs typeface="D-DIN" pitchFamily="34" charset="-120"/>
+              </a:rPr>
+              <a:t>07</a:t>
+            </a:r>
+            <a:endParaRPr lang="en-US" sz="1400" dirty="0"/>
+          </a:p>
+        </p:txBody>
+      </p:sp>
+      <p:sp>
+        <p:nvSpPr>
+          <p:cNvPr id="19" name="Text 16"/>
+          <p:cNvSpPr/>
+          <p:nvPr/>
+        </p:nvSpPr>
+        <p:spPr>
+          <a:xfrm>
+            <a:off x="6675120" y="2834640"/>
+            <a:ext cx="2194560" cy="502920"/>
+          </a:xfrm>
+          <a:prstGeom prst="rect">
+            <a:avLst/>
+          </a:prstGeom>
+          <a:noFill/>
+          <a:ln/>
+        </p:spPr>
+        <p:txBody>
+          <a:bodyPr wrap="square" lIns="0" tIns="0" rIns="0" bIns="0" rtlCol="0" anchor="t"/>
+          <a:lstStyle/>
+          <a:p>
+            <a:pPr indent="0" marL="0">
+              <a:buNone/>
+            </a:pPr>
+            <a:r>
+              <a:rPr lang="en-US" sz="2200" b="1" spc="-60" kern="0" dirty="0">
+                <a:solidFill>
+                  <a:srgbClr val="1D1D1F"/>
+                </a:solidFill>
+                <a:latin typeface="Inter Display" pitchFamily="34" charset="0"/>
+                <a:ea typeface="Inter Display" pitchFamily="34" charset="-122"/>
+                <a:cs typeface="Inter Display" pitchFamily="34" charset="-120"/>
+              </a:rPr>
+              <a:t>Fisco</a:t>
+            </a:r>
+            <a:endParaRPr lang="en-US" sz="2200" dirty="0"/>
+          </a:p>
+        </p:txBody>
+      </p:sp>
+      <p:sp>
+        <p:nvSpPr>
+          <p:cNvPr id="20" name="Text 17"/>
+          <p:cNvSpPr/>
+          <p:nvPr/>
+        </p:nvSpPr>
+        <p:spPr>
+          <a:xfrm>
+            <a:off x="8915400" y="2880360"/>
+            <a:ext cx="548640" cy="457200"/>
+          </a:xfrm>
+          <a:prstGeom prst="rect">
+            <a:avLst/>
+          </a:prstGeom>
+          <a:noFill/>
+          <a:ln/>
+        </p:spPr>
+        <p:txBody>
+          <a:bodyPr wrap="square" lIns="0" tIns="0" rIns="0" bIns="0" rtlCol="0" anchor="t"/>
+          <a:lstStyle/>
+          <a:p>
+            <a:pPr indent="0" marL="0">
+              <a:buNone/>
+            </a:pPr>
+            <a:r>
+              <a:rPr lang="en-US" sz="1400" dirty="0">
+                <a:solidFill>
+                  <a:srgbClr val="6E6E73"/>
+                </a:solidFill>
+                <a:latin typeface="D-DIN" pitchFamily="34" charset="0"/>
+                <a:ea typeface="D-DIN" pitchFamily="34" charset="-122"/>
+                <a:cs typeface="D-DIN" pitchFamily="34" charset="-120"/>
+              </a:rPr>
+              <a:t>08</a:t>
+            </a:r>
+            <a:endParaRPr lang="en-US" sz="1400" dirty="0"/>
+          </a:p>
+        </p:txBody>
+      </p:sp>
+      <p:sp>
+        <p:nvSpPr>
+          <p:cNvPr id="21" name="Text 18"/>
+          <p:cNvSpPr/>
+          <p:nvPr/>
+        </p:nvSpPr>
+        <p:spPr>
+          <a:xfrm>
+            <a:off x="9464040" y="2834640"/>
+            <a:ext cx="2194560" cy="502920"/>
+          </a:xfrm>
+          <a:prstGeom prst="rect">
+            <a:avLst/>
+          </a:prstGeom>
+          <a:noFill/>
+          <a:ln/>
+        </p:spPr>
+        <p:txBody>
+          <a:bodyPr wrap="square" lIns="0" tIns="0" rIns="0" bIns="0" rtlCol="0" anchor="t"/>
+          <a:lstStyle/>
+          <a:p>
+            <a:pPr indent="0" marL="0">
+              <a:buNone/>
+            </a:pPr>
+            <a:r>
+              <a:rPr lang="en-US" sz="2200" b="1" spc="-60" kern="0" dirty="0">
+                <a:solidFill>
+                  <a:srgbClr val="1D1D1F"/>
+                </a:solidFill>
+                <a:latin typeface="Inter Display" pitchFamily="34" charset="0"/>
+                <a:ea typeface="Inter Display" pitchFamily="34" charset="-122"/>
+                <a:cs typeface="Inter Display" pitchFamily="34" charset="-120"/>
+              </a:rPr>
+              <a:t>Finanziamento</a:t>
+            </a:r>
+            <a:endParaRPr lang="en-US" sz="2200" dirty="0"/>
+          </a:p>
+        </p:txBody>
+      </p:sp>
+      <p:sp>
+        <p:nvSpPr>
+          <p:cNvPr id="22" name="Text 19"/>
+          <p:cNvSpPr/>
+          <p:nvPr/>
+        </p:nvSpPr>
+        <p:spPr>
+          <a:xfrm>
+            <a:off x="548640" y="3749040"/>
+            <a:ext cx="548640" cy="457200"/>
+          </a:xfrm>
+          <a:prstGeom prst="rect">
+            <a:avLst/>
+          </a:prstGeom>
+          <a:noFill/>
+          <a:ln/>
+        </p:spPr>
+        <p:txBody>
+          <a:bodyPr wrap="square" lIns="0" tIns="0" rIns="0" bIns="0" rtlCol="0" anchor="t"/>
+          <a:lstStyle/>
+          <a:p>
+            <a:pPr indent="0" marL="0">
+              <a:buNone/>
+            </a:pPr>
+            <a:r>
+              <a:rPr lang="en-US" sz="1400" dirty="0">
+                <a:solidFill>
+                  <a:srgbClr val="6E6E73"/>
+                </a:solidFill>
+                <a:latin typeface="D-DIN" pitchFamily="34" charset="0"/>
+                <a:ea typeface="D-DIN" pitchFamily="34" charset="-122"/>
+                <a:cs typeface="D-DIN" pitchFamily="34" charset="-120"/>
+              </a:rPr>
+              <a:t>09</a:t>
+            </a:r>
+            <a:endParaRPr lang="en-US" sz="1400" dirty="0"/>
+          </a:p>
+        </p:txBody>
+      </p:sp>
+      <p:sp>
+        <p:nvSpPr>
+          <p:cNvPr id="23" name="Text 20"/>
+          <p:cNvSpPr/>
+          <p:nvPr/>
+        </p:nvSpPr>
+        <p:spPr>
+          <a:xfrm>
+            <a:off x="1097280" y="3703320"/>
+            <a:ext cx="2194560" cy="502920"/>
+          </a:xfrm>
+          <a:prstGeom prst="rect">
+            <a:avLst/>
+          </a:prstGeom>
+          <a:noFill/>
+          <a:ln/>
+        </p:spPr>
+        <p:txBody>
+          <a:bodyPr wrap="square" lIns="0" tIns="0" rIns="0" bIns="0" rtlCol="0" anchor="t"/>
+          <a:lstStyle/>
+          <a:p>
+            <a:pPr indent="0" marL="0">
+              <a:buNone/>
+            </a:pPr>
+            <a:r>
+              <a:rPr lang="en-US" sz="2200" b="1" spc="-60" kern="0" dirty="0">
+                <a:solidFill>
+                  <a:srgbClr val="1D1D1F"/>
+                </a:solidFill>
+                <a:latin typeface="Inter Display" pitchFamily="34" charset="0"/>
+                <a:ea typeface="Inter Display" pitchFamily="34" charset="-122"/>
+                <a:cs typeface="Inter Display" pitchFamily="34" charset="-120"/>
+              </a:rPr>
+              <a:t>Sinergie</a:t>
+            </a:r>
+            <a:endParaRPr lang="en-US" sz="2200" dirty="0"/>
+          </a:p>
+        </p:txBody>
+      </p:sp>
+      <p:sp>
+        <p:nvSpPr>
+          <p:cNvPr id="24" name="Text 21"/>
+          <p:cNvSpPr/>
+          <p:nvPr/>
+        </p:nvSpPr>
+        <p:spPr>
+          <a:xfrm>
+            <a:off x="3337560" y="3749040"/>
+            <a:ext cx="548640" cy="457200"/>
+          </a:xfrm>
+          <a:prstGeom prst="rect">
+            <a:avLst/>
+          </a:prstGeom>
+          <a:noFill/>
+          <a:ln/>
+        </p:spPr>
+        <p:txBody>
+          <a:bodyPr wrap="square" lIns="0" tIns="0" rIns="0" bIns="0" rtlCol="0" anchor="t"/>
+          <a:lstStyle/>
+          <a:p>
+            <a:pPr indent="0" marL="0">
+              <a:buNone/>
+            </a:pPr>
+            <a:r>
+              <a:rPr lang="en-US" sz="1400" dirty="0">
+                <a:solidFill>
+                  <a:srgbClr val="6E6E73"/>
+                </a:solidFill>
+                <a:latin typeface="D-DIN" pitchFamily="34" charset="0"/>
+                <a:ea typeface="D-DIN" pitchFamily="34" charset="-122"/>
+                <a:cs typeface="D-DIN" pitchFamily="34" charset="-120"/>
+              </a:rPr>
+              <a:t>10</a:t>
+            </a:r>
+            <a:endParaRPr lang="en-US" sz="1400" dirty="0"/>
+          </a:p>
+        </p:txBody>
+      </p:sp>
+      <p:sp>
+        <p:nvSpPr>
+          <p:cNvPr id="25" name="Text 22"/>
+          <p:cNvSpPr/>
+          <p:nvPr/>
+        </p:nvSpPr>
+        <p:spPr>
+          <a:xfrm>
+            <a:off x="3886200" y="3703320"/>
+            <a:ext cx="2194560" cy="502920"/>
+          </a:xfrm>
+          <a:prstGeom prst="rect">
+            <a:avLst/>
+          </a:prstGeom>
+          <a:noFill/>
+          <a:ln/>
+        </p:spPr>
+        <p:txBody>
+          <a:bodyPr wrap="square" lIns="0" tIns="0" rIns="0" bIns="0" rtlCol="0" anchor="t"/>
+          <a:lstStyle/>
+          <a:p>
+            <a:pPr indent="0" marL="0">
+              <a:buNone/>
+            </a:pPr>
+            <a:r>
+              <a:rPr lang="en-US" sz="2200" b="1" spc="-60" kern="0" dirty="0">
+                <a:solidFill>
+                  <a:srgbClr val="1D1D1F"/>
+                </a:solidFill>
+                <a:latin typeface="Inter Display" pitchFamily="34" charset="0"/>
+                <a:ea typeface="Inter Display" pitchFamily="34" charset="-122"/>
+                <a:cs typeface="Inter Display" pitchFamily="34" charset="-120"/>
+              </a:rPr>
+              <a:t>Ponte</a:t>
+            </a:r>
+            <a:endParaRPr lang="en-US" sz="2200" dirty="0"/>
+          </a:p>
+        </p:txBody>
+      </p:sp>
+      <p:sp>
+        <p:nvSpPr>
+          <p:cNvPr id="26" name="Text 23"/>
+          <p:cNvSpPr/>
+          <p:nvPr/>
+        </p:nvSpPr>
+        <p:spPr>
+          <a:xfrm>
+            <a:off x="6126480" y="3749040"/>
+            <a:ext cx="548640" cy="457200"/>
+          </a:xfrm>
+          <a:prstGeom prst="rect">
+            <a:avLst/>
+          </a:prstGeom>
+          <a:noFill/>
+          <a:ln/>
+        </p:spPr>
+        <p:txBody>
+          <a:bodyPr wrap="square" lIns="0" tIns="0" rIns="0" bIns="0" rtlCol="0" anchor="t"/>
+          <a:lstStyle/>
+          <a:p>
+            <a:pPr indent="0" marL="0">
+              <a:buNone/>
+            </a:pPr>
+            <a:r>
+              <a:rPr lang="en-US" sz="1400" dirty="0">
+                <a:solidFill>
+                  <a:srgbClr val="6E6E73"/>
+                </a:solidFill>
+                <a:latin typeface="D-DIN" pitchFamily="34" charset="0"/>
+                <a:ea typeface="D-DIN" pitchFamily="34" charset="-122"/>
+                <a:cs typeface="D-DIN" pitchFamily="34" charset="-120"/>
+              </a:rPr>
+              <a:t>11</a:t>
+            </a:r>
+            <a:endParaRPr lang="en-US" sz="1400" dirty="0"/>
+          </a:p>
+        </p:txBody>
+      </p:sp>
+      <p:sp>
+        <p:nvSpPr>
+          <p:cNvPr id="27" name="Text 24"/>
+          <p:cNvSpPr/>
+          <p:nvPr/>
+        </p:nvSpPr>
+        <p:spPr>
+          <a:xfrm>
+            <a:off x="6675120" y="3703320"/>
+            <a:ext cx="2194560" cy="502920"/>
+          </a:xfrm>
+          <a:prstGeom prst="rect">
+            <a:avLst/>
+          </a:prstGeom>
+          <a:noFill/>
+          <a:ln/>
+        </p:spPr>
+        <p:txBody>
+          <a:bodyPr wrap="square" lIns="0" tIns="0" rIns="0" bIns="0" rtlCol="0" anchor="t"/>
+          <a:lstStyle/>
+          <a:p>
+            <a:pPr indent="0" marL="0">
+              <a:buNone/>
+            </a:pPr>
+            <a:r>
+              <a:rPr lang="en-US" sz="2200" b="1" spc="-60" kern="0" dirty="0">
+                <a:solidFill>
+                  <a:srgbClr val="1D1D1F"/>
+                </a:solidFill>
+                <a:latin typeface="Inter Display" pitchFamily="34" charset="0"/>
+                <a:ea typeface="Inter Display" pitchFamily="34" charset="-122"/>
+                <a:cs typeface="Inter Display" pitchFamily="34" charset="-120"/>
+              </a:rPr>
+              <a:t>Fusione</a:t>
+            </a:r>
+            <a:endParaRPr lang="en-US" sz="2200" dirty="0"/>
+          </a:p>
+        </p:txBody>
+      </p:sp>
+      <p:sp>
+        <p:nvSpPr>
+          <p:cNvPr id="28" name="Text 25"/>
+          <p:cNvSpPr/>
+          <p:nvPr/>
+        </p:nvSpPr>
+        <p:spPr>
+          <a:xfrm>
+            <a:off x="8915400" y="3749040"/>
+            <a:ext cx="548640" cy="457200"/>
+          </a:xfrm>
+          <a:prstGeom prst="rect">
+            <a:avLst/>
+          </a:prstGeom>
+          <a:noFill/>
+          <a:ln/>
+        </p:spPr>
+        <p:txBody>
+          <a:bodyPr wrap="square" lIns="0" tIns="0" rIns="0" bIns="0" rtlCol="0" anchor="t"/>
+          <a:lstStyle/>
+          <a:p>
+            <a:pPr indent="0" marL="0">
+              <a:buNone/>
+            </a:pPr>
+            <a:r>
+              <a:rPr lang="en-US" sz="1400" dirty="0">
+                <a:solidFill>
+                  <a:srgbClr val="6E6E73"/>
+                </a:solidFill>
+                <a:latin typeface="D-DIN" pitchFamily="34" charset="0"/>
+                <a:ea typeface="D-DIN" pitchFamily="34" charset="-122"/>
+                <a:cs typeface="D-DIN" pitchFamily="34" charset="-120"/>
+              </a:rPr>
+              <a:t>12</a:t>
+            </a:r>
+            <a:endParaRPr lang="en-US" sz="1400" dirty="0"/>
+          </a:p>
+        </p:txBody>
+      </p:sp>
+      <p:sp>
+        <p:nvSpPr>
+          <p:cNvPr id="29" name="Text 26"/>
+          <p:cNvSpPr/>
+          <p:nvPr/>
+        </p:nvSpPr>
+        <p:spPr>
+          <a:xfrm>
+            <a:off x="9464040" y="3703320"/>
+            <a:ext cx="2194560" cy="502920"/>
+          </a:xfrm>
+          <a:prstGeom prst="rect">
+            <a:avLst/>
+          </a:prstGeom>
+          <a:noFill/>
+          <a:ln/>
+        </p:spPr>
+        <p:txBody>
+          <a:bodyPr wrap="square" lIns="0" tIns="0" rIns="0" bIns="0" rtlCol="0" anchor="t"/>
+          <a:lstStyle/>
+          <a:p>
+            <a:pPr indent="0" marL="0">
+              <a:buNone/>
+            </a:pPr>
+            <a:r>
+              <a:rPr lang="en-US" sz="2200" b="1" spc="-60" kern="0" dirty="0">
+                <a:solidFill>
+                  <a:srgbClr val="1D1D1F"/>
+                </a:solidFill>
+                <a:latin typeface="Inter Display" pitchFamily="34" charset="0"/>
+                <a:ea typeface="Inter Display" pitchFamily="34" charset="-122"/>
+                <a:cs typeface="Inter Display" pitchFamily="34" charset="-120"/>
+              </a:rPr>
+              <a:t>Conglomerati</a:t>
+            </a:r>
+            <a:endParaRPr lang="en-US" sz="2200" dirty="0"/>
+          </a:p>
+        </p:txBody>
+      </p:sp>
+      <p:sp>
+        <p:nvSpPr>
+          <p:cNvPr id="30" name="Text 27"/>
+          <p:cNvSpPr/>
+          <p:nvPr/>
+        </p:nvSpPr>
+        <p:spPr>
+          <a:xfrm>
+            <a:off x="548640" y="4800600"/>
+            <a:ext cx="3200400" cy="914400"/>
+          </a:xfrm>
+          <a:prstGeom prst="rect">
+            <a:avLst/>
+          </a:prstGeom>
+          <a:noFill/>
+          <a:ln/>
+        </p:spPr>
+        <p:txBody>
+          <a:bodyPr wrap="square" lIns="0" tIns="0" rIns="0" bIns="0" rtlCol="0" anchor="b"/>
+          <a:lstStyle/>
+          <a:p>
+            <a:pPr indent="0" marL="0">
+              <a:buNone/>
+            </a:pPr>
+            <a:r>
+              <a:rPr lang="en-US" sz="6000" b="1" spc="-60" kern="0" dirty="0">
+                <a:solidFill>
+                  <a:srgbClr val="0B1F3A"/>
+                </a:solidFill>
+                <a:latin typeface="Inter Display" pitchFamily="34" charset="0"/>
+                <a:ea typeface="Inter Display" pitchFamily="34" charset="-122"/>
+                <a:cs typeface="Inter Display" pitchFamily="34" charset="-120"/>
+              </a:rPr>
+              <a:t>2.000</a:t>
+            </a:r>
+            <a:endParaRPr lang="en-US" sz="6000" dirty="0"/>
+          </a:p>
+        </p:txBody>
+      </p:sp>
+      <p:sp>
+        <p:nvSpPr>
+          <p:cNvPr id="31" name="Text 28"/>
+          <p:cNvSpPr/>
+          <p:nvPr/>
+        </p:nvSpPr>
+        <p:spPr>
+          <a:xfrm>
+            <a:off x="3657600" y="5120640"/>
+            <a:ext cx="7315200" cy="457200"/>
+          </a:xfrm>
+          <a:prstGeom prst="rect">
+            <a:avLst/>
+          </a:prstGeom>
+          <a:noFill/>
+          <a:ln/>
+        </p:spPr>
+        <p:txBody>
+          <a:bodyPr wrap="square" lIns="0" tIns="0" rIns="0" bIns="0" rtlCol="0" anchor="t"/>
+          <a:lstStyle/>
+          <a:p>
+            <a:pPr indent="0" marL="0">
+              <a:buNone/>
+            </a:pPr>
+            <a:r>
+              <a:rPr lang="en-US" sz="1800" dirty="0">
+                <a:solidFill>
+                  <a:srgbClr val="6E6E73"/>
+                </a:solidFill>
+                <a:latin typeface="Inter" pitchFamily="34" charset="0"/>
+                <a:ea typeface="Inter" pitchFamily="34" charset="-122"/>
+                <a:cs typeface="Inter" pitchFamily="34" charset="-120"/>
+              </a:rPr>
+              <a:t>formule, zero errori; Excel e Python coincidono al centesimo</a:t>
+            </a:r>
+            <a:endParaRPr lang="en-US" sz="1800" dirty="0"/>
+          </a:p>
+        </p:txBody>
+      </p:sp>
+      <p:sp>
+        <p:nvSpPr>
+          <p:cNvPr id="25" name="Slide Number Placeholder 0"/>
+          <p:cNvSpPr>
+            <a:spLocks noGrp="1"/>
+          </p:cNvSpPr>
+          <p:nvPr>
+            <p:ph type="sldNum" sz="quarter" idx="4294967295"/>
+          </p:nvPr>
+        </p:nvSpPr>
+        <p:spPr>
+          <a:xfrm>
+            <a:off x="11274552" y="6400800"/>
+            <a:ext cx="365760" cy="228600"/>
+          </a:xfrm>
+          <a:prstGeom prst="rect">
+            <a:avLst/>
+          </a:prstGeom>
+          <a:extLst>
+            <a:ext uri="{C572A759-6A51-4108-AA02-DFA0A04FC94B}">
+              <ma14:wrappingTextBoxFlag xmlns:ma14="http://schemas.microsoft.com/office/mac/drawingml/2011/main" val="0"/>
+            </a:ext>
+          </a:extLst>
+        </p:spPr>
+        <p:txBody>
+          <a:bodyPr/>
+          <a:lstStyle>
+            <a:lvl1pPr>
+              <a:defRPr sz="800">
+                <a:solidFill>
+                  <a:srgbClr val="6E6E73"/>
+                </a:solidFill>
+                <a:latin typeface="Inter"/>
+                <a:ea typeface="Inter"/>
+                <a:cs typeface="Inter"/>
+              </a:defRPr>
+            </a:lvl1pPr>
+          </a:lstStyle>
+          <a:p>
+            <a:pPr algn="r"/>
+            <a:fld id="{F7021451-1387-4CA6-816F-3879F97B5CBC}" type="slidenum">
+              <a:rPr b="0" lang="en-US"/>
+              <a:t>26</a:t>
             </a:fld>
             <a:endParaRPr lang="en-US"/>
           </a:p>

--- a/documenti/SpaceX_prezzo_e_valore.pptx
+++ b/documenti/SpaceX_prezzo_e_valore.pptx
@@ -967,7 +967,7 @@
           <a:p>
             <a:r>
               <a:rPr lang="en-US" dirty="0"/>
-              <a:t>Lo stesso risultato visto da un'altra parte. Nel mio DCF l'AI nel 2036 vale circa 6 volte l'EBITDA, il multiplo di un'impresa matura. Gli hyperscaler oggi valgono 22 volte. Se l'AI a regime valesse come loro, ma pesata per le probabilità, SpaceX varrebbe 103-111 dollari: ancora sotto il collocamento. Se in più l'AI riuscisse di sicuro, 152-183. Il prezzo, 167,60 $, sta esattamente lì: il mercato paga un'AI che vale come Microsoft e che riesce con certezza.</a:t>
+              <a:t>Lo stesso risultato visto da un'altra parte, e attenzione: non contraddice la slide 6. Lì il multiplo era applicato ai ricavi AI di oggi, 17 miliardi; qui ai ricavi che l'AI avrebbe nel 2036 se riesce, 550 miliardi. Nel mio DCF l'AI nel 2036 vale circa 6 volte l'EBITDA, il multiplo di un'impresa matura. Gli hyperscaler oggi valgono 22 volte. Se l'AI a regime valesse come loro, ma pesata per le probabilità, SpaceX varrebbe 103-111 dollari: ancora sotto il collocamento. Se in più l'AI riuscisse di sicuro, 152-183. Il prezzo, 167,60 $, sta esattamente lì: il mercato paga un'AI che vale come Microsoft e che riesce con certezza.</a:t>
             </a:r>
             <a:endParaRPr lang="en-US" dirty="0"/>
           </a:p>
@@ -2463,7 +2463,7 @@
           <a:p>
             <a:r>
               <a:rPr lang="en-US" dirty="0"/>
-              <a:t>Applico i tre panieri ai ricavi di quest'anno. SpaceX vale fra 144 e 187 miliardi, cioè 15-19 dollari per azione. Il mercato la paga più di dieci volte tanto. Anche valutando l'AI come OpenAI e Anthropic, fra 20 e 27 volte i ricavi, arrivo a 35-44 dollari. E per arrivare al prezzo Starlink dovrebbe valere 96x i ricavi, contro 2,7 del suo paniere, e fra gli operatori con ricavi veri nessuno supera 7,5. Quindi il prezzo non è un prezzo relativo. Però i multipli di imprese mature non vedono la crescita: per questo serve il DCF.</a:t>
+              <a:t>Applico i tre panieri ai ricavi di quest'anno, quelli di oggi. SpaceX vale fra 144 e 187 miliardi, cioè 15-19 dollari per azione. Il mercato la paga più di dieci volte tanto. Anche valutando l'AI come OpenAI e Anthropic, fra 20 e 27 volte i ricavi, arrivo a 35-44 dollari. E per arrivare al prezzo Starlink dovrebbe valere 96x i ricavi, contro 2,7 del suo paniere, e fra gli operatori con ricavi veri nessuno supera 7,5. Quindi il prezzo non è un prezzo relativo. Però i multipli di imprese mature non vedono la crescita: per questo serve il DCF.</a:t>
             </a:r>
             <a:endParaRPr lang="en-US" dirty="0"/>
           </a:p>
@@ -6749,6 +6749,45 @@
         </p:nvSpPr>
         <p:spPr>
           <a:xfrm>
+            <a:off x="548640" y="1600200"/>
+            <a:ext cx="11064240" cy="320040"/>
+          </a:xfrm>
+          <a:prstGeom prst="rect">
+            <a:avLst/>
+          </a:prstGeom>
+          <a:noFill/>
+          <a:ln/>
+        </p:spPr>
+        <p:txBody>
+          <a:bodyPr wrap="square" lIns="0" tIns="0" rIns="0" bIns="0" rtlCol="0" anchor="t"/>
+          <a:lstStyle/>
+          <a:p>
+            <a:pPr indent="0" marL="0">
+              <a:buNone/>
+            </a:pPr>
+            <a:r>
+              <a:rPr lang="en-US" sz="1400" dirty="0">
+                <a:solidFill>
+                  <a:srgbClr val="86868B"/>
+                </a:solidFill>
+                <a:latin typeface="Inter" pitchFamily="34" charset="0"/>
+                <a:ea typeface="Inter" pitchFamily="34" charset="-122"/>
+                <a:cs typeface="Inter" pitchFamily="34" charset="-120"/>
+              </a:rPr>
+              <a:t>Multipli dei comparabili sui ricavi AI del 2036 se riesce (550 mld), non su quelli di oggi (17 mld, slide 6)</a:t>
+            </a:r>
+            <a:endParaRPr lang="en-US" sz="1400" dirty="0"/>
+          </a:p>
+        </p:txBody>
+      </p:sp>
+      <p:sp>
+        <p:nvSpPr>
+          <p:cNvPr id="7" name="Text 4"/>
+          <p:cNvSpPr/>
+          <p:nvPr/>
+        </p:nvSpPr>
+        <p:spPr>
+          <a:xfrm>
             <a:off x="548640" y="2148840"/>
             <a:ext cx="6400800" cy="274320"/>
           </a:xfrm>
@@ -6782,7 +6821,7 @@
       </p:sp>
       <p:sp>
         <p:nvSpPr>
-          <p:cNvPr id="7" name="Text 4"/>
+          <p:cNvPr id="8" name="Text 5"/>
           <p:cNvSpPr/>
           <p:nvPr/>
         </p:nvSpPr>
@@ -6821,7 +6860,7 @@
       </p:sp>
       <p:sp>
         <p:nvSpPr>
-          <p:cNvPr id="8" name="Shape 5"/>
+          <p:cNvPr id="9" name="Shape 6"/>
           <p:cNvSpPr/>
           <p:nvPr/>
         </p:nvSpPr>
@@ -6844,7 +6883,7 @@
       </p:sp>
       <p:sp>
         <p:nvSpPr>
-          <p:cNvPr id="9" name="Text 6"/>
+          <p:cNvPr id="10" name="Text 7"/>
           <p:cNvSpPr/>
           <p:nvPr/>
         </p:nvSpPr>
@@ -6883,7 +6922,7 @@
       </p:sp>
       <p:sp>
         <p:nvSpPr>
-          <p:cNvPr id="10" name="Text 7"/>
+          <p:cNvPr id="11" name="Text 8"/>
           <p:cNvSpPr/>
           <p:nvPr/>
         </p:nvSpPr>
@@ -6922,7 +6961,7 @@
       </p:sp>
       <p:sp>
         <p:nvSpPr>
-          <p:cNvPr id="11" name="Shape 8"/>
+          <p:cNvPr id="12" name="Shape 9"/>
           <p:cNvSpPr/>
           <p:nvPr/>
         </p:nvSpPr>
@@ -6945,7 +6984,7 @@
       </p:sp>
       <p:sp>
         <p:nvSpPr>
-          <p:cNvPr id="12" name="Text 9"/>
+          <p:cNvPr id="13" name="Text 10"/>
           <p:cNvSpPr/>
           <p:nvPr/>
         </p:nvSpPr>
@@ -6984,7 +7023,7 @@
       </p:sp>
       <p:sp>
         <p:nvSpPr>
-          <p:cNvPr id="13" name="Text 10"/>
+          <p:cNvPr id="14" name="Text 11"/>
           <p:cNvSpPr/>
           <p:nvPr/>
         </p:nvSpPr>
@@ -7023,7 +7062,7 @@
       </p:sp>
       <p:sp>
         <p:nvSpPr>
-          <p:cNvPr id="14" name="Shape 11"/>
+          <p:cNvPr id="15" name="Shape 12"/>
           <p:cNvSpPr/>
           <p:nvPr/>
         </p:nvSpPr>
@@ -7046,7 +7085,7 @@
       </p:sp>
       <p:sp>
         <p:nvSpPr>
-          <p:cNvPr id="15" name="Text 12"/>
+          <p:cNvPr id="16" name="Text 13"/>
           <p:cNvSpPr/>
           <p:nvPr/>
         </p:nvSpPr>
@@ -7085,7 +7124,7 @@
       </p:sp>
       <p:sp>
         <p:nvSpPr>
-          <p:cNvPr id="16" name="Text 13"/>
+          <p:cNvPr id="17" name="Text 14"/>
           <p:cNvSpPr/>
           <p:nvPr/>
         </p:nvSpPr>
@@ -7124,7 +7163,7 @@
       </p:sp>
       <p:sp>
         <p:nvSpPr>
-          <p:cNvPr id="17" name="Shape 14"/>
+          <p:cNvPr id="18" name="Shape 15"/>
           <p:cNvSpPr/>
           <p:nvPr/>
         </p:nvSpPr>
@@ -7147,7 +7186,7 @@
       </p:sp>
       <p:sp>
         <p:nvSpPr>
-          <p:cNvPr id="18" name="Text 15"/>
+          <p:cNvPr id="19" name="Text 16"/>
           <p:cNvSpPr/>
           <p:nvPr/>
         </p:nvSpPr>
@@ -7186,7 +7225,7 @@
       </p:sp>
       <p:sp>
         <p:nvSpPr>
-          <p:cNvPr id="19" name="Text 16"/>
+          <p:cNvPr id="20" name="Text 17"/>
           <p:cNvSpPr/>
           <p:nvPr/>
         </p:nvSpPr>
@@ -7225,7 +7264,7 @@
       </p:sp>
       <p:sp>
         <p:nvSpPr>
-          <p:cNvPr id="20" name="Shape 17"/>
+          <p:cNvPr id="21" name="Shape 18"/>
           <p:cNvSpPr/>
           <p:nvPr/>
         </p:nvSpPr>
@@ -7248,7 +7287,7 @@
       </p:sp>
       <p:sp>
         <p:nvSpPr>
-          <p:cNvPr id="21" name="Text 18"/>
+          <p:cNvPr id="22" name="Text 19"/>
           <p:cNvSpPr/>
           <p:nvPr/>
         </p:nvSpPr>
@@ -19775,7 +19814,7 @@
                 <a:ea typeface="Inter" pitchFamily="34" charset="-122"/>
                 <a:cs typeface="Inter" pitchFamily="34" charset="-120"/>
               </a:rPr>
-              <a:t>SpaceX ai multipli dei suoi tre panieri</a:t>
+              <a:t>SpaceX ai multipli dei suoi tre panieri, sui ricavi di oggi (2026)</a:t>
             </a:r>
             <a:endParaRPr lang="en-US" sz="1700" dirty="0"/>
           </a:p>
@@ -19853,7 +19892,7 @@
                 <a:ea typeface="Inter" pitchFamily="34" charset="-122"/>
                 <a:cs typeface="Inter" pitchFamily="34" charset="-120"/>
               </a:rPr>
-              <a:t>con l'AI valutata come OpenAI e Anthropic</a:t>
+              <a:t>con l'AI valutata come OpenAI e Anthropic, sui suoi ricavi di oggi (17 mld)</a:t>
             </a:r>
             <a:endParaRPr lang="en-US" sz="1700" dirty="0"/>
           </a:p>
